--- a/Light Transport Simulation with Vertex Connection and Merging.pptx
+++ b/Light Transport Simulation with Vertex Connection and Merging.pptx
@@ -6,7 +6,7 @@
     <p:sldMasterId id="2147483660" r:id="rId2"/>
   </p:sldMasterIdLst>
   <p:notesMasterIdLst>
-    <p:notesMasterId r:id="rId11"/>
+    <p:notesMasterId r:id="rId18"/>
   </p:notesMasterIdLst>
   <p:sldIdLst>
     <p:sldId id="256" r:id="rId3"/>
@@ -15,8 +15,15 @@
     <p:sldId id="259" r:id="rId6"/>
     <p:sldId id="260" r:id="rId7"/>
     <p:sldId id="262" r:id="rId8"/>
-    <p:sldId id="263" r:id="rId9"/>
-    <p:sldId id="261" r:id="rId10"/>
+    <p:sldId id="269" r:id="rId9"/>
+    <p:sldId id="263" r:id="rId10"/>
+    <p:sldId id="264" r:id="rId11"/>
+    <p:sldId id="265" r:id="rId12"/>
+    <p:sldId id="266" r:id="rId13"/>
+    <p:sldId id="267" r:id="rId14"/>
+    <p:sldId id="268" r:id="rId15"/>
+    <p:sldId id="270" r:id="rId16"/>
+    <p:sldId id="261" r:id="rId17"/>
   </p:sldIdLst>
   <p:sldSz cx="12192000" cy="6858000"/>
   <p:notesSz cx="6858000" cy="9144000"/>
@@ -115,6 +122,11 @@
       </a:defRPr>
     </a:lvl9pPr>
   </p:defaultTextStyle>
+  <p:extLst>
+    <p:ext uri="{EFAFB233-063F-42B5-8137-9DF3F51BA10A}">
+      <p15:sldGuideLst xmlns:p15="http://schemas.microsoft.com/office/powerpoint/2012/main"/>
+    </p:ext>
+  </p:extLst>
 </p:presentation>
 </file>
 
@@ -200,7 +212,7 @@
           <a:p>
             <a:fld id="{7893D133-823F-4F52-B028-FA93482B56DD}" type="datetimeFigureOut">
               <a:rPr kumimoji="1" lang="ja-JP" altLang="en-US" smtClean="0"/>
-              <a:t>2026/3/20</a:t>
+              <a:t>2026/3/24</a:t>
             </a:fld>
             <a:endParaRPr kumimoji="1" lang="ja-JP" altLang="en-US"/>
           </a:p>
@@ -790,7 +802,7 @@
           <a:p>
             <a:fld id="{24B1D04C-D4F9-452A-B906-F9D2E05F382E}" type="datetimeFigureOut">
               <a:rPr kumimoji="1" lang="ja-JP" altLang="en-US" smtClean="0"/>
-              <a:t>2026/3/20</a:t>
+              <a:t>2026/3/24</a:t>
             </a:fld>
             <a:endParaRPr kumimoji="1" lang="ja-JP" altLang="en-US"/>
           </a:p>
@@ -1020,7 +1032,7 @@
           <a:p>
             <a:fld id="{24B1D04C-D4F9-452A-B906-F9D2E05F382E}" type="datetimeFigureOut">
               <a:rPr kumimoji="1" lang="ja-JP" altLang="en-US" smtClean="0"/>
-              <a:t>2026/3/20</a:t>
+              <a:t>2026/3/24</a:t>
             </a:fld>
             <a:endParaRPr kumimoji="1" lang="ja-JP" altLang="en-US"/>
           </a:p>
@@ -1260,7 +1272,7 @@
           <a:p>
             <a:fld id="{24B1D04C-D4F9-452A-B906-F9D2E05F382E}" type="datetimeFigureOut">
               <a:rPr kumimoji="1" lang="ja-JP" altLang="en-US" smtClean="0"/>
-              <a:t>2026/3/20</a:t>
+              <a:t>2026/3/24</a:t>
             </a:fld>
             <a:endParaRPr kumimoji="1" lang="ja-JP" altLang="en-US"/>
           </a:p>
@@ -1480,7 +1492,7 @@
           <a:p>
             <a:fld id="{9C16B395-6D35-4546-B294-FB06DF790840}" type="datetime1">
               <a:rPr kumimoji="1" lang="ja-JP" altLang="en-US" smtClean="0"/>
-              <a:t>2026/3/20</a:t>
+              <a:t>2026/3/24</a:t>
             </a:fld>
             <a:endParaRPr kumimoji="1" lang="ja-JP" altLang="en-US"/>
           </a:p>
@@ -2062,7 +2074,7 @@
           <a:p>
             <a:fld id="{A817B2B4-6A7D-4731-81DC-57610CFA3027}" type="datetime1">
               <a:rPr kumimoji="1" lang="ja-JP" altLang="en-US" smtClean="0"/>
-              <a:t>2026/3/20</a:t>
+              <a:t>2026/3/24</a:t>
             </a:fld>
             <a:endParaRPr kumimoji="1" lang="ja-JP" altLang="en-US"/>
           </a:p>
@@ -2399,7 +2411,7 @@
           <a:p>
             <a:fld id="{EF1036F0-5381-44E0-A015-CBD42EDBEC45}" type="datetime1">
               <a:rPr kumimoji="1" lang="ja-JP" altLang="en-US" smtClean="0"/>
-              <a:t>2026/3/20</a:t>
+              <a:t>2026/3/24</a:t>
             </a:fld>
             <a:endParaRPr kumimoji="1" lang="ja-JP" altLang="en-US"/>
           </a:p>
@@ -2883,7 +2895,7 @@
           <a:p>
             <a:fld id="{6CAA4E38-B061-47C5-9F79-5A9746F5CDE5}" type="datetime1">
               <a:rPr kumimoji="1" lang="ja-JP" altLang="en-US" smtClean="0"/>
-              <a:t>2026/3/20</a:t>
+              <a:t>2026/3/24</a:t>
             </a:fld>
             <a:endParaRPr kumimoji="1" lang="ja-JP" altLang="en-US"/>
           </a:p>
@@ -3032,7 +3044,7 @@
           <a:p>
             <a:fld id="{03871810-0526-4256-939F-2D28DFA5615F}" type="datetime1">
               <a:rPr kumimoji="1" lang="ja-JP" altLang="en-US" smtClean="0"/>
-              <a:t>2026/3/20</a:t>
+              <a:t>2026/3/24</a:t>
             </a:fld>
             <a:endParaRPr kumimoji="1" lang="ja-JP" altLang="en-US"/>
           </a:p>
@@ -3153,7 +3165,7 @@
           <a:p>
             <a:fld id="{D29D8516-8AC0-44E8-AB68-6CE99A3A52CB}" type="datetime1">
               <a:rPr kumimoji="1" lang="ja-JP" altLang="en-US" smtClean="0"/>
-              <a:t>2026/3/20</a:t>
+              <a:t>2026/3/24</a:t>
             </a:fld>
             <a:endParaRPr kumimoji="1" lang="ja-JP" altLang="en-US"/>
           </a:p>
@@ -3504,7 +3516,7 @@
           <a:p>
             <a:fld id="{BA0A23C2-F706-4F84-B465-CA89DAFBC4C2}" type="datetime1">
               <a:rPr kumimoji="1" lang="ja-JP" altLang="en-US" smtClean="0"/>
-              <a:t>2026/3/20</a:t>
+              <a:t>2026/3/24</a:t>
             </a:fld>
             <a:endParaRPr kumimoji="1" lang="ja-JP" altLang="en-US"/>
           </a:p>
@@ -3742,7 +3754,7 @@
           <a:p>
             <a:fld id="{24B1D04C-D4F9-452A-B906-F9D2E05F382E}" type="datetimeFigureOut">
               <a:rPr kumimoji="1" lang="ja-JP" altLang="en-US" smtClean="0"/>
-              <a:t>2026/3/20</a:t>
+              <a:t>2026/3/24</a:t>
             </a:fld>
             <a:endParaRPr kumimoji="1" lang="ja-JP" altLang="en-US"/>
           </a:p>
@@ -4030,7 +4042,7 @@
           <a:p>
             <a:fld id="{9B12DFBC-01E8-4E3B-A4B2-3042EC8BF00A}" type="datetime1">
               <a:rPr kumimoji="1" lang="ja-JP" altLang="en-US" smtClean="0"/>
-              <a:t>2026/3/20</a:t>
+              <a:t>2026/3/24</a:t>
             </a:fld>
             <a:endParaRPr kumimoji="1" lang="ja-JP" altLang="en-US"/>
           </a:p>
@@ -4268,7 +4280,7 @@
           <a:p>
             <a:fld id="{B1396C80-74FC-4B1B-8EAB-5BA2D3324131}" type="datetime1">
               <a:rPr kumimoji="1" lang="ja-JP" altLang="en-US" smtClean="0"/>
-              <a:t>2026/3/20</a:t>
+              <a:t>2026/3/24</a:t>
             </a:fld>
             <a:endParaRPr kumimoji="1" lang="ja-JP" altLang="en-US"/>
           </a:p>
@@ -4516,7 +4528,7 @@
           <a:p>
             <a:fld id="{B56F111B-B7F2-4AFA-B2AD-22DD0AE2FAAF}" type="datetime1">
               <a:rPr kumimoji="1" lang="ja-JP" altLang="en-US" smtClean="0"/>
-              <a:t>2026/3/20</a:t>
+              <a:t>2026/3/24</a:t>
             </a:fld>
             <a:endParaRPr kumimoji="1" lang="ja-JP" altLang="en-US"/>
           </a:p>
@@ -4799,7 +4811,7 @@
           <a:p>
             <a:fld id="{24B1D04C-D4F9-452A-B906-F9D2E05F382E}" type="datetimeFigureOut">
               <a:rPr kumimoji="1" lang="ja-JP" altLang="en-US" smtClean="0"/>
-              <a:t>2026/3/20</a:t>
+              <a:t>2026/3/24</a:t>
             </a:fld>
             <a:endParaRPr kumimoji="1" lang="ja-JP" altLang="en-US"/>
           </a:p>
@@ -5128,7 +5140,7 @@
           <a:p>
             <a:fld id="{24B1D04C-D4F9-452A-B906-F9D2E05F382E}" type="datetimeFigureOut">
               <a:rPr kumimoji="1" lang="ja-JP" altLang="en-US" smtClean="0"/>
-              <a:t>2026/3/20</a:t>
+              <a:t>2026/3/24</a:t>
             </a:fld>
             <a:endParaRPr kumimoji="1" lang="ja-JP" altLang="en-US"/>
           </a:p>
@@ -5604,7 +5616,7 @@
           <a:p>
             <a:fld id="{24B1D04C-D4F9-452A-B906-F9D2E05F382E}" type="datetimeFigureOut">
               <a:rPr kumimoji="1" lang="ja-JP" altLang="en-US" smtClean="0"/>
-              <a:t>2026/3/20</a:t>
+              <a:t>2026/3/24</a:t>
             </a:fld>
             <a:endParaRPr kumimoji="1" lang="ja-JP" altLang="en-US"/>
           </a:p>
@@ -5745,7 +5757,7 @@
           <a:p>
             <a:fld id="{24B1D04C-D4F9-452A-B906-F9D2E05F382E}" type="datetimeFigureOut">
               <a:rPr kumimoji="1" lang="ja-JP" altLang="en-US" smtClean="0"/>
-              <a:t>2026/3/20</a:t>
+              <a:t>2026/3/24</a:t>
             </a:fld>
             <a:endParaRPr kumimoji="1" lang="ja-JP" altLang="en-US"/>
           </a:p>
@@ -5858,7 +5870,7 @@
           <a:p>
             <a:fld id="{24B1D04C-D4F9-452A-B906-F9D2E05F382E}" type="datetimeFigureOut">
               <a:rPr kumimoji="1" lang="ja-JP" altLang="en-US" smtClean="0"/>
-              <a:t>2026/3/20</a:t>
+              <a:t>2026/3/24</a:t>
             </a:fld>
             <a:endParaRPr kumimoji="1" lang="ja-JP" altLang="en-US"/>
           </a:p>
@@ -6201,7 +6213,7 @@
           <a:p>
             <a:fld id="{24B1D04C-D4F9-452A-B906-F9D2E05F382E}" type="datetimeFigureOut">
               <a:rPr kumimoji="1" lang="ja-JP" altLang="en-US" smtClean="0"/>
-              <a:t>2026/3/20</a:t>
+              <a:t>2026/3/24</a:t>
             </a:fld>
             <a:endParaRPr kumimoji="1" lang="ja-JP" altLang="en-US"/>
           </a:p>
@@ -6489,7 +6501,7 @@
           <a:p>
             <a:fld id="{24B1D04C-D4F9-452A-B906-F9D2E05F382E}" type="datetimeFigureOut">
               <a:rPr kumimoji="1" lang="ja-JP" altLang="en-US" smtClean="0"/>
-              <a:t>2026/3/20</a:t>
+              <a:t>2026/3/24</a:t>
             </a:fld>
             <a:endParaRPr kumimoji="1" lang="ja-JP" altLang="en-US"/>
           </a:p>
@@ -6762,7 +6774,7 @@
           <a:p>
             <a:fld id="{24B1D04C-D4F9-452A-B906-F9D2E05F382E}" type="datetimeFigureOut">
               <a:rPr kumimoji="1" lang="ja-JP" altLang="en-US" smtClean="0"/>
-              <a:t>2026/3/20</a:t>
+              <a:t>2026/3/24</a:t>
             </a:fld>
             <a:endParaRPr kumimoji="1" lang="ja-JP" altLang="en-US"/>
           </a:p>
@@ -7362,7 +7374,7 @@
           <a:p>
             <a:fld id="{8527487B-C611-4154-9D77-DC08D179CD6C}" type="datetime1">
               <a:rPr kumimoji="1" lang="ja-JP" altLang="en-US" smtClean="0"/>
-              <a:t>2026/3/20</a:t>
+              <a:t>2026/3/24</a:t>
             </a:fld>
             <a:endParaRPr kumimoji="1" lang="ja-JP" altLang="en-US"/>
           </a:p>
@@ -8671,276 +8683,7 @@
 </p:sld>
 </file>
 
-<file path=ppt/slides/slide2.xml><?xml version="1.0" encoding="utf-8"?>
-<p:sld xmlns:a="http://schemas.openxmlformats.org/drawingml/2006/main" xmlns:r="http://schemas.openxmlformats.org/officeDocument/2006/relationships" xmlns:p="http://schemas.openxmlformats.org/presentationml/2006/main">
-  <p:cSld>
-    <p:spTree>
-      <p:nvGrpSpPr>
-        <p:cNvPr id="1" name=""/>
-        <p:cNvGrpSpPr/>
-        <p:nvPr/>
-      </p:nvGrpSpPr>
-      <p:grpSpPr>
-        <a:xfrm>
-          <a:off x="0" y="0"/>
-          <a:ext cx="0" cy="0"/>
-          <a:chOff x="0" y="0"/>
-          <a:chExt cx="0" cy="0"/>
-        </a:xfrm>
-      </p:grpSpPr>
-      <p:sp>
-        <p:nvSpPr>
-          <p:cNvPr id="2" name="タイトル 1">
-            <a:extLst>
-              <a:ext uri="{FF2B5EF4-FFF2-40B4-BE49-F238E27FC236}">
-                <a16:creationId xmlns:a16="http://schemas.microsoft.com/office/drawing/2014/main" id="{AD3284C3-A3DC-263F-2D40-BABC2BDB1186}"/>
-              </a:ext>
-            </a:extLst>
-          </p:cNvPr>
-          <p:cNvSpPr>
-            <a:spLocks noGrp="1"/>
-          </p:cNvSpPr>
-          <p:nvPr>
-            <p:ph type="title"/>
-          </p:nvPr>
-        </p:nvSpPr>
-        <p:spPr/>
-        <p:txBody>
-          <a:bodyPr/>
-          <a:lstStyle/>
-          <a:p>
-            <a:r>
-              <a:rPr kumimoji="1" lang="en-US" altLang="ja-JP" dirty="0"/>
-              <a:t>Overview</a:t>
-            </a:r>
-            <a:endParaRPr kumimoji="1" lang="ja-JP" altLang="en-US" dirty="0"/>
-          </a:p>
-        </p:txBody>
-      </p:sp>
-      <p:sp>
-        <p:nvSpPr>
-          <p:cNvPr id="3" name="コンテンツ プレースホルダー 2">
-            <a:extLst>
-              <a:ext uri="{FF2B5EF4-FFF2-40B4-BE49-F238E27FC236}">
-                <a16:creationId xmlns:a16="http://schemas.microsoft.com/office/drawing/2014/main" id="{190438A6-7BF3-8835-F233-2855C7F36C12}"/>
-              </a:ext>
-            </a:extLst>
-          </p:cNvPr>
-          <p:cNvSpPr>
-            <a:spLocks noGrp="1"/>
-          </p:cNvSpPr>
-          <p:nvPr>
-            <p:ph idx="1"/>
-          </p:nvPr>
-        </p:nvSpPr>
-        <p:spPr/>
-        <p:txBody>
-          <a:bodyPr/>
-          <a:lstStyle/>
-          <a:p>
-            <a:r>
-              <a:rPr lang="en-US" altLang="ja-JP" dirty="0"/>
-              <a:t>Robust light transport simulation integrating </a:t>
-            </a:r>
-            <a:br>
-              <a:rPr lang="en-US" altLang="ja-JP" dirty="0"/>
-            </a:br>
-            <a:r>
-              <a:rPr lang="en-US" altLang="ja-JP" dirty="0"/>
-              <a:t>- </a:t>
-            </a:r>
-            <a:r>
-              <a:rPr lang="en-US" altLang="ja-JP" b="1" dirty="0"/>
-              <a:t>Bidirectional path tracing (BPT)</a:t>
-            </a:r>
-            <a:br>
-              <a:rPr lang="en-US" altLang="ja-JP" dirty="0"/>
-            </a:br>
-            <a:r>
-              <a:rPr lang="en-US" altLang="ja-JP" dirty="0"/>
-              <a:t>- </a:t>
-            </a:r>
-            <a:r>
-              <a:rPr lang="en-US" altLang="ja-JP" b="1" dirty="0"/>
-              <a:t>(Progressive) Photon mapping (PPM)</a:t>
-            </a:r>
-            <a:endParaRPr kumimoji="1" lang="ja-JP" altLang="en-US" b="1" dirty="0"/>
-          </a:p>
-        </p:txBody>
-      </p:sp>
-      <p:sp>
-        <p:nvSpPr>
-          <p:cNvPr id="4" name="スライド番号プレースホルダー 3">
-            <a:extLst>
-              <a:ext uri="{FF2B5EF4-FFF2-40B4-BE49-F238E27FC236}">
-                <a16:creationId xmlns:a16="http://schemas.microsoft.com/office/drawing/2014/main" id="{25C9DDA0-DC27-11B6-A399-5B5243675B9A}"/>
-              </a:ext>
-            </a:extLst>
-          </p:cNvPr>
-          <p:cNvSpPr>
-            <a:spLocks noGrp="1"/>
-          </p:cNvSpPr>
-          <p:nvPr>
-            <p:ph type="sldNum" sz="quarter" idx="12"/>
-          </p:nvPr>
-        </p:nvSpPr>
-        <p:spPr/>
-        <p:txBody>
-          <a:bodyPr/>
-          <a:lstStyle/>
-          <a:p>
-            <a:fld id="{05A07A33-D779-4A79-A49C-E26576C728D8}" type="slidenum">
-              <a:rPr lang="ja-JP" altLang="en-US" smtClean="0"/>
-              <a:pPr/>
-              <a:t>2</a:t>
-            </a:fld>
-            <a:endParaRPr lang="ja-JP" altLang="en-US" dirty="0">
-              <a:latin typeface="Calibri" panose="020F0502020204030204" pitchFamily="34" charset="0"/>
-              <a:cs typeface="Calibri" panose="020F0502020204030204" pitchFamily="34" charset="0"/>
-            </a:endParaRPr>
-          </a:p>
-        </p:txBody>
-      </p:sp>
-      <p:pic>
-        <p:nvPicPr>
-          <p:cNvPr id="6" name="図 5">
-            <a:extLst>
-              <a:ext uri="{FF2B5EF4-FFF2-40B4-BE49-F238E27FC236}">
-                <a16:creationId xmlns:a16="http://schemas.microsoft.com/office/drawing/2014/main" id="{DFFE7207-7ABF-A8ED-812E-76D42ED79424}"/>
-              </a:ext>
-            </a:extLst>
-          </p:cNvPr>
-          <p:cNvPicPr>
-            <a:picLocks noChangeAspect="1"/>
-          </p:cNvPicPr>
-          <p:nvPr/>
-        </p:nvPicPr>
-        <p:blipFill>
-          <a:blip r:embed="rId2"/>
-          <a:stretch>
-            <a:fillRect/>
-          </a:stretch>
-        </p:blipFill>
-        <p:spPr>
-          <a:xfrm>
-            <a:off x="716354" y="2673225"/>
-            <a:ext cx="10759291" cy="3764417"/>
-          </a:xfrm>
-          <a:prstGeom prst="rect">
-            <a:avLst/>
-          </a:prstGeom>
-        </p:spPr>
-      </p:pic>
-      <p:sp>
-        <p:nvSpPr>
-          <p:cNvPr id="7" name="正方形/長方形 6">
-            <a:extLst>
-              <a:ext uri="{FF2B5EF4-FFF2-40B4-BE49-F238E27FC236}">
-                <a16:creationId xmlns:a16="http://schemas.microsoft.com/office/drawing/2014/main" id="{5B1360E4-BED2-E39D-502A-3ED512B675A5}"/>
-              </a:ext>
-            </a:extLst>
-          </p:cNvPr>
-          <p:cNvSpPr/>
-          <p:nvPr/>
-        </p:nvSpPr>
-        <p:spPr>
-          <a:xfrm>
-            <a:off x="6095999" y="2673225"/>
-            <a:ext cx="2705101" cy="3764417"/>
-          </a:xfrm>
-          <a:prstGeom prst="rect">
-            <a:avLst/>
-          </a:prstGeom>
-          <a:noFill/>
-          <a:ln w="28575">
-            <a:solidFill>
-              <a:srgbClr val="C00000"/>
-            </a:solidFill>
-          </a:ln>
-        </p:spPr>
-        <p:style>
-          <a:lnRef idx="2">
-            <a:schemeClr val="accent1">
-              <a:shade val="15000"/>
-            </a:schemeClr>
-          </a:lnRef>
-          <a:fillRef idx="1">
-            <a:schemeClr val="accent1"/>
-          </a:fillRef>
-          <a:effectRef idx="0">
-            <a:schemeClr val="accent1"/>
-          </a:effectRef>
-          <a:fontRef idx="minor">
-            <a:schemeClr val="lt1"/>
-          </a:fontRef>
-        </p:style>
-        <p:txBody>
-          <a:bodyPr rtlCol="0" anchor="ctr"/>
-          <a:lstStyle/>
-          <a:p>
-            <a:pPr algn="ctr"/>
-            <a:endParaRPr kumimoji="1" lang="ja-JP" altLang="en-US"/>
-          </a:p>
-        </p:txBody>
-      </p:sp>
-      <p:sp>
-        <p:nvSpPr>
-          <p:cNvPr id="8" name="テキスト ボックス 7">
-            <a:extLst>
-              <a:ext uri="{FF2B5EF4-FFF2-40B4-BE49-F238E27FC236}">
-                <a16:creationId xmlns:a16="http://schemas.microsoft.com/office/drawing/2014/main" id="{1FDEC7E9-66DA-4E0B-331A-DF817494E0E2}"/>
-              </a:ext>
-            </a:extLst>
-          </p:cNvPr>
-          <p:cNvSpPr txBox="1"/>
-          <p:nvPr/>
-        </p:nvSpPr>
-        <p:spPr>
-          <a:xfrm>
-            <a:off x="4300536" y="6447167"/>
-            <a:ext cx="3590925" cy="369332"/>
-          </a:xfrm>
-          <a:prstGeom prst="rect">
-            <a:avLst/>
-          </a:prstGeom>
-          <a:noFill/>
-        </p:spPr>
-        <p:txBody>
-          <a:bodyPr wrap="square" rtlCol="0">
-            <a:spAutoFit/>
-          </a:bodyPr>
-          <a:lstStyle/>
-          <a:p>
-            <a:pPr algn="ctr"/>
-            <a:r>
-              <a:rPr kumimoji="1" lang="en-US" altLang="ja-JP" dirty="0">
-                <a:latin typeface="Calibri" panose="020F0502020204030204" pitchFamily="34" charset="0"/>
-                <a:ea typeface="Calibri" panose="020F0502020204030204" pitchFamily="34" charset="0"/>
-                <a:cs typeface="Calibri" panose="020F0502020204030204" pitchFamily="34" charset="0"/>
-              </a:rPr>
-              <a:t>Teaser image</a:t>
-            </a:r>
-            <a:endParaRPr kumimoji="1" lang="ja-JP" altLang="en-US" dirty="0">
-              <a:latin typeface="Calibri" panose="020F0502020204030204" pitchFamily="34" charset="0"/>
-              <a:cs typeface="Calibri" panose="020F0502020204030204" pitchFamily="34" charset="0"/>
-            </a:endParaRPr>
-          </a:p>
-        </p:txBody>
-      </p:sp>
-    </p:spTree>
-    <p:extLst>
-      <p:ext uri="{BB962C8B-B14F-4D97-AF65-F5344CB8AC3E}">
-        <p14:creationId xmlns:p14="http://schemas.microsoft.com/office/powerpoint/2010/main" val="2128308975"/>
-      </p:ext>
-    </p:extLst>
-  </p:cSld>
-  <p:clrMapOvr>
-    <a:masterClrMapping/>
-  </p:clrMapOvr>
-</p:sld>
-</file>
-
-<file path=ppt/slides/slide3.xml><?xml version="1.0" encoding="utf-8"?>
+<file path=ppt/slides/slide10.xml><?xml version="1.0" encoding="utf-8"?>
 <p:sld xmlns:a="http://schemas.openxmlformats.org/drawingml/2006/main" xmlns:r="http://schemas.openxmlformats.org/officeDocument/2006/relationships" xmlns:p="http://schemas.openxmlformats.org/presentationml/2006/main">
   <p:cSld>
     <p:spTree>
@@ -8948,7 +8691,7 @@
         <p:cNvPr id="1" name="">
           <a:extLst>
             <a:ext uri="{FF2B5EF4-FFF2-40B4-BE49-F238E27FC236}">
-              <a16:creationId xmlns:a16="http://schemas.microsoft.com/office/drawing/2014/main" id="{42365341-075C-22C1-E617-E75659043553}"/>
+              <a16:creationId xmlns:a16="http://schemas.microsoft.com/office/drawing/2014/main" id="{04ABCEE1-977A-1266-9325-9FCD975B04EB}"/>
             </a:ext>
           </a:extLst>
         </p:cNvPr>
@@ -8963,59 +8706,12 @@
           <a:chExt cx="0" cy="0"/>
         </a:xfrm>
       </p:grpSpPr>
-      <p:pic>
-        <p:nvPicPr>
-          <p:cNvPr id="1028" name="Picture 4" descr="PDF] Bidirectional Path Tracing | Semantic Scholar">
-            <a:extLst>
-              <a:ext uri="{FF2B5EF4-FFF2-40B4-BE49-F238E27FC236}">
-                <a16:creationId xmlns:a16="http://schemas.microsoft.com/office/drawing/2014/main" id="{CBD6611A-27F3-F6A1-4B86-7C5600E2E5C0}"/>
-              </a:ext>
-            </a:extLst>
-          </p:cNvPr>
-          <p:cNvPicPr>
-            <a:picLocks noChangeAspect="1" noChangeArrowheads="1"/>
-          </p:cNvPicPr>
-          <p:nvPr/>
-        </p:nvPicPr>
-        <p:blipFill rotWithShape="1">
-          <a:blip r:embed="rId2">
-            <a:extLst>
-              <a:ext uri="{28A0092B-C50C-407E-A947-70E740481C1C}">
-                <a14:useLocalDpi xmlns:a14="http://schemas.microsoft.com/office/drawing/2010/main" val="0"/>
-              </a:ext>
-            </a:extLst>
-          </a:blip>
-          <a:srcRect t="22136"/>
-          <a:stretch>
-            <a:fillRect/>
-          </a:stretch>
-        </p:blipFill>
-        <p:spPr bwMode="auto">
-          <a:xfrm>
-            <a:off x="5707578" y="3320743"/>
-            <a:ext cx="6119986" cy="2894342"/>
-          </a:xfrm>
-          <a:prstGeom prst="rect">
-            <a:avLst/>
-          </a:prstGeom>
-          <a:noFill/>
-          <a:extLst>
-            <a:ext uri="{909E8E84-426E-40DD-AFC4-6F175D3DCCD1}">
-              <a14:hiddenFill xmlns:a14="http://schemas.microsoft.com/office/drawing/2010/main">
-                <a:solidFill>
-                  <a:srgbClr val="FFFFFF"/>
-                </a:solidFill>
-              </a14:hiddenFill>
-            </a:ext>
-          </a:extLst>
-        </p:spPr>
-      </p:pic>
       <p:sp>
         <p:nvSpPr>
           <p:cNvPr id="2" name="タイトル 1">
             <a:extLst>
               <a:ext uri="{FF2B5EF4-FFF2-40B4-BE49-F238E27FC236}">
-                <a16:creationId xmlns:a16="http://schemas.microsoft.com/office/drawing/2014/main" id="{7F5F4E9D-5689-CF8A-DF69-A59A80AB399C}"/>
+                <a16:creationId xmlns:a16="http://schemas.microsoft.com/office/drawing/2014/main" id="{09282A67-2D71-2D9F-772F-45B5F4EC3773}"/>
               </a:ext>
             </a:extLst>
           </p:cNvPr>
@@ -9028,12 +8724,14 @@
         </p:nvSpPr>
         <p:spPr/>
         <p:txBody>
-          <a:bodyPr/>
+          <a:bodyPr>
+            <a:normAutofit/>
+          </a:bodyPr>
           <a:lstStyle/>
           <a:p>
             <a:r>
               <a:rPr kumimoji="1" lang="en-US" altLang="ja-JP" dirty="0"/>
-              <a:t>Background: BPT</a:t>
+              <a:t>Asymptotic error analysis</a:t>
             </a:r>
             <a:endParaRPr kumimoji="1" lang="ja-JP" altLang="en-US" dirty="0"/>
           </a:p>
@@ -9041,156 +8739,10 @@
       </p:sp>
       <p:sp>
         <p:nvSpPr>
-          <p:cNvPr id="3" name="コンテンツ プレースホルダー 2">
-            <a:extLst>
-              <a:ext uri="{FF2B5EF4-FFF2-40B4-BE49-F238E27FC236}">
-                <a16:creationId xmlns:a16="http://schemas.microsoft.com/office/drawing/2014/main" id="{4857923A-63F2-32A4-CEDC-A13261EC0470}"/>
-              </a:ext>
-            </a:extLst>
-          </p:cNvPr>
-          <p:cNvSpPr>
-            <a:spLocks noGrp="1"/>
-          </p:cNvSpPr>
-          <p:nvPr>
-            <p:ph idx="1"/>
-          </p:nvPr>
-        </p:nvSpPr>
-        <p:spPr/>
-        <p:txBody>
-          <a:bodyPr/>
-          <a:lstStyle/>
-          <a:p>
-            <a:r>
-              <a:rPr lang="en-US" altLang="ja-JP" dirty="0"/>
-              <a:t>Path tracing is always suffering from MC noise…</a:t>
-            </a:r>
-            <a:br>
-              <a:rPr lang="en-US" altLang="ja-JP" dirty="0"/>
-            </a:br>
-            <a:r>
-              <a:rPr lang="ja-JP" altLang="en-US" dirty="0"/>
-              <a:t>→ </a:t>
-            </a:r>
-            <a:r>
-              <a:rPr lang="en-US" altLang="ja-JP" dirty="0"/>
-              <a:t>Various methods have been proposed, like </a:t>
-            </a:r>
-            <a:r>
-              <a:rPr lang="en-US" altLang="ja-JP" b="1" dirty="0"/>
-              <a:t>BPT</a:t>
-            </a:r>
-            <a:r>
-              <a:rPr lang="en-US" altLang="ja-JP" dirty="0"/>
-              <a:t>, </a:t>
-            </a:r>
-            <a:r>
-              <a:rPr lang="en-US" altLang="ja-JP" b="1" dirty="0"/>
-              <a:t>PPM</a:t>
-            </a:r>
-            <a:r>
-              <a:rPr lang="en-US" altLang="ja-JP" dirty="0"/>
-              <a:t>, MLT, etc.</a:t>
-            </a:r>
-          </a:p>
-          <a:p>
-            <a:endParaRPr kumimoji="1" lang="en-US" altLang="ja-JP" dirty="0"/>
-          </a:p>
-          <a:p>
-            <a:r>
-              <a:rPr kumimoji="1" lang="en-US" altLang="ja-JP" u="sng" dirty="0"/>
-              <a:t>Bidirectional Path </a:t>
-            </a:r>
-            <a:r>
-              <a:rPr lang="en-US" altLang="ja-JP" u="sng" dirty="0"/>
-              <a:t>Tracing (BPT)</a:t>
-            </a:r>
-            <a:r>
-              <a:rPr lang="en-US" altLang="ja-JP" dirty="0"/>
-              <a:t>:</a:t>
-            </a:r>
-            <a:br>
-              <a:rPr lang="en-US" altLang="ja-JP" dirty="0"/>
-            </a:br>
-            <a:r>
-              <a:rPr lang="en-US" altLang="ja-JP" dirty="0"/>
-              <a:t>Conventional path tracing trace paths </a:t>
-            </a:r>
-            <a:br>
-              <a:rPr lang="en-US" altLang="ja-JP" dirty="0"/>
-            </a:br>
-            <a:r>
-              <a:rPr lang="en-US" altLang="ja-JP" b="1" dirty="0"/>
-              <a:t>(only) from the viewpoint</a:t>
-            </a:r>
-          </a:p>
-          <a:p>
-            <a:pPr marL="0" indent="0">
-              <a:buNone/>
-            </a:pPr>
-            <a:r>
-              <a:rPr lang="ja-JP" altLang="en-US" dirty="0"/>
-              <a:t>→ </a:t>
-            </a:r>
-            <a:r>
-              <a:rPr lang="en-US" altLang="ja-JP" dirty="0"/>
-              <a:t>Trace the path from the light source </a:t>
-            </a:r>
-            <a:br>
-              <a:rPr lang="en-US" altLang="ja-JP" dirty="0"/>
-            </a:br>
-            <a:r>
-              <a:rPr lang="en-US" altLang="ja-JP" dirty="0"/>
-              <a:t>     and consider </a:t>
-            </a:r>
-            <a:r>
-              <a:rPr lang="en-US" altLang="ja-JP" b="1" dirty="0"/>
-              <a:t>all possible </a:t>
-            </a:r>
-            <a:br>
-              <a:rPr lang="en-US" altLang="ja-JP" b="1" dirty="0"/>
-            </a:br>
-            <a:r>
-              <a:rPr lang="en-US" altLang="ja-JP" b="1" dirty="0"/>
-              <a:t>     combinations of connections!</a:t>
-            </a:r>
-            <a:r>
-              <a:rPr lang="en-US" altLang="ja-JP" dirty="0"/>
-              <a:t> </a:t>
-            </a:r>
-          </a:p>
-          <a:p>
-            <a:pPr marL="0" indent="0">
-              <a:buNone/>
-            </a:pPr>
-            <a:r>
-              <a:rPr kumimoji="1" lang="ja-JP" altLang="en-US" dirty="0"/>
-              <a:t>→ </a:t>
-            </a:r>
-            <a:r>
-              <a:rPr lang="en-US" altLang="ja-JP" dirty="0"/>
-              <a:t>Significantly reduces</a:t>
-            </a:r>
-            <a:br>
-              <a:rPr lang="en-US" altLang="ja-JP" dirty="0"/>
-            </a:br>
-            <a:r>
-              <a:rPr lang="en-US" altLang="ja-JP" dirty="0"/>
-              <a:t>     MC noise of </a:t>
-            </a:r>
-            <a:r>
-              <a:rPr lang="en-US" altLang="ja-JP" b="1" dirty="0"/>
-              <a:t>indirect light</a:t>
-            </a:r>
-            <a:endParaRPr kumimoji="1" lang="ja-JP" altLang="en-US" b="1" dirty="0"/>
-          </a:p>
-        </p:txBody>
-      </p:sp>
-      <p:sp>
-        <p:nvSpPr>
           <p:cNvPr id="4" name="スライド番号プレースホルダー 3">
             <a:extLst>
               <a:ext uri="{FF2B5EF4-FFF2-40B4-BE49-F238E27FC236}">
-                <a16:creationId xmlns:a16="http://schemas.microsoft.com/office/drawing/2014/main" id="{B401934C-B148-65CF-5C9F-78EC49853D12}"/>
+                <a16:creationId xmlns:a16="http://schemas.microsoft.com/office/drawing/2014/main" id="{BD1964EC-D68C-E744-2E31-26FDB9F901C6}"/>
               </a:ext>
             </a:extLst>
           </p:cNvPr>
@@ -9209,7 +8761,7 @@
             <a:fld id="{05A07A33-D779-4A79-A49C-E26576C728D8}" type="slidenum">
               <a:rPr lang="ja-JP" altLang="en-US" smtClean="0"/>
               <a:pPr/>
-              <a:t>3</a:t>
+              <a:t>10</a:t>
             </a:fld>
             <a:endParaRPr lang="ja-JP" altLang="en-US" dirty="0">
               <a:latin typeface="Calibri" panose="020F0502020204030204" pitchFamily="34" charset="0"/>
@@ -9218,153 +8770,1176 @@
           </a:p>
         </p:txBody>
       </p:sp>
-      <p:sp>
-        <p:nvSpPr>
-          <p:cNvPr id="5" name="テキスト ボックス 4">
-            <a:extLst>
-              <a:ext uri="{FF2B5EF4-FFF2-40B4-BE49-F238E27FC236}">
-                <a16:creationId xmlns:a16="http://schemas.microsoft.com/office/drawing/2014/main" id="{4211535D-E778-B46F-D478-8593DF35E748}"/>
-              </a:ext>
-            </a:extLst>
-          </p:cNvPr>
-          <p:cNvSpPr txBox="1"/>
+      <mc:AlternateContent xmlns:mc="http://schemas.openxmlformats.org/markup-compatibility/2006">
+        <mc:Choice xmlns:a14="http://schemas.microsoft.com/office/drawing/2010/main" Requires="a14">
+          <p:sp>
+            <p:nvSpPr>
+              <p:cNvPr id="3" name="コンテンツ プレースホルダー 2">
+                <a:extLst>
+                  <a:ext uri="{FF2B5EF4-FFF2-40B4-BE49-F238E27FC236}">
+                    <a16:creationId xmlns:a16="http://schemas.microsoft.com/office/drawing/2014/main" id="{D6735D35-442F-638E-9733-CB03C5AA2CF3}"/>
+                  </a:ext>
+                </a:extLst>
+              </p:cNvPr>
+              <p:cNvSpPr txBox="1">
+                <a:spLocks/>
+              </p:cNvSpPr>
+              <p:nvPr/>
+            </p:nvSpPr>
+            <p:spPr>
+              <a:xfrm>
+                <a:off x="138370" y="1258677"/>
+                <a:ext cx="11915260" cy="621945"/>
+              </a:xfrm>
+              <a:prstGeom prst="rect">
+                <a:avLst/>
+              </a:prstGeom>
+            </p:spPr>
+            <p:txBody>
+              <a:bodyPr vert="horz" lIns="91440" tIns="45720" rIns="91440" bIns="45720" rtlCol="0">
+                <a:normAutofit/>
+              </a:bodyPr>
+              <a:lstStyle>
+                <a:lvl1pPr marL="228600" indent="-228600" algn="l" defTabSz="914400" rtl="0" eaLnBrk="1" latinLnBrk="0" hangingPunct="1">
+                  <a:lnSpc>
+                    <a:spcPct val="90000"/>
+                  </a:lnSpc>
+                  <a:spcBef>
+                    <a:spcPts val="1000"/>
+                  </a:spcBef>
+                  <a:buFont typeface="Arial" panose="020B0604020202020204" pitchFamily="34" charset="0"/>
+                  <a:buChar char="•"/>
+                  <a:defRPr kumimoji="1" sz="2800" kern="1200">
+                    <a:solidFill>
+                      <a:schemeClr val="tx1"/>
+                    </a:solidFill>
+                    <a:latin typeface="+mn-lt"/>
+                    <a:ea typeface="+mn-ea"/>
+                    <a:cs typeface="+mn-cs"/>
+                  </a:defRPr>
+                </a:lvl1pPr>
+                <a:lvl2pPr marL="685800" indent="-228600" algn="l" defTabSz="914400" rtl="0" eaLnBrk="1" latinLnBrk="0" hangingPunct="1">
+                  <a:lnSpc>
+                    <a:spcPct val="90000"/>
+                  </a:lnSpc>
+                  <a:spcBef>
+                    <a:spcPts val="500"/>
+                  </a:spcBef>
+                  <a:buFont typeface="Arial" panose="020B0604020202020204" pitchFamily="34" charset="0"/>
+                  <a:buChar char="•"/>
+                  <a:defRPr kumimoji="1" sz="2400" kern="1200">
+                    <a:solidFill>
+                      <a:schemeClr val="tx1"/>
+                    </a:solidFill>
+                    <a:latin typeface="+mn-lt"/>
+                    <a:ea typeface="+mn-ea"/>
+                    <a:cs typeface="+mn-cs"/>
+                  </a:defRPr>
+                </a:lvl2pPr>
+                <a:lvl3pPr marL="1143000" indent="-228600" algn="l" defTabSz="914400" rtl="0" eaLnBrk="1" latinLnBrk="0" hangingPunct="1">
+                  <a:lnSpc>
+                    <a:spcPct val="90000"/>
+                  </a:lnSpc>
+                  <a:spcBef>
+                    <a:spcPts val="500"/>
+                  </a:spcBef>
+                  <a:buFont typeface="Arial" panose="020B0604020202020204" pitchFamily="34" charset="0"/>
+                  <a:buChar char="•"/>
+                  <a:defRPr kumimoji="1" sz="2000" kern="1200">
+                    <a:solidFill>
+                      <a:schemeClr val="tx1"/>
+                    </a:solidFill>
+                    <a:latin typeface="+mn-lt"/>
+                    <a:ea typeface="+mn-ea"/>
+                    <a:cs typeface="+mn-cs"/>
+                  </a:defRPr>
+                </a:lvl3pPr>
+                <a:lvl4pPr marL="1600200" indent="-228600" algn="l" defTabSz="914400" rtl="0" eaLnBrk="1" latinLnBrk="0" hangingPunct="1">
+                  <a:lnSpc>
+                    <a:spcPct val="90000"/>
+                  </a:lnSpc>
+                  <a:spcBef>
+                    <a:spcPts val="500"/>
+                  </a:spcBef>
+                  <a:buFont typeface="Arial" panose="020B0604020202020204" pitchFamily="34" charset="0"/>
+                  <a:buChar char="•"/>
+                  <a:defRPr kumimoji="1" sz="1800" kern="1200">
+                    <a:solidFill>
+                      <a:schemeClr val="tx1"/>
+                    </a:solidFill>
+                    <a:latin typeface="+mn-lt"/>
+                    <a:ea typeface="+mn-ea"/>
+                    <a:cs typeface="+mn-cs"/>
+                  </a:defRPr>
+                </a:lvl4pPr>
+                <a:lvl5pPr marL="2057400" indent="-228600" algn="l" defTabSz="914400" rtl="0" eaLnBrk="1" latinLnBrk="0" hangingPunct="1">
+                  <a:lnSpc>
+                    <a:spcPct val="90000"/>
+                  </a:lnSpc>
+                  <a:spcBef>
+                    <a:spcPts val="500"/>
+                  </a:spcBef>
+                  <a:buFont typeface="Arial" panose="020B0604020202020204" pitchFamily="34" charset="0"/>
+                  <a:buChar char="•"/>
+                  <a:defRPr kumimoji="1" sz="1800" kern="1200">
+                    <a:solidFill>
+                      <a:schemeClr val="tx1"/>
+                    </a:solidFill>
+                    <a:latin typeface="+mn-lt"/>
+                    <a:ea typeface="+mn-ea"/>
+                    <a:cs typeface="+mn-cs"/>
+                  </a:defRPr>
+                </a:lvl5pPr>
+                <a:lvl6pPr marL="2514600" indent="-228600" algn="l" defTabSz="914400" rtl="0" eaLnBrk="1" latinLnBrk="0" hangingPunct="1">
+                  <a:lnSpc>
+                    <a:spcPct val="90000"/>
+                  </a:lnSpc>
+                  <a:spcBef>
+                    <a:spcPts val="500"/>
+                  </a:spcBef>
+                  <a:buFont typeface="Arial" panose="020B0604020202020204" pitchFamily="34" charset="0"/>
+                  <a:buChar char="•"/>
+                  <a:defRPr kumimoji="1" sz="1800" kern="1200">
+                    <a:solidFill>
+                      <a:schemeClr val="tx1"/>
+                    </a:solidFill>
+                    <a:latin typeface="+mn-lt"/>
+                    <a:ea typeface="+mn-ea"/>
+                    <a:cs typeface="+mn-cs"/>
+                  </a:defRPr>
+                </a:lvl6pPr>
+                <a:lvl7pPr marL="2971800" indent="-228600" algn="l" defTabSz="914400" rtl="0" eaLnBrk="1" latinLnBrk="0" hangingPunct="1">
+                  <a:lnSpc>
+                    <a:spcPct val="90000"/>
+                  </a:lnSpc>
+                  <a:spcBef>
+                    <a:spcPts val="500"/>
+                  </a:spcBef>
+                  <a:buFont typeface="Arial" panose="020B0604020202020204" pitchFamily="34" charset="0"/>
+                  <a:buChar char="•"/>
+                  <a:defRPr kumimoji="1" sz="1800" kern="1200">
+                    <a:solidFill>
+                      <a:schemeClr val="tx1"/>
+                    </a:solidFill>
+                    <a:latin typeface="+mn-lt"/>
+                    <a:ea typeface="+mn-ea"/>
+                    <a:cs typeface="+mn-cs"/>
+                  </a:defRPr>
+                </a:lvl7pPr>
+                <a:lvl8pPr marL="3429000" indent="-228600" algn="l" defTabSz="914400" rtl="0" eaLnBrk="1" latinLnBrk="0" hangingPunct="1">
+                  <a:lnSpc>
+                    <a:spcPct val="90000"/>
+                  </a:lnSpc>
+                  <a:spcBef>
+                    <a:spcPts val="500"/>
+                  </a:spcBef>
+                  <a:buFont typeface="Arial" panose="020B0604020202020204" pitchFamily="34" charset="0"/>
+                  <a:buChar char="•"/>
+                  <a:defRPr kumimoji="1" sz="1800" kern="1200">
+                    <a:solidFill>
+                      <a:schemeClr val="tx1"/>
+                    </a:solidFill>
+                    <a:latin typeface="+mn-lt"/>
+                    <a:ea typeface="+mn-ea"/>
+                    <a:cs typeface="+mn-cs"/>
+                  </a:defRPr>
+                </a:lvl8pPr>
+                <a:lvl9pPr marL="3886200" indent="-228600" algn="l" defTabSz="914400" rtl="0" eaLnBrk="1" latinLnBrk="0" hangingPunct="1">
+                  <a:lnSpc>
+                    <a:spcPct val="90000"/>
+                  </a:lnSpc>
+                  <a:spcBef>
+                    <a:spcPts val="500"/>
+                  </a:spcBef>
+                  <a:buFont typeface="Arial" panose="020B0604020202020204" pitchFamily="34" charset="0"/>
+                  <a:buChar char="•"/>
+                  <a:defRPr kumimoji="1" sz="1800" kern="1200">
+                    <a:solidFill>
+                      <a:schemeClr val="tx1"/>
+                    </a:solidFill>
+                    <a:latin typeface="+mn-lt"/>
+                    <a:ea typeface="+mn-ea"/>
+                    <a:cs typeface="+mn-cs"/>
+                  </a:defRPr>
+                </a:lvl9pPr>
+              </a:lstStyle>
+              <a:p>
+                <a:r>
+                  <a:rPr lang="en-US" altLang="ja-JP" sz="2400" dirty="0">
+                    <a:latin typeface="Calibri" panose="020F0502020204030204" pitchFamily="34" charset="0"/>
+                    <a:cs typeface="Calibri" panose="020F0502020204030204" pitchFamily="34" charset="0"/>
+                  </a:rPr>
+                  <a:t>VCM has </a:t>
+                </a:r>
+                <a:r>
+                  <a:rPr lang="en-US" altLang="ja-JP" sz="2400" b="1" dirty="0">
+                    <a:latin typeface="Calibri" panose="020F0502020204030204" pitchFamily="34" charset="0"/>
+                    <a:cs typeface="Calibri" panose="020F0502020204030204" pitchFamily="34" charset="0"/>
+                  </a:rPr>
+                  <a:t>consistency like PPM </a:t>
+                </a:r>
+                <a:r>
+                  <a:rPr lang="en-US" altLang="ja-JP" sz="2400" dirty="0">
+                    <a:latin typeface="Calibri" panose="020F0502020204030204" pitchFamily="34" charset="0"/>
+                    <a:cs typeface="Calibri" panose="020F0502020204030204" pitchFamily="34" charset="0"/>
+                  </a:rPr>
+                  <a:t>(Decrease the VM’s </a:t>
+                </a:r>
+                <a14:m>
+                  <m:oMath xmlns:m="http://schemas.openxmlformats.org/officeDocument/2006/math">
+                    <m:r>
+                      <m:rPr>
+                        <m:sty m:val="p"/>
+                      </m:rPr>
+                      <a:rPr lang="en-US" altLang="ja-JP" sz="2400" b="0" i="1" smtClean="0">
+                        <a:latin typeface="Cambria Math" panose="02040503050406030204" pitchFamily="18" charset="0"/>
+                        <a:cs typeface="Calibri" panose="020F0502020204030204" pitchFamily="34" charset="0"/>
+                      </a:rPr>
+                      <m:t>r</m:t>
+                    </m:r>
+                  </m:oMath>
+                </a14:m>
+                <a:r>
+                  <a:rPr lang="en-US" altLang="ja-JP" sz="2400" dirty="0">
+                    <a:latin typeface="Calibri" panose="020F0502020204030204" pitchFamily="34" charset="0"/>
+                    <a:cs typeface="Calibri" panose="020F0502020204030204" pitchFamily="34" charset="0"/>
+                  </a:rPr>
+                  <a:t> with each iteration)</a:t>
+                </a:r>
+                <a:endParaRPr lang="en-US" altLang="ja-JP" sz="2000" dirty="0">
+                  <a:latin typeface="Calibri" panose="020F0502020204030204" pitchFamily="34" charset="0"/>
+                  <a:cs typeface="Calibri" panose="020F0502020204030204" pitchFamily="34" charset="0"/>
+                </a:endParaRPr>
+              </a:p>
+            </p:txBody>
+          </p:sp>
+        </mc:Choice>
+        <mc:Fallback>
+          <p:sp>
+            <p:nvSpPr>
+              <p:cNvPr id="3" name="コンテンツ プレースホルダー 2">
+                <a:extLst>
+                  <a:ext uri="{FF2B5EF4-FFF2-40B4-BE49-F238E27FC236}">
+                    <a16:creationId xmlns:a16="http://schemas.microsoft.com/office/drawing/2014/main" id="{D6735D35-442F-638E-9733-CB03C5AA2CF3}"/>
+                  </a:ext>
+                </a:extLst>
+              </p:cNvPr>
+              <p:cNvSpPr txBox="1">
+                <a:spLocks noRot="1" noChangeAspect="1" noMove="1" noResize="1" noEditPoints="1" noAdjustHandles="1" noChangeArrowheads="1" noChangeShapeType="1" noTextEdit="1"/>
+              </p:cNvSpPr>
+              <p:nvPr/>
+            </p:nvSpPr>
+            <p:spPr>
+              <a:xfrm>
+                <a:off x="138370" y="1258677"/>
+                <a:ext cx="11915260" cy="621945"/>
+              </a:xfrm>
+              <a:prstGeom prst="rect">
+                <a:avLst/>
+              </a:prstGeom>
+              <a:blipFill>
+                <a:blip r:embed="rId2"/>
+                <a:stretch>
+                  <a:fillRect l="-716" t="-13592"/>
+                </a:stretch>
+              </a:blipFill>
+            </p:spPr>
+            <p:txBody>
+              <a:bodyPr/>
+              <a:lstStyle/>
+              <a:p>
+                <a:r>
+                  <a:rPr lang="ja-JP" altLang="en-US">
+                    <a:noFill/>
+                  </a:rPr>
+                  <a:t> </a:t>
+                </a:r>
+              </a:p>
+            </p:txBody>
+          </p:sp>
+        </mc:Fallback>
+      </mc:AlternateContent>
+      <mc:AlternateContent xmlns:mc="http://schemas.openxmlformats.org/markup-compatibility/2006">
+        <mc:Choice xmlns:a14="http://schemas.microsoft.com/office/drawing/2010/main" Requires="a14">
+          <p:sp>
+            <p:nvSpPr>
+              <p:cNvPr id="7" name="テキスト ボックス 6">
+                <a:extLst>
+                  <a:ext uri="{FF2B5EF4-FFF2-40B4-BE49-F238E27FC236}">
+                    <a16:creationId xmlns:a16="http://schemas.microsoft.com/office/drawing/2014/main" id="{FA14665D-C9AE-0FE1-118A-7D765B6B4695}"/>
+                  </a:ext>
+                </a:extLst>
+              </p:cNvPr>
+              <p:cNvSpPr txBox="1"/>
+              <p:nvPr/>
+            </p:nvSpPr>
+            <p:spPr>
+              <a:xfrm>
+                <a:off x="5223036" y="1740682"/>
+                <a:ext cx="1745927" cy="535018"/>
+              </a:xfrm>
+              <a:prstGeom prst="rect">
+                <a:avLst/>
+              </a:prstGeom>
+              <a:noFill/>
+            </p:spPr>
+            <p:txBody>
+              <a:bodyPr wrap="none" lIns="0" tIns="0" rIns="0" bIns="0" rtlCol="0">
+                <a:spAutoFit/>
+              </a:bodyPr>
+              <a:lstStyle/>
+              <a:p>
+                <a14:m>
+                  <m:oMathPara xmlns:m="http://schemas.openxmlformats.org/officeDocument/2006/math">
+                    <m:oMathParaPr>
+                      <m:jc m:val="centerGroup"/>
+                    </m:oMathParaPr>
+                    <m:oMath xmlns:m="http://schemas.openxmlformats.org/officeDocument/2006/math">
+                      <m:sSub>
+                        <m:sSubPr>
+                          <m:ctrlPr>
+                            <a:rPr kumimoji="1" lang="en-US" altLang="ja-JP" sz="2400" b="0" i="1" smtClean="0">
+                              <a:latin typeface="Cambria Math" panose="02040503050406030204" pitchFamily="18" charset="0"/>
+                            </a:rPr>
+                          </m:ctrlPr>
+                        </m:sSubPr>
+                        <m:e>
+                          <m:r>
+                            <a:rPr kumimoji="1" lang="en-US" altLang="ja-JP" sz="2400" b="0" i="1" smtClean="0">
+                              <a:latin typeface="Cambria Math" panose="02040503050406030204" pitchFamily="18" charset="0"/>
+                            </a:rPr>
+                            <m:t>𝑟</m:t>
+                          </m:r>
+                        </m:e>
+                        <m:sub>
+                          <m:r>
+                            <a:rPr kumimoji="1" lang="en-US" altLang="ja-JP" sz="2400" b="0" i="1" smtClean="0">
+                              <a:latin typeface="Cambria Math" panose="02040503050406030204" pitchFamily="18" charset="0"/>
+                            </a:rPr>
+                            <m:t>𝑖</m:t>
+                          </m:r>
+                        </m:sub>
+                      </m:sSub>
+                      <m:r>
+                        <a:rPr kumimoji="1" lang="en-US" altLang="ja-JP" sz="2400" b="0" i="1" smtClean="0">
+                          <a:latin typeface="Cambria Math" panose="02040503050406030204" pitchFamily="18" charset="0"/>
+                        </a:rPr>
+                        <m:t>=</m:t>
+                      </m:r>
+                      <m:sSub>
+                        <m:sSubPr>
+                          <m:ctrlPr>
+                            <a:rPr kumimoji="1" lang="en-US" altLang="ja-JP" sz="2400" b="0" i="1" smtClean="0">
+                              <a:latin typeface="Cambria Math" panose="02040503050406030204" pitchFamily="18" charset="0"/>
+                            </a:rPr>
+                          </m:ctrlPr>
+                        </m:sSubPr>
+                        <m:e>
+                          <m:r>
+                            <a:rPr kumimoji="1" lang="en-US" altLang="ja-JP" sz="2400" b="0" i="1" smtClean="0">
+                              <a:latin typeface="Cambria Math" panose="02040503050406030204" pitchFamily="18" charset="0"/>
+                            </a:rPr>
+                            <m:t>𝑟</m:t>
+                          </m:r>
+                        </m:e>
+                        <m:sub>
+                          <m:r>
+                            <a:rPr kumimoji="1" lang="en-US" altLang="ja-JP" sz="2400" b="0" i="1" smtClean="0">
+                              <a:latin typeface="Cambria Math" panose="02040503050406030204" pitchFamily="18" charset="0"/>
+                            </a:rPr>
+                            <m:t>1</m:t>
+                          </m:r>
+                        </m:sub>
+                      </m:sSub>
+                      <m:r>
+                        <a:rPr kumimoji="1" lang="en-US" altLang="ja-JP" sz="2400" b="0" i="1" smtClean="0">
+                          <a:latin typeface="Cambria Math" panose="02040503050406030204" pitchFamily="18" charset="0"/>
+                        </a:rPr>
+                        <m:t>⋅</m:t>
+                      </m:r>
+                      <m:sSup>
+                        <m:sSupPr>
+                          <m:ctrlPr>
+                            <a:rPr kumimoji="1" lang="en-US" altLang="ja-JP" sz="2400" b="0" i="1" smtClean="0">
+                              <a:latin typeface="Cambria Math" panose="02040503050406030204" pitchFamily="18" charset="0"/>
+                            </a:rPr>
+                          </m:ctrlPr>
+                        </m:sSupPr>
+                        <m:e>
+                          <m:r>
+                            <a:rPr kumimoji="1" lang="en-US" altLang="ja-JP" sz="2400" b="0" i="1" smtClean="0">
+                              <a:latin typeface="Cambria Math" panose="02040503050406030204" pitchFamily="18" charset="0"/>
+                            </a:rPr>
+                            <m:t>𝑖</m:t>
+                          </m:r>
+                        </m:e>
+                        <m:sup>
+                          <m:f>
+                            <m:fPr>
+                              <m:ctrlPr>
+                                <a:rPr kumimoji="1" lang="en-US" altLang="ja-JP" sz="2400" b="0" i="1" smtClean="0">
+                                  <a:latin typeface="Cambria Math" panose="02040503050406030204" pitchFamily="18" charset="0"/>
+                                </a:rPr>
+                              </m:ctrlPr>
+                            </m:fPr>
+                            <m:num>
+                              <m:r>
+                                <a:rPr kumimoji="1" lang="en-US" altLang="ja-JP" sz="2400" b="0" i="1" smtClean="0">
+                                  <a:latin typeface="Cambria Math" panose="02040503050406030204" pitchFamily="18" charset="0"/>
+                                </a:rPr>
+                                <m:t>𝛼</m:t>
+                              </m:r>
+                              <m:r>
+                                <a:rPr kumimoji="1" lang="en-US" altLang="ja-JP" sz="2400" b="0" i="1" smtClean="0">
+                                  <a:latin typeface="Cambria Math" panose="02040503050406030204" pitchFamily="18" charset="0"/>
+                                </a:rPr>
+                                <m:t>−</m:t>
+                              </m:r>
+                              <m:r>
+                                <a:rPr kumimoji="1" lang="en-US" altLang="ja-JP" sz="2400" b="0" i="1" smtClean="0">
+                                  <a:latin typeface="Cambria Math" panose="02040503050406030204" pitchFamily="18" charset="0"/>
+                                </a:rPr>
+                                <m:t>1</m:t>
+                              </m:r>
+                            </m:num>
+                            <m:den>
+                              <m:r>
+                                <a:rPr kumimoji="1" lang="en-US" altLang="ja-JP" sz="2400" b="0" i="1" smtClean="0">
+                                  <a:latin typeface="Cambria Math" panose="02040503050406030204" pitchFamily="18" charset="0"/>
+                                </a:rPr>
+                                <m:t>2</m:t>
+                              </m:r>
+                            </m:den>
+                          </m:f>
+                        </m:sup>
+                      </m:sSup>
+                    </m:oMath>
+                  </m:oMathPara>
+                </a14:m>
+                <a:endParaRPr kumimoji="1" lang="ja-JP" altLang="en-US" dirty="0"/>
+              </a:p>
+            </p:txBody>
+          </p:sp>
+        </mc:Choice>
+        <mc:Fallback>
+          <p:sp>
+            <p:nvSpPr>
+              <p:cNvPr id="7" name="テキスト ボックス 6">
+                <a:extLst>
+                  <a:ext uri="{FF2B5EF4-FFF2-40B4-BE49-F238E27FC236}">
+                    <a16:creationId xmlns:a16="http://schemas.microsoft.com/office/drawing/2014/main" id="{FA14665D-C9AE-0FE1-118A-7D765B6B4695}"/>
+                  </a:ext>
+                </a:extLst>
+              </p:cNvPr>
+              <p:cNvSpPr txBox="1">
+                <a:spLocks noRot="1" noChangeAspect="1" noMove="1" noResize="1" noEditPoints="1" noAdjustHandles="1" noChangeArrowheads="1" noChangeShapeType="1" noTextEdit="1"/>
+              </p:cNvSpPr>
+              <p:nvPr/>
+            </p:nvSpPr>
+            <p:spPr>
+              <a:xfrm>
+                <a:off x="5223036" y="1740682"/>
+                <a:ext cx="1745927" cy="535018"/>
+              </a:xfrm>
+              <a:prstGeom prst="rect">
+                <a:avLst/>
+              </a:prstGeom>
+              <a:blipFill>
+                <a:blip r:embed="rId3"/>
+                <a:stretch>
+                  <a:fillRect/>
+                </a:stretch>
+              </a:blipFill>
+            </p:spPr>
+            <p:txBody>
+              <a:bodyPr/>
+              <a:lstStyle/>
+              <a:p>
+                <a:r>
+                  <a:rPr lang="ja-JP" altLang="en-US">
+                    <a:noFill/>
+                  </a:rPr>
+                  <a:t> </a:t>
+                </a:r>
+              </a:p>
+            </p:txBody>
+          </p:sp>
+        </mc:Fallback>
+      </mc:AlternateContent>
+      <mc:AlternateContent xmlns:mc="http://schemas.openxmlformats.org/markup-compatibility/2006">
+        <mc:Choice xmlns:a14="http://schemas.microsoft.com/office/drawing/2010/main" Requires="a14">
+          <p:sp>
+            <p:nvSpPr>
+              <p:cNvPr id="8" name="テキスト ボックス 7">
+                <a:extLst>
+                  <a:ext uri="{FF2B5EF4-FFF2-40B4-BE49-F238E27FC236}">
+                    <a16:creationId xmlns:a16="http://schemas.microsoft.com/office/drawing/2014/main" id="{EDF89EED-0B09-10B1-40B3-39496375EFFB}"/>
+                  </a:ext>
+                </a:extLst>
+              </p:cNvPr>
+              <p:cNvSpPr txBox="1"/>
+              <p:nvPr/>
+            </p:nvSpPr>
+            <p:spPr>
+              <a:xfrm>
+                <a:off x="4456273" y="2362627"/>
+                <a:ext cx="3279452" cy="707886"/>
+              </a:xfrm>
+              <a:prstGeom prst="rect">
+                <a:avLst/>
+              </a:prstGeom>
+              <a:noFill/>
+            </p:spPr>
+            <p:txBody>
+              <a:bodyPr wrap="square" rtlCol="0">
+                <a:spAutoFit/>
+              </a:bodyPr>
+              <a:lstStyle/>
+              <a:p>
+                <a:pPr algn="ctr"/>
+                <a14:m>
+                  <m:oMath xmlns:m="http://schemas.openxmlformats.org/officeDocument/2006/math">
+                    <m:r>
+                      <a:rPr kumimoji="1" lang="en-US" altLang="ja-JP" sz="2000" b="0" i="1" smtClean="0">
+                        <a:latin typeface="Cambria Math" panose="02040503050406030204" pitchFamily="18" charset="0"/>
+                      </a:rPr>
+                      <m:t>𝑖</m:t>
+                    </m:r>
+                    <m:r>
+                      <a:rPr kumimoji="1" lang="en-US" altLang="ja-JP" sz="2000" b="0" i="0" smtClean="0">
+                        <a:latin typeface="Cambria Math" panose="02040503050406030204" pitchFamily="18" charset="0"/>
+                      </a:rPr>
+                      <m:t>-</m:t>
+                    </m:r>
+                  </m:oMath>
+                </a14:m>
+                <a:r>
+                  <a:rPr kumimoji="1" lang="en-US" altLang="ja-JP" sz="2000" dirty="0">
+                    <a:latin typeface="Calibri" panose="020F0502020204030204" pitchFamily="34" charset="0"/>
+                    <a:ea typeface="Calibri" panose="020F0502020204030204" pitchFamily="34" charset="0"/>
+                    <a:cs typeface="Calibri" panose="020F0502020204030204" pitchFamily="34" charset="0"/>
+                  </a:rPr>
+                  <a:t>th iteration’s search radius </a:t>
+                </a:r>
+                <a:br>
+                  <a:rPr kumimoji="1" lang="en-US" altLang="ja-JP" sz="2000" dirty="0">
+                    <a:latin typeface="Calibri" panose="020F0502020204030204" pitchFamily="34" charset="0"/>
+                    <a:ea typeface="Calibri" panose="020F0502020204030204" pitchFamily="34" charset="0"/>
+                    <a:cs typeface="Calibri" panose="020F0502020204030204" pitchFamily="34" charset="0"/>
+                  </a:rPr>
+                </a:br>
+                <a:r>
+                  <a:rPr kumimoji="1" lang="en-US" altLang="ja-JP" sz="2000" dirty="0">
+                    <a:latin typeface="Calibri" panose="020F0502020204030204" pitchFamily="34" charset="0"/>
+                    <a:ea typeface="Calibri" panose="020F0502020204030204" pitchFamily="34" charset="0"/>
+                    <a:cs typeface="Calibri" panose="020F0502020204030204" pitchFamily="34" charset="0"/>
+                  </a:rPr>
+                  <a:t>(</a:t>
+                </a:r>
+                <a14:m>
+                  <m:oMath xmlns:m="http://schemas.openxmlformats.org/officeDocument/2006/math">
+                    <m:r>
+                      <m:rPr>
+                        <m:sty m:val="p"/>
+                      </m:rPr>
+                      <a:rPr kumimoji="1" lang="en-US" altLang="ja-JP" sz="2000" b="0" i="1" smtClean="0">
+                        <a:latin typeface="Cambria Math" panose="02040503050406030204" pitchFamily="18" charset="0"/>
+                        <a:ea typeface="Calibri" panose="020F0502020204030204" pitchFamily="34" charset="0"/>
+                        <a:cs typeface="Calibri" panose="020F0502020204030204" pitchFamily="34" charset="0"/>
+                      </a:rPr>
+                      <m:t>α</m:t>
+                    </m:r>
+                  </m:oMath>
+                </a14:m>
+                <a:r>
+                  <a:rPr kumimoji="1" lang="en-US" altLang="ja-JP" sz="2000" dirty="0">
+                    <a:latin typeface="Calibri" panose="020F0502020204030204" pitchFamily="34" charset="0"/>
+                    <a:cs typeface="Calibri" panose="020F0502020204030204" pitchFamily="34" charset="0"/>
+                  </a:rPr>
+                  <a:t>: parameter, 2/3 as usual)</a:t>
+                </a:r>
+                <a:endParaRPr kumimoji="1" lang="ja-JP" altLang="en-US" sz="2000" dirty="0">
+                  <a:latin typeface="Calibri" panose="020F0502020204030204" pitchFamily="34" charset="0"/>
+                  <a:cs typeface="Calibri" panose="020F0502020204030204" pitchFamily="34" charset="0"/>
+                </a:endParaRPr>
+              </a:p>
+            </p:txBody>
+          </p:sp>
+        </mc:Choice>
+        <mc:Fallback>
+          <p:sp>
+            <p:nvSpPr>
+              <p:cNvPr id="8" name="テキスト ボックス 7">
+                <a:extLst>
+                  <a:ext uri="{FF2B5EF4-FFF2-40B4-BE49-F238E27FC236}">
+                    <a16:creationId xmlns:a16="http://schemas.microsoft.com/office/drawing/2014/main" id="{EDF89EED-0B09-10B1-40B3-39496375EFFB}"/>
+                  </a:ext>
+                </a:extLst>
+              </p:cNvPr>
+              <p:cNvSpPr txBox="1">
+                <a:spLocks noRot="1" noChangeAspect="1" noMove="1" noResize="1" noEditPoints="1" noAdjustHandles="1" noChangeArrowheads="1" noChangeShapeType="1" noTextEdit="1"/>
+              </p:cNvSpPr>
+              <p:nvPr/>
+            </p:nvSpPr>
+            <p:spPr>
+              <a:xfrm>
+                <a:off x="4456273" y="2362627"/>
+                <a:ext cx="3279452" cy="707886"/>
+              </a:xfrm>
+              <a:prstGeom prst="rect">
+                <a:avLst/>
+              </a:prstGeom>
+              <a:blipFill>
+                <a:blip r:embed="rId4"/>
+                <a:stretch>
+                  <a:fillRect t="-5172" r="-1115" b="-14655"/>
+                </a:stretch>
+              </a:blipFill>
+            </p:spPr>
+            <p:txBody>
+              <a:bodyPr/>
+              <a:lstStyle/>
+              <a:p>
+                <a:r>
+                  <a:rPr lang="ja-JP" altLang="en-US">
+                    <a:noFill/>
+                  </a:rPr>
+                  <a:t> </a:t>
+                </a:r>
+              </a:p>
+            </p:txBody>
+          </p:sp>
+        </mc:Fallback>
+      </mc:AlternateContent>
+      <mc:AlternateContent xmlns:mc="http://schemas.openxmlformats.org/markup-compatibility/2006">
+        <mc:Choice xmlns:a14="http://schemas.microsoft.com/office/drawing/2010/main" Requires="a14">
+          <p:sp>
+            <p:nvSpPr>
+              <p:cNvPr id="9" name="コンテンツ プレースホルダー 2">
+                <a:extLst>
+                  <a:ext uri="{FF2B5EF4-FFF2-40B4-BE49-F238E27FC236}">
+                    <a16:creationId xmlns:a16="http://schemas.microsoft.com/office/drawing/2014/main" id="{70996E79-FE7C-0EEE-4730-586905D39618}"/>
+                  </a:ext>
+                </a:extLst>
+              </p:cNvPr>
+              <p:cNvSpPr txBox="1">
+                <a:spLocks/>
+              </p:cNvSpPr>
+              <p:nvPr/>
+            </p:nvSpPr>
+            <p:spPr>
+              <a:xfrm>
+                <a:off x="138369" y="3157440"/>
+                <a:ext cx="11915260" cy="2441883"/>
+              </a:xfrm>
+              <a:prstGeom prst="rect">
+                <a:avLst/>
+              </a:prstGeom>
+            </p:spPr>
+            <p:txBody>
+              <a:bodyPr vert="horz" lIns="91440" tIns="45720" rIns="91440" bIns="45720" rtlCol="0">
+                <a:normAutofit/>
+              </a:bodyPr>
+              <a:lstStyle>
+                <a:lvl1pPr marL="228600" indent="-228600" algn="l" defTabSz="914400" rtl="0" eaLnBrk="1" latinLnBrk="0" hangingPunct="1">
+                  <a:lnSpc>
+                    <a:spcPct val="90000"/>
+                  </a:lnSpc>
+                  <a:spcBef>
+                    <a:spcPts val="1000"/>
+                  </a:spcBef>
+                  <a:buFont typeface="Arial" panose="020B0604020202020204" pitchFamily="34" charset="0"/>
+                  <a:buChar char="•"/>
+                  <a:defRPr kumimoji="1" sz="2800" kern="1200">
+                    <a:solidFill>
+                      <a:schemeClr val="tx1"/>
+                    </a:solidFill>
+                    <a:latin typeface="+mn-lt"/>
+                    <a:ea typeface="+mn-ea"/>
+                    <a:cs typeface="+mn-cs"/>
+                  </a:defRPr>
+                </a:lvl1pPr>
+                <a:lvl2pPr marL="685800" indent="-228600" algn="l" defTabSz="914400" rtl="0" eaLnBrk="1" latinLnBrk="0" hangingPunct="1">
+                  <a:lnSpc>
+                    <a:spcPct val="90000"/>
+                  </a:lnSpc>
+                  <a:spcBef>
+                    <a:spcPts val="500"/>
+                  </a:spcBef>
+                  <a:buFont typeface="Arial" panose="020B0604020202020204" pitchFamily="34" charset="0"/>
+                  <a:buChar char="•"/>
+                  <a:defRPr kumimoji="1" sz="2400" kern="1200">
+                    <a:solidFill>
+                      <a:schemeClr val="tx1"/>
+                    </a:solidFill>
+                    <a:latin typeface="+mn-lt"/>
+                    <a:ea typeface="+mn-ea"/>
+                    <a:cs typeface="+mn-cs"/>
+                  </a:defRPr>
+                </a:lvl2pPr>
+                <a:lvl3pPr marL="1143000" indent="-228600" algn="l" defTabSz="914400" rtl="0" eaLnBrk="1" latinLnBrk="0" hangingPunct="1">
+                  <a:lnSpc>
+                    <a:spcPct val="90000"/>
+                  </a:lnSpc>
+                  <a:spcBef>
+                    <a:spcPts val="500"/>
+                  </a:spcBef>
+                  <a:buFont typeface="Arial" panose="020B0604020202020204" pitchFamily="34" charset="0"/>
+                  <a:buChar char="•"/>
+                  <a:defRPr kumimoji="1" sz="2000" kern="1200">
+                    <a:solidFill>
+                      <a:schemeClr val="tx1"/>
+                    </a:solidFill>
+                    <a:latin typeface="+mn-lt"/>
+                    <a:ea typeface="+mn-ea"/>
+                    <a:cs typeface="+mn-cs"/>
+                  </a:defRPr>
+                </a:lvl3pPr>
+                <a:lvl4pPr marL="1600200" indent="-228600" algn="l" defTabSz="914400" rtl="0" eaLnBrk="1" latinLnBrk="0" hangingPunct="1">
+                  <a:lnSpc>
+                    <a:spcPct val="90000"/>
+                  </a:lnSpc>
+                  <a:spcBef>
+                    <a:spcPts val="500"/>
+                  </a:spcBef>
+                  <a:buFont typeface="Arial" panose="020B0604020202020204" pitchFamily="34" charset="0"/>
+                  <a:buChar char="•"/>
+                  <a:defRPr kumimoji="1" sz="1800" kern="1200">
+                    <a:solidFill>
+                      <a:schemeClr val="tx1"/>
+                    </a:solidFill>
+                    <a:latin typeface="+mn-lt"/>
+                    <a:ea typeface="+mn-ea"/>
+                    <a:cs typeface="+mn-cs"/>
+                  </a:defRPr>
+                </a:lvl4pPr>
+                <a:lvl5pPr marL="2057400" indent="-228600" algn="l" defTabSz="914400" rtl="0" eaLnBrk="1" latinLnBrk="0" hangingPunct="1">
+                  <a:lnSpc>
+                    <a:spcPct val="90000"/>
+                  </a:lnSpc>
+                  <a:spcBef>
+                    <a:spcPts val="500"/>
+                  </a:spcBef>
+                  <a:buFont typeface="Arial" panose="020B0604020202020204" pitchFamily="34" charset="0"/>
+                  <a:buChar char="•"/>
+                  <a:defRPr kumimoji="1" sz="1800" kern="1200">
+                    <a:solidFill>
+                      <a:schemeClr val="tx1"/>
+                    </a:solidFill>
+                    <a:latin typeface="+mn-lt"/>
+                    <a:ea typeface="+mn-ea"/>
+                    <a:cs typeface="+mn-cs"/>
+                  </a:defRPr>
+                </a:lvl5pPr>
+                <a:lvl6pPr marL="2514600" indent="-228600" algn="l" defTabSz="914400" rtl="0" eaLnBrk="1" latinLnBrk="0" hangingPunct="1">
+                  <a:lnSpc>
+                    <a:spcPct val="90000"/>
+                  </a:lnSpc>
+                  <a:spcBef>
+                    <a:spcPts val="500"/>
+                  </a:spcBef>
+                  <a:buFont typeface="Arial" panose="020B0604020202020204" pitchFamily="34" charset="0"/>
+                  <a:buChar char="•"/>
+                  <a:defRPr kumimoji="1" sz="1800" kern="1200">
+                    <a:solidFill>
+                      <a:schemeClr val="tx1"/>
+                    </a:solidFill>
+                    <a:latin typeface="+mn-lt"/>
+                    <a:ea typeface="+mn-ea"/>
+                    <a:cs typeface="+mn-cs"/>
+                  </a:defRPr>
+                </a:lvl6pPr>
+                <a:lvl7pPr marL="2971800" indent="-228600" algn="l" defTabSz="914400" rtl="0" eaLnBrk="1" latinLnBrk="0" hangingPunct="1">
+                  <a:lnSpc>
+                    <a:spcPct val="90000"/>
+                  </a:lnSpc>
+                  <a:spcBef>
+                    <a:spcPts val="500"/>
+                  </a:spcBef>
+                  <a:buFont typeface="Arial" panose="020B0604020202020204" pitchFamily="34" charset="0"/>
+                  <a:buChar char="•"/>
+                  <a:defRPr kumimoji="1" sz="1800" kern="1200">
+                    <a:solidFill>
+                      <a:schemeClr val="tx1"/>
+                    </a:solidFill>
+                    <a:latin typeface="+mn-lt"/>
+                    <a:ea typeface="+mn-ea"/>
+                    <a:cs typeface="+mn-cs"/>
+                  </a:defRPr>
+                </a:lvl7pPr>
+                <a:lvl8pPr marL="3429000" indent="-228600" algn="l" defTabSz="914400" rtl="0" eaLnBrk="1" latinLnBrk="0" hangingPunct="1">
+                  <a:lnSpc>
+                    <a:spcPct val="90000"/>
+                  </a:lnSpc>
+                  <a:spcBef>
+                    <a:spcPts val="500"/>
+                  </a:spcBef>
+                  <a:buFont typeface="Arial" panose="020B0604020202020204" pitchFamily="34" charset="0"/>
+                  <a:buChar char="•"/>
+                  <a:defRPr kumimoji="1" sz="1800" kern="1200">
+                    <a:solidFill>
+                      <a:schemeClr val="tx1"/>
+                    </a:solidFill>
+                    <a:latin typeface="+mn-lt"/>
+                    <a:ea typeface="+mn-ea"/>
+                    <a:cs typeface="+mn-cs"/>
+                  </a:defRPr>
+                </a:lvl8pPr>
+                <a:lvl9pPr marL="3886200" indent="-228600" algn="l" defTabSz="914400" rtl="0" eaLnBrk="1" latinLnBrk="0" hangingPunct="1">
+                  <a:lnSpc>
+                    <a:spcPct val="90000"/>
+                  </a:lnSpc>
+                  <a:spcBef>
+                    <a:spcPts val="500"/>
+                  </a:spcBef>
+                  <a:buFont typeface="Arial" panose="020B0604020202020204" pitchFamily="34" charset="0"/>
+                  <a:buChar char="•"/>
+                  <a:defRPr kumimoji="1" sz="1800" kern="1200">
+                    <a:solidFill>
+                      <a:schemeClr val="tx1"/>
+                    </a:solidFill>
+                    <a:latin typeface="+mn-lt"/>
+                    <a:ea typeface="+mn-ea"/>
+                    <a:cs typeface="+mn-cs"/>
+                  </a:defRPr>
+                </a:lvl9pPr>
+              </a:lstStyle>
+              <a:p>
+                <a:r>
+                  <a:rPr lang="en-US" altLang="ja-JP" sz="2400" dirty="0">
+                    <a:latin typeface="Calibri" panose="020F0502020204030204" pitchFamily="34" charset="0"/>
+                    <a:cs typeface="Calibri" panose="020F0502020204030204" pitchFamily="34" charset="0"/>
+                  </a:rPr>
+                  <a:t>How does </a:t>
+                </a:r>
+                <a:r>
+                  <a:rPr lang="en-US" altLang="ja-JP" sz="2400" b="1" dirty="0">
+                    <a:latin typeface="Calibri" panose="020F0502020204030204" pitchFamily="34" charset="0"/>
+                    <a:cs typeface="Calibri" panose="020F0502020204030204" pitchFamily="34" charset="0"/>
+                  </a:rPr>
+                  <a:t>the MSE of VCM decrease </a:t>
+                </a:r>
+                <a:r>
+                  <a:rPr lang="en-US" altLang="ja-JP" sz="2400" dirty="0">
+                    <a:latin typeface="Calibri" panose="020F0502020204030204" pitchFamily="34" charset="0"/>
+                    <a:cs typeface="Calibri" panose="020F0502020204030204" pitchFamily="34" charset="0"/>
+                  </a:rPr>
+                  <a:t>as the number of iterations </a:t>
+                </a:r>
+                <a14:m>
+                  <m:oMath xmlns:m="http://schemas.openxmlformats.org/officeDocument/2006/math">
+                    <m:r>
+                      <a:rPr lang="en-US" altLang="ja-JP" sz="2400" b="0" i="1" smtClean="0">
+                        <a:latin typeface="Cambria Math" panose="02040503050406030204" pitchFamily="18" charset="0"/>
+                        <a:cs typeface="Calibri" panose="020F0502020204030204" pitchFamily="34" charset="0"/>
+                      </a:rPr>
+                      <m:t>𝑖</m:t>
+                    </m:r>
+                  </m:oMath>
+                </a14:m>
+                <a:r>
+                  <a:rPr lang="en-US" altLang="ja-JP" sz="2400" dirty="0">
+                    <a:latin typeface="Calibri" panose="020F0502020204030204" pitchFamily="34" charset="0"/>
+                    <a:cs typeface="Calibri" panose="020F0502020204030204" pitchFamily="34" charset="0"/>
+                  </a:rPr>
+                  <a:t> increases?</a:t>
+                </a:r>
+                <a:br>
+                  <a:rPr lang="en-US" altLang="ja-JP" sz="2400" dirty="0">
+                    <a:latin typeface="Calibri" panose="020F0502020204030204" pitchFamily="34" charset="0"/>
+                    <a:cs typeface="Calibri" panose="020F0502020204030204" pitchFamily="34" charset="0"/>
+                  </a:rPr>
+                </a:br>
+                <a:r>
+                  <a:rPr lang="ja-JP" altLang="en-US" sz="2400" dirty="0">
+                    <a:latin typeface="Calibri" panose="020F0502020204030204" pitchFamily="34" charset="0"/>
+                    <a:cs typeface="Calibri" panose="020F0502020204030204" pitchFamily="34" charset="0"/>
+                  </a:rPr>
+                  <a:t>→ </a:t>
+                </a:r>
+                <a:r>
+                  <a:rPr lang="en-US" altLang="ja-JP" sz="2400" dirty="0">
+                    <a:latin typeface="Calibri" panose="020F0502020204030204" pitchFamily="34" charset="0"/>
+                    <a:cs typeface="Calibri" panose="020F0502020204030204" pitchFamily="34" charset="0"/>
+                  </a:rPr>
+                  <a:t>VCM achieves a convergence rate of </a:t>
+                </a:r>
+              </a:p>
+              <a:p>
+                <a:pPr marL="514350" indent="-514350">
+                  <a:buFont typeface="+mj-lt"/>
+                  <a:buAutoNum type="arabicPeriod"/>
+                </a:pPr>
+                <a:r>
+                  <a:rPr lang="en-US" altLang="ja-JP" sz="2400" dirty="0">
+                    <a:latin typeface="Calibri" panose="020F0502020204030204" pitchFamily="34" charset="0"/>
+                    <a:cs typeface="Calibri" panose="020F0502020204030204" pitchFamily="34" charset="0"/>
+                  </a:rPr>
+                  <a:t>O(</a:t>
+                </a:r>
+                <a14:m>
+                  <m:oMath xmlns:m="http://schemas.openxmlformats.org/officeDocument/2006/math">
+                    <m:sSup>
+                      <m:sSupPr>
+                        <m:ctrlPr>
+                          <a:rPr lang="en-US" altLang="ja-JP" sz="2400" b="0" i="1" smtClean="0">
+                            <a:latin typeface="Cambria Math" panose="02040503050406030204" pitchFamily="18" charset="0"/>
+                            <a:cs typeface="Calibri" panose="020F0502020204030204" pitchFamily="34" charset="0"/>
+                          </a:rPr>
+                        </m:ctrlPr>
+                      </m:sSupPr>
+                      <m:e>
+                        <m:r>
+                          <a:rPr lang="en-US" altLang="ja-JP" sz="2400" b="0" i="1" smtClean="0">
+                            <a:latin typeface="Cambria Math" panose="02040503050406030204" pitchFamily="18" charset="0"/>
+                            <a:cs typeface="Calibri" panose="020F0502020204030204" pitchFamily="34" charset="0"/>
+                          </a:rPr>
+                          <m:t>𝑁</m:t>
+                        </m:r>
+                      </m:e>
+                      <m:sup>
+                        <m:r>
+                          <a:rPr lang="en-US" altLang="ja-JP" sz="2400" b="0" i="1" smtClean="0">
+                            <a:latin typeface="Cambria Math" panose="02040503050406030204" pitchFamily="18" charset="0"/>
+                            <a:cs typeface="Calibri" panose="020F0502020204030204" pitchFamily="34" charset="0"/>
+                          </a:rPr>
+                          <m:t>-</m:t>
+                        </m:r>
+                        <m:r>
+                          <a:rPr lang="en-US" altLang="ja-JP" sz="2400" b="0" i="1" smtClean="0">
+                            <a:latin typeface="Cambria Math" panose="02040503050406030204" pitchFamily="18" charset="0"/>
+                            <a:cs typeface="Calibri" panose="020F0502020204030204" pitchFamily="34" charset="0"/>
+                          </a:rPr>
+                          <m:t>1</m:t>
+                        </m:r>
+                      </m:sup>
+                    </m:sSup>
+                  </m:oMath>
+                </a14:m>
+                <a:r>
+                  <a:rPr lang="en-US" altLang="ja-JP" sz="2400" dirty="0">
+                    <a:latin typeface="Calibri" panose="020F0502020204030204" pitchFamily="34" charset="0"/>
+                    <a:cs typeface="Calibri" panose="020F0502020204030204" pitchFamily="34" charset="0"/>
+                  </a:rPr>
+                  <a:t>) while </a:t>
+                </a:r>
+                <a:r>
+                  <a:rPr lang="en-US" altLang="ja-JP" sz="2400" b="1" dirty="0">
+                    <a:latin typeface="Calibri" panose="020F0502020204030204" pitchFamily="34" charset="0"/>
+                    <a:cs typeface="Calibri" panose="020F0502020204030204" pitchFamily="34" charset="0"/>
+                  </a:rPr>
+                  <a:t>maintaining BPT's convergence rate </a:t>
+                </a:r>
+                <a:br>
+                  <a:rPr lang="en-US" altLang="ja-JP" sz="2400" b="1" dirty="0">
+                    <a:latin typeface="Calibri" panose="020F0502020204030204" pitchFamily="34" charset="0"/>
+                    <a:cs typeface="Calibri" panose="020F0502020204030204" pitchFamily="34" charset="0"/>
+                  </a:rPr>
+                </a:br>
+                <a:r>
+                  <a:rPr lang="en-US" altLang="ja-JP" sz="2400" dirty="0">
+                    <a:latin typeface="Calibri" panose="020F0502020204030204" pitchFamily="34" charset="0"/>
+                    <a:cs typeface="Calibri" panose="020F0502020204030204" pitchFamily="34" charset="0"/>
+                  </a:rPr>
+                  <a:t>in paths can be sampled using BPT, such as diffuse and glossy reflections, </a:t>
+                </a:r>
+              </a:p>
+              <a:p>
+                <a:pPr marL="514350" indent="-514350">
+                  <a:buFont typeface="+mj-lt"/>
+                  <a:buAutoNum type="arabicPeriod"/>
+                </a:pPr>
+                <a:r>
+                  <a:rPr lang="en-US" altLang="ja-JP" sz="2400" dirty="0">
+                    <a:latin typeface="Calibri" panose="020F0502020204030204" pitchFamily="34" charset="0"/>
+                    <a:cs typeface="Calibri" panose="020F0502020204030204" pitchFamily="34" charset="0"/>
+                  </a:rPr>
+                  <a:t>O(</a:t>
+                </a:r>
+                <a14:m>
+                  <m:oMath xmlns:m="http://schemas.openxmlformats.org/officeDocument/2006/math">
+                    <m:sSup>
+                      <m:sSupPr>
+                        <m:ctrlPr>
+                          <a:rPr lang="en-US" altLang="ja-JP" sz="2400" b="0" i="1" smtClean="0">
+                            <a:latin typeface="Cambria Math" panose="02040503050406030204" pitchFamily="18" charset="0"/>
+                            <a:cs typeface="Calibri" panose="020F0502020204030204" pitchFamily="34" charset="0"/>
+                          </a:rPr>
+                        </m:ctrlPr>
+                      </m:sSupPr>
+                      <m:e>
+                        <m:r>
+                          <a:rPr lang="en-US" altLang="ja-JP" sz="2400" b="0" i="1" smtClean="0">
+                            <a:latin typeface="Cambria Math" panose="02040503050406030204" pitchFamily="18" charset="0"/>
+                            <a:cs typeface="Calibri" panose="020F0502020204030204" pitchFamily="34" charset="0"/>
+                          </a:rPr>
+                          <m:t>𝑁</m:t>
+                        </m:r>
+                      </m:e>
+                      <m:sup>
+                        <m:r>
+                          <a:rPr lang="en-US" altLang="ja-JP" sz="2400" b="0" i="1" smtClean="0">
+                            <a:latin typeface="Cambria Math" panose="02040503050406030204" pitchFamily="18" charset="0"/>
+                            <a:cs typeface="Calibri" panose="020F0502020204030204" pitchFamily="34" charset="0"/>
+                          </a:rPr>
+                          <m:t>-</m:t>
+                        </m:r>
+                        <m:r>
+                          <a:rPr lang="en-US" altLang="ja-JP" sz="2400" b="0" i="1" smtClean="0">
+                            <a:latin typeface="Cambria Math" panose="02040503050406030204" pitchFamily="18" charset="0"/>
+                            <a:cs typeface="Calibri" panose="020F0502020204030204" pitchFamily="34" charset="0"/>
+                          </a:rPr>
+                          <m:t>2</m:t>
+                        </m:r>
+                        <m:r>
+                          <m:rPr>
+                            <m:lit/>
+                          </m:rPr>
+                          <a:rPr lang="en-US" altLang="ja-JP" sz="2400" b="0" i="1" smtClean="0">
+                            <a:latin typeface="Cambria Math" panose="02040503050406030204" pitchFamily="18" charset="0"/>
+                            <a:cs typeface="Calibri" panose="020F0502020204030204" pitchFamily="34" charset="0"/>
+                          </a:rPr>
+                          <m:t>/</m:t>
+                        </m:r>
+                        <m:r>
+                          <a:rPr lang="en-US" altLang="ja-JP" sz="2400" b="0" i="1" smtClean="0">
+                            <a:latin typeface="Cambria Math" panose="02040503050406030204" pitchFamily="18" charset="0"/>
+                            <a:cs typeface="Calibri" panose="020F0502020204030204" pitchFamily="34" charset="0"/>
+                          </a:rPr>
+                          <m:t>3</m:t>
+                        </m:r>
+                      </m:sup>
+                    </m:sSup>
+                  </m:oMath>
+                </a14:m>
+                <a:r>
+                  <a:rPr lang="en-US" altLang="ja-JP" sz="2400" dirty="0">
+                    <a:latin typeface="Calibri" panose="020F0502020204030204" pitchFamily="34" charset="0"/>
+                    <a:cs typeface="Calibri" panose="020F0502020204030204" pitchFamily="34" charset="0"/>
+                  </a:rPr>
+                  <a:t>) (the convergence rate of PPM) </a:t>
+                </a:r>
+                <a:br>
+                  <a:rPr lang="en-US" altLang="ja-JP" sz="2400" dirty="0">
+                    <a:latin typeface="Calibri" panose="020F0502020204030204" pitchFamily="34" charset="0"/>
+                    <a:cs typeface="Calibri" panose="020F0502020204030204" pitchFamily="34" charset="0"/>
+                  </a:rPr>
+                </a:br>
+                <a:r>
+                  <a:rPr lang="en-US" altLang="ja-JP" sz="2400" dirty="0">
+                    <a:latin typeface="Calibri" panose="020F0502020204030204" pitchFamily="34" charset="0"/>
+                    <a:cs typeface="Calibri" panose="020F0502020204030204" pitchFamily="34" charset="0"/>
+                  </a:rPr>
+                  <a:t>even in cases where </a:t>
+                </a:r>
+                <a:r>
+                  <a:rPr lang="en-US" altLang="ja-JP" sz="2400" b="1" dirty="0">
+                    <a:latin typeface="Calibri" panose="020F0502020204030204" pitchFamily="34" charset="0"/>
+                    <a:cs typeface="Calibri" panose="020F0502020204030204" pitchFamily="34" charset="0"/>
+                  </a:rPr>
+                  <a:t>MIS is not possible, such as SDS path</a:t>
+                </a:r>
+              </a:p>
+            </p:txBody>
+          </p:sp>
+        </mc:Choice>
+        <mc:Fallback>
+          <p:sp>
+            <p:nvSpPr>
+              <p:cNvPr id="9" name="コンテンツ プレースホルダー 2">
+                <a:extLst>
+                  <a:ext uri="{FF2B5EF4-FFF2-40B4-BE49-F238E27FC236}">
+                    <a16:creationId xmlns:a16="http://schemas.microsoft.com/office/drawing/2014/main" id="{70996E79-FE7C-0EEE-4730-586905D39618}"/>
+                  </a:ext>
+                </a:extLst>
+              </p:cNvPr>
+              <p:cNvSpPr txBox="1">
+                <a:spLocks noRot="1" noChangeAspect="1" noMove="1" noResize="1" noEditPoints="1" noAdjustHandles="1" noChangeArrowheads="1" noChangeShapeType="1" noTextEdit="1"/>
+              </p:cNvSpPr>
+              <p:nvPr/>
+            </p:nvSpPr>
+            <p:spPr>
+              <a:xfrm>
+                <a:off x="138369" y="3157440"/>
+                <a:ext cx="11915260" cy="2441883"/>
+              </a:xfrm>
+              <a:prstGeom prst="rect">
+                <a:avLst/>
+              </a:prstGeom>
+              <a:blipFill>
+                <a:blip r:embed="rId5"/>
+                <a:stretch>
+                  <a:fillRect l="-819" t="-3491" b="-998"/>
+                </a:stretch>
+              </a:blipFill>
+            </p:spPr>
+            <p:txBody>
+              <a:bodyPr/>
+              <a:lstStyle/>
+              <a:p>
+                <a:r>
+                  <a:rPr lang="ja-JP" altLang="en-US">
+                    <a:noFill/>
+                  </a:rPr>
+                  <a:t> </a:t>
+                </a:r>
+              </a:p>
+            </p:txBody>
+          </p:sp>
+        </mc:Fallback>
+      </mc:AlternateContent>
+      <p:sp>
+        <p:nvSpPr>
+          <p:cNvPr id="10" name="矢印: 下 9">
+            <a:extLst>
+              <a:ext uri="{FF2B5EF4-FFF2-40B4-BE49-F238E27FC236}">
+                <a16:creationId xmlns:a16="http://schemas.microsoft.com/office/drawing/2014/main" id="{CD77D440-9462-8E36-58B9-DE52514C35CE}"/>
+              </a:ext>
+            </a:extLst>
+          </p:cNvPr>
+          <p:cNvSpPr/>
           <p:nvPr/>
         </p:nvSpPr>
         <p:spPr>
           <a:xfrm>
-            <a:off x="6836503" y="6319651"/>
-            <a:ext cx="3862135" cy="369332"/>
+            <a:off x="5962648" y="5550321"/>
+            <a:ext cx="266700" cy="333375"/>
           </a:xfrm>
-          <a:prstGeom prst="rect">
+          <a:prstGeom prst="downArrow">
             <a:avLst/>
           </a:prstGeom>
-          <a:noFill/>
         </p:spPr>
-        <p:txBody>
-          <a:bodyPr wrap="square" rtlCol="0">
-            <a:spAutoFit/>
-          </a:bodyPr>
+        <p:style>
+          <a:lnRef idx="2">
+            <a:schemeClr val="dk1">
+              <a:shade val="15000"/>
+            </a:schemeClr>
+          </a:lnRef>
+          <a:fillRef idx="1">
+            <a:schemeClr val="dk1"/>
+          </a:fillRef>
+          <a:effectRef idx="0">
+            <a:schemeClr val="dk1"/>
+          </a:effectRef>
+          <a:fontRef idx="minor">
+            <a:schemeClr val="lt1"/>
+          </a:fontRef>
+        </p:style>
+        <p:txBody>
+          <a:bodyPr rtlCol="0" anchor="ctr"/>
           <a:lstStyle/>
           <a:p>
             <a:pPr algn="ctr"/>
-            <a:r>
-              <a:rPr kumimoji="1" lang="en-US" altLang="ja-JP" dirty="0">
-                <a:latin typeface="Calibri" panose="020F0502020204030204" pitchFamily="34" charset="0"/>
-                <a:cs typeface="Calibri" panose="020F0502020204030204" pitchFamily="34" charset="0"/>
-              </a:rPr>
-              <a:t>BDPT’s overview [1]</a:t>
-            </a:r>
-            <a:endParaRPr kumimoji="1" lang="ja-JP" altLang="en-US" dirty="0">
-              <a:latin typeface="Calibri" panose="020F0502020204030204" pitchFamily="34" charset="0"/>
-              <a:cs typeface="Calibri" panose="020F0502020204030204" pitchFamily="34" charset="0"/>
-            </a:endParaRPr>
-          </a:p>
-        </p:txBody>
-      </p:sp>
-    </p:spTree>
-    <p:extLst>
-      <p:ext uri="{BB962C8B-B14F-4D97-AF65-F5344CB8AC3E}">
-        <p14:creationId xmlns:p14="http://schemas.microsoft.com/office/powerpoint/2010/main" val="272362213"/>
-      </p:ext>
-    </p:extLst>
-  </p:cSld>
-  <p:clrMapOvr>
-    <a:masterClrMapping/>
-  </p:clrMapOvr>
-</p:sld>
-</file>
-
-<file path=ppt/slides/slide4.xml><?xml version="1.0" encoding="utf-8"?>
-<p:sld xmlns:a="http://schemas.openxmlformats.org/drawingml/2006/main" xmlns:r="http://schemas.openxmlformats.org/officeDocument/2006/relationships" xmlns:p="http://schemas.openxmlformats.org/presentationml/2006/main">
-  <p:cSld>
-    <p:spTree>
-      <p:nvGrpSpPr>
-        <p:cNvPr id="1" name="">
-          <a:extLst>
-            <a:ext uri="{FF2B5EF4-FFF2-40B4-BE49-F238E27FC236}">
-              <a16:creationId xmlns:a16="http://schemas.microsoft.com/office/drawing/2014/main" id="{29B058D6-5919-7A36-FB5C-E733670A75D4}"/>
-            </a:ext>
-          </a:extLst>
-        </p:cNvPr>
-        <p:cNvGrpSpPr/>
-        <p:nvPr/>
-      </p:nvGrpSpPr>
-      <p:grpSpPr>
-        <a:xfrm>
-          <a:off x="0" y="0"/>
-          <a:ext cx="0" cy="0"/>
-          <a:chOff x="0" y="0"/>
-          <a:chExt cx="0" cy="0"/>
-        </a:xfrm>
-      </p:grpSpPr>
-      <p:sp>
-        <p:nvSpPr>
-          <p:cNvPr id="2" name="タイトル 1">
-            <a:extLst>
-              <a:ext uri="{FF2B5EF4-FFF2-40B4-BE49-F238E27FC236}">
-                <a16:creationId xmlns:a16="http://schemas.microsoft.com/office/drawing/2014/main" id="{84CAE209-4ACA-55D1-F4E9-4C6DC07487F1}"/>
-              </a:ext>
-            </a:extLst>
-          </p:cNvPr>
-          <p:cNvSpPr>
-            <a:spLocks noGrp="1"/>
-          </p:cNvSpPr>
-          <p:nvPr>
-            <p:ph type="title"/>
-          </p:nvPr>
-        </p:nvSpPr>
-        <p:spPr/>
-        <p:txBody>
-          <a:bodyPr/>
-          <a:lstStyle/>
-          <a:p>
-            <a:r>
-              <a:rPr kumimoji="1" lang="en-US" altLang="ja-JP" dirty="0"/>
-              <a:t>Background: (P)PM</a:t>
-            </a:r>
-            <a:endParaRPr kumimoji="1" lang="ja-JP" altLang="en-US" dirty="0"/>
-          </a:p>
-        </p:txBody>
-      </p:sp>
-      <p:sp>
-        <p:nvSpPr>
-          <p:cNvPr id="4" name="スライド番号プレースホルダー 3">
-            <a:extLst>
-              <a:ext uri="{FF2B5EF4-FFF2-40B4-BE49-F238E27FC236}">
-                <a16:creationId xmlns:a16="http://schemas.microsoft.com/office/drawing/2014/main" id="{752FE830-7059-F639-2527-C992AF07BC8B}"/>
-              </a:ext>
-            </a:extLst>
-          </p:cNvPr>
-          <p:cNvSpPr>
-            <a:spLocks noGrp="1"/>
-          </p:cNvSpPr>
-          <p:nvPr>
-            <p:ph type="sldNum" sz="quarter" idx="12"/>
-          </p:nvPr>
-        </p:nvSpPr>
-        <p:spPr/>
-        <p:txBody>
-          <a:bodyPr/>
-          <a:lstStyle/>
-          <a:p>
-            <a:fld id="{05A07A33-D779-4A79-A49C-E26576C728D8}" type="slidenum">
-              <a:rPr lang="ja-JP" altLang="en-US" smtClean="0"/>
-              <a:pPr/>
-              <a:t>4</a:t>
-            </a:fld>
-            <a:endParaRPr lang="ja-JP" altLang="en-US" dirty="0">
-              <a:latin typeface="Calibri" panose="020F0502020204030204" pitchFamily="34" charset="0"/>
-              <a:cs typeface="Calibri" panose="020F0502020204030204" pitchFamily="34" charset="0"/>
-            </a:endParaRPr>
-          </a:p>
-        </p:txBody>
-      </p:sp>
-      <p:sp>
-        <p:nvSpPr>
-          <p:cNvPr id="27" name="コンテンツ プレースホルダー 2">
-            <a:extLst>
-              <a:ext uri="{FF2B5EF4-FFF2-40B4-BE49-F238E27FC236}">
-                <a16:creationId xmlns:a16="http://schemas.microsoft.com/office/drawing/2014/main" id="{6F868C25-B29E-AAFB-FFC1-4EDBB120BC7E}"/>
+            <a:endParaRPr kumimoji="1" lang="ja-JP" altLang="en-US"/>
+          </a:p>
+        </p:txBody>
+      </p:sp>
+      <p:sp>
+        <p:nvSpPr>
+          <p:cNvPr id="11" name="コンテンツ プレースホルダー 2">
+            <a:extLst>
+              <a:ext uri="{FF2B5EF4-FFF2-40B4-BE49-F238E27FC236}">
+                <a16:creationId xmlns:a16="http://schemas.microsoft.com/office/drawing/2014/main" id="{A442793C-9832-8C5D-87F2-BC600AF2FA31}"/>
               </a:ext>
             </a:extLst>
           </p:cNvPr>
@@ -9375,8 +9950,8 @@
         </p:nvSpPr>
         <p:spPr>
           <a:xfrm>
-            <a:off x="247650" y="1325594"/>
-            <a:ext cx="11430000" cy="5325421"/>
+            <a:off x="290769" y="3309840"/>
+            <a:ext cx="11915260" cy="2441883"/>
           </a:xfrm>
           <a:prstGeom prst="rect">
             <a:avLst/>
@@ -9551,6 +10126,3268 @@
             </a:lvl9pPr>
           </a:lstStyle>
           <a:p>
+            <a:endParaRPr lang="en-US" altLang="ja-JP" sz="2400" b="1" dirty="0">
+              <a:latin typeface="Calibri" panose="020F0502020204030204" pitchFamily="34" charset="0"/>
+              <a:cs typeface="Calibri" panose="020F0502020204030204" pitchFamily="34" charset="0"/>
+            </a:endParaRPr>
+          </a:p>
+        </p:txBody>
+      </p:sp>
+      <p:sp>
+        <p:nvSpPr>
+          <p:cNvPr id="13" name="テキスト ボックス 12">
+            <a:extLst>
+              <a:ext uri="{FF2B5EF4-FFF2-40B4-BE49-F238E27FC236}">
+                <a16:creationId xmlns:a16="http://schemas.microsoft.com/office/drawing/2014/main" id="{145C555D-F76A-554F-4372-37670B1410D4}"/>
+              </a:ext>
+            </a:extLst>
+          </p:cNvPr>
+          <p:cNvSpPr txBox="1"/>
+          <p:nvPr/>
+        </p:nvSpPr>
+        <p:spPr>
+          <a:xfrm>
+            <a:off x="62168" y="6026571"/>
+            <a:ext cx="12067660" cy="461665"/>
+          </a:xfrm>
+          <a:prstGeom prst="rect">
+            <a:avLst/>
+          </a:prstGeom>
+          <a:noFill/>
+        </p:spPr>
+        <p:txBody>
+          <a:bodyPr wrap="square">
+            <a:spAutoFit/>
+          </a:bodyPr>
+          <a:lstStyle/>
+          <a:p>
+            <a:pPr algn="ctr"/>
+            <a:r>
+              <a:rPr lang="ja-JP" altLang="en-US" sz="2400" dirty="0">
+                <a:latin typeface="Calibri" panose="020F0502020204030204" pitchFamily="34" charset="0"/>
+                <a:cs typeface="Calibri" panose="020F0502020204030204" pitchFamily="34" charset="0"/>
+              </a:rPr>
+              <a:t>In error analysis as well, </a:t>
+            </a:r>
+            <a:r>
+              <a:rPr lang="en-US" altLang="ja-JP" sz="2400" dirty="0">
+                <a:latin typeface="Calibri" panose="020F0502020204030204" pitchFamily="34" charset="0"/>
+                <a:cs typeface="Calibri" panose="020F0502020204030204" pitchFamily="34" charset="0"/>
+              </a:rPr>
+              <a:t>VCM</a:t>
+            </a:r>
+            <a:r>
+              <a:rPr lang="ja-JP" altLang="en-US" sz="2400" dirty="0">
+                <a:latin typeface="Calibri" panose="020F0502020204030204" pitchFamily="34" charset="0"/>
+                <a:cs typeface="Calibri" panose="020F0502020204030204" pitchFamily="34" charset="0"/>
+              </a:rPr>
+              <a:t> have achieved a complementary </a:t>
+            </a:r>
+            <a:r>
+              <a:rPr lang="en-US" altLang="ja-JP" sz="2400" dirty="0">
+                <a:latin typeface="Calibri" panose="020F0502020204030204" pitchFamily="34" charset="0"/>
+                <a:cs typeface="Calibri" panose="020F0502020204030204" pitchFamily="34" charset="0"/>
+              </a:rPr>
+              <a:t>error rate </a:t>
+            </a:r>
+            <a:r>
+              <a:rPr lang="ja-JP" altLang="en-US" sz="2400" dirty="0">
+                <a:latin typeface="Calibri" panose="020F0502020204030204" pitchFamily="34" charset="0"/>
+                <a:cs typeface="Calibri" panose="020F0502020204030204" pitchFamily="34" charset="0"/>
+              </a:rPr>
+              <a:t>using both methods</a:t>
+            </a:r>
+          </a:p>
+        </p:txBody>
+      </p:sp>
+    </p:spTree>
+    <p:extLst>
+      <p:ext uri="{BB962C8B-B14F-4D97-AF65-F5344CB8AC3E}">
+        <p14:creationId xmlns:p14="http://schemas.microsoft.com/office/powerpoint/2010/main" val="347964480"/>
+      </p:ext>
+    </p:extLst>
+  </p:cSld>
+  <p:clrMapOvr>
+    <a:masterClrMapping/>
+  </p:clrMapOvr>
+</p:sld>
+</file>
+
+<file path=ppt/slides/slide11.xml><?xml version="1.0" encoding="utf-8"?>
+<p:sld xmlns:a="http://schemas.openxmlformats.org/drawingml/2006/main" xmlns:r="http://schemas.openxmlformats.org/officeDocument/2006/relationships" xmlns:p="http://schemas.openxmlformats.org/presentationml/2006/main">
+  <p:cSld>
+    <p:spTree>
+      <p:nvGrpSpPr>
+        <p:cNvPr id="1" name="">
+          <a:extLst>
+            <a:ext uri="{FF2B5EF4-FFF2-40B4-BE49-F238E27FC236}">
+              <a16:creationId xmlns:a16="http://schemas.microsoft.com/office/drawing/2014/main" id="{95D1C27B-8D74-E0D8-8475-EDE257E442C6}"/>
+            </a:ext>
+          </a:extLst>
+        </p:cNvPr>
+        <p:cNvGrpSpPr/>
+        <p:nvPr/>
+      </p:nvGrpSpPr>
+      <p:grpSpPr>
+        <a:xfrm>
+          <a:off x="0" y="0"/>
+          <a:ext cx="0" cy="0"/>
+          <a:chOff x="0" y="0"/>
+          <a:chExt cx="0" cy="0"/>
+        </a:xfrm>
+      </p:grpSpPr>
+      <p:sp>
+        <p:nvSpPr>
+          <p:cNvPr id="2" name="タイトル 1">
+            <a:extLst>
+              <a:ext uri="{FF2B5EF4-FFF2-40B4-BE49-F238E27FC236}">
+                <a16:creationId xmlns:a16="http://schemas.microsoft.com/office/drawing/2014/main" id="{E3BF6C0D-CC59-8B1B-3EED-F5777638E8BF}"/>
+              </a:ext>
+            </a:extLst>
+          </p:cNvPr>
+          <p:cNvSpPr>
+            <a:spLocks noGrp="1"/>
+          </p:cNvSpPr>
+          <p:nvPr>
+            <p:ph type="title"/>
+          </p:nvPr>
+        </p:nvSpPr>
+        <p:spPr/>
+        <p:txBody>
+          <a:bodyPr>
+            <a:normAutofit/>
+          </a:bodyPr>
+          <a:lstStyle/>
+          <a:p>
+            <a:r>
+              <a:rPr kumimoji="1" lang="en-US" altLang="ja-JP" dirty="0"/>
+              <a:t>Results (4min comparison)</a:t>
+            </a:r>
+            <a:endParaRPr kumimoji="1" lang="ja-JP" altLang="en-US" dirty="0"/>
+          </a:p>
+        </p:txBody>
+      </p:sp>
+      <p:sp>
+        <p:nvSpPr>
+          <p:cNvPr id="4" name="スライド番号プレースホルダー 3">
+            <a:extLst>
+              <a:ext uri="{FF2B5EF4-FFF2-40B4-BE49-F238E27FC236}">
+                <a16:creationId xmlns:a16="http://schemas.microsoft.com/office/drawing/2014/main" id="{CB43EEE5-D68C-8769-4CE3-8BA7773AE727}"/>
+              </a:ext>
+            </a:extLst>
+          </p:cNvPr>
+          <p:cNvSpPr>
+            <a:spLocks noGrp="1"/>
+          </p:cNvSpPr>
+          <p:nvPr>
+            <p:ph type="sldNum" sz="quarter" idx="12"/>
+          </p:nvPr>
+        </p:nvSpPr>
+        <p:spPr/>
+        <p:txBody>
+          <a:bodyPr/>
+          <a:lstStyle/>
+          <a:p>
+            <a:fld id="{05A07A33-D779-4A79-A49C-E26576C728D8}" type="slidenum">
+              <a:rPr lang="ja-JP" altLang="en-US" smtClean="0"/>
+              <a:pPr/>
+              <a:t>11</a:t>
+            </a:fld>
+            <a:endParaRPr lang="ja-JP" altLang="en-US" dirty="0">
+              <a:latin typeface="Calibri" panose="020F0502020204030204" pitchFamily="34" charset="0"/>
+              <a:cs typeface="Calibri" panose="020F0502020204030204" pitchFamily="34" charset="0"/>
+            </a:endParaRPr>
+          </a:p>
+        </p:txBody>
+      </p:sp>
+      <p:pic>
+        <p:nvPicPr>
+          <p:cNvPr id="5" name="図 4">
+            <a:extLst>
+              <a:ext uri="{FF2B5EF4-FFF2-40B4-BE49-F238E27FC236}">
+                <a16:creationId xmlns:a16="http://schemas.microsoft.com/office/drawing/2014/main" id="{E7F255B5-F06B-FE4F-0606-9C3992A45B4A}"/>
+              </a:ext>
+            </a:extLst>
+          </p:cNvPr>
+          <p:cNvPicPr>
+            <a:picLocks noChangeAspect="1"/>
+          </p:cNvPicPr>
+          <p:nvPr/>
+        </p:nvPicPr>
+        <p:blipFill>
+          <a:blip r:embed="rId2"/>
+          <a:stretch>
+            <a:fillRect/>
+          </a:stretch>
+        </p:blipFill>
+        <p:spPr>
+          <a:xfrm>
+            <a:off x="1324044" y="1218440"/>
+            <a:ext cx="9543911" cy="2547672"/>
+          </a:xfrm>
+          <a:prstGeom prst="rect">
+            <a:avLst/>
+          </a:prstGeom>
+        </p:spPr>
+      </p:pic>
+      <p:pic>
+        <p:nvPicPr>
+          <p:cNvPr id="7" name="図 6">
+            <a:extLst>
+              <a:ext uri="{FF2B5EF4-FFF2-40B4-BE49-F238E27FC236}">
+                <a16:creationId xmlns:a16="http://schemas.microsoft.com/office/drawing/2014/main" id="{DBC0A230-5A0D-4058-CBCA-53263A067E5F}"/>
+              </a:ext>
+            </a:extLst>
+          </p:cNvPr>
+          <p:cNvPicPr>
+            <a:picLocks noChangeAspect="1"/>
+          </p:cNvPicPr>
+          <p:nvPr/>
+        </p:nvPicPr>
+        <p:blipFill>
+          <a:blip r:embed="rId3"/>
+          <a:stretch>
+            <a:fillRect/>
+          </a:stretch>
+        </p:blipFill>
+        <p:spPr>
+          <a:xfrm>
+            <a:off x="1312212" y="3766112"/>
+            <a:ext cx="9567573" cy="2547672"/>
+          </a:xfrm>
+          <a:prstGeom prst="rect">
+            <a:avLst/>
+          </a:prstGeom>
+        </p:spPr>
+      </p:pic>
+      <p:sp>
+        <p:nvSpPr>
+          <p:cNvPr id="8" name="テキスト ボックス 7">
+            <a:extLst>
+              <a:ext uri="{FF2B5EF4-FFF2-40B4-BE49-F238E27FC236}">
+                <a16:creationId xmlns:a16="http://schemas.microsoft.com/office/drawing/2014/main" id="{E3AE949C-43D7-6C5D-A616-79231FFFF318}"/>
+              </a:ext>
+            </a:extLst>
+          </p:cNvPr>
+          <p:cNvSpPr txBox="1"/>
+          <p:nvPr/>
+        </p:nvSpPr>
+        <p:spPr>
+          <a:xfrm>
+            <a:off x="2447922" y="6379284"/>
+            <a:ext cx="7296152" cy="369332"/>
+          </a:xfrm>
+          <a:prstGeom prst="rect">
+            <a:avLst/>
+          </a:prstGeom>
+          <a:noFill/>
+        </p:spPr>
+        <p:txBody>
+          <a:bodyPr wrap="square" rtlCol="0">
+            <a:spAutoFit/>
+          </a:bodyPr>
+          <a:lstStyle/>
+          <a:p>
+            <a:pPr algn="ctr"/>
+            <a:r>
+              <a:rPr lang="en-US" altLang="ja-JP" dirty="0">
+                <a:latin typeface="Calibri" panose="020F0502020204030204" pitchFamily="34" charset="0"/>
+                <a:ea typeface="Calibri" panose="020F0502020204030204" pitchFamily="34" charset="0"/>
+                <a:cs typeface="Calibri" panose="020F0502020204030204" pitchFamily="34" charset="0"/>
+              </a:rPr>
+              <a:t>VCM combines the best features of BPT and PPM (note boxes and arrow)</a:t>
+            </a:r>
+            <a:endParaRPr kumimoji="1" lang="ja-JP" altLang="en-US" dirty="0">
+              <a:latin typeface="Calibri" panose="020F0502020204030204" pitchFamily="34" charset="0"/>
+              <a:cs typeface="Calibri" panose="020F0502020204030204" pitchFamily="34" charset="0"/>
+            </a:endParaRPr>
+          </a:p>
+        </p:txBody>
+      </p:sp>
+    </p:spTree>
+    <p:extLst>
+      <p:ext uri="{BB962C8B-B14F-4D97-AF65-F5344CB8AC3E}">
+        <p14:creationId xmlns:p14="http://schemas.microsoft.com/office/powerpoint/2010/main" val="2580373366"/>
+      </p:ext>
+    </p:extLst>
+  </p:cSld>
+  <p:clrMapOvr>
+    <a:masterClrMapping/>
+  </p:clrMapOvr>
+</p:sld>
+</file>
+
+<file path=ppt/slides/slide12.xml><?xml version="1.0" encoding="utf-8"?>
+<p:sld xmlns:a="http://schemas.openxmlformats.org/drawingml/2006/main" xmlns:r="http://schemas.openxmlformats.org/officeDocument/2006/relationships" xmlns:p="http://schemas.openxmlformats.org/presentationml/2006/main">
+  <p:cSld>
+    <p:spTree>
+      <p:nvGrpSpPr>
+        <p:cNvPr id="1" name="">
+          <a:extLst>
+            <a:ext uri="{FF2B5EF4-FFF2-40B4-BE49-F238E27FC236}">
+              <a16:creationId xmlns:a16="http://schemas.microsoft.com/office/drawing/2014/main" id="{76F7A168-A470-A0D8-AF6B-E7E98C7AC2B1}"/>
+            </a:ext>
+          </a:extLst>
+        </p:cNvPr>
+        <p:cNvGrpSpPr/>
+        <p:nvPr/>
+      </p:nvGrpSpPr>
+      <p:grpSpPr>
+        <a:xfrm>
+          <a:off x="0" y="0"/>
+          <a:ext cx="0" cy="0"/>
+          <a:chOff x="0" y="0"/>
+          <a:chExt cx="0" cy="0"/>
+        </a:xfrm>
+      </p:grpSpPr>
+      <p:sp>
+        <p:nvSpPr>
+          <p:cNvPr id="2" name="タイトル 1">
+            <a:extLst>
+              <a:ext uri="{FF2B5EF4-FFF2-40B4-BE49-F238E27FC236}">
+                <a16:creationId xmlns:a16="http://schemas.microsoft.com/office/drawing/2014/main" id="{85F7A872-299F-EE53-D245-B9BB2E9064A2}"/>
+              </a:ext>
+            </a:extLst>
+          </p:cNvPr>
+          <p:cNvSpPr>
+            <a:spLocks noGrp="1"/>
+          </p:cNvSpPr>
+          <p:nvPr>
+            <p:ph type="title"/>
+          </p:nvPr>
+        </p:nvSpPr>
+        <p:spPr/>
+        <p:txBody>
+          <a:bodyPr>
+            <a:normAutofit/>
+          </a:bodyPr>
+          <a:lstStyle/>
+          <a:p>
+            <a:r>
+              <a:rPr kumimoji="1" lang="en-US" altLang="ja-JP" dirty="0"/>
+              <a:t>Evaluation</a:t>
+            </a:r>
+            <a:endParaRPr kumimoji="1" lang="ja-JP" altLang="en-US" dirty="0"/>
+          </a:p>
+        </p:txBody>
+      </p:sp>
+      <p:sp>
+        <p:nvSpPr>
+          <p:cNvPr id="4" name="スライド番号プレースホルダー 3">
+            <a:extLst>
+              <a:ext uri="{FF2B5EF4-FFF2-40B4-BE49-F238E27FC236}">
+                <a16:creationId xmlns:a16="http://schemas.microsoft.com/office/drawing/2014/main" id="{404A7E84-02D3-0E01-2640-3E8C951DC0EF}"/>
+              </a:ext>
+            </a:extLst>
+          </p:cNvPr>
+          <p:cNvSpPr>
+            <a:spLocks noGrp="1"/>
+          </p:cNvSpPr>
+          <p:nvPr>
+            <p:ph type="sldNum" sz="quarter" idx="12"/>
+          </p:nvPr>
+        </p:nvSpPr>
+        <p:spPr/>
+        <p:txBody>
+          <a:bodyPr/>
+          <a:lstStyle/>
+          <a:p>
+            <a:fld id="{05A07A33-D779-4A79-A49C-E26576C728D8}" type="slidenum">
+              <a:rPr lang="ja-JP" altLang="en-US" smtClean="0"/>
+              <a:pPr/>
+              <a:t>12</a:t>
+            </a:fld>
+            <a:endParaRPr lang="ja-JP" altLang="en-US" dirty="0">
+              <a:latin typeface="Calibri" panose="020F0502020204030204" pitchFamily="34" charset="0"/>
+              <a:cs typeface="Calibri" panose="020F0502020204030204" pitchFamily="34" charset="0"/>
+            </a:endParaRPr>
+          </a:p>
+        </p:txBody>
+      </p:sp>
+      <p:sp>
+        <p:nvSpPr>
+          <p:cNvPr id="8" name="テキスト ボックス 7">
+            <a:extLst>
+              <a:ext uri="{FF2B5EF4-FFF2-40B4-BE49-F238E27FC236}">
+                <a16:creationId xmlns:a16="http://schemas.microsoft.com/office/drawing/2014/main" id="{D8FE0FD8-3B43-869E-5F36-72ECBB09015A}"/>
+              </a:ext>
+            </a:extLst>
+          </p:cNvPr>
+          <p:cNvSpPr txBox="1"/>
+          <p:nvPr/>
+        </p:nvSpPr>
+        <p:spPr>
+          <a:xfrm>
+            <a:off x="377608" y="5542057"/>
+            <a:ext cx="5153026" cy="923330"/>
+          </a:xfrm>
+          <a:prstGeom prst="rect">
+            <a:avLst/>
+          </a:prstGeom>
+          <a:noFill/>
+        </p:spPr>
+        <p:txBody>
+          <a:bodyPr wrap="square" rtlCol="0">
+            <a:spAutoFit/>
+          </a:bodyPr>
+          <a:lstStyle/>
+          <a:p>
+            <a:pPr algn="ctr"/>
+            <a:r>
+              <a:rPr lang="en-US" altLang="ja-JP" dirty="0">
+                <a:latin typeface="Calibri" panose="020F0502020204030204" pitchFamily="34" charset="0"/>
+                <a:ea typeface="Calibri" panose="020F0502020204030204" pitchFamily="34" charset="0"/>
+                <a:cs typeface="Calibri" panose="020F0502020204030204" pitchFamily="34" charset="0"/>
+              </a:rPr>
+              <a:t>Comparison of the contribution rates of VC and VM: As the number of iterations increases, the ratio of VM(which is more prone to error) decreases</a:t>
+            </a:r>
+            <a:endParaRPr kumimoji="1" lang="ja-JP" altLang="en-US" dirty="0">
+              <a:latin typeface="Calibri" panose="020F0502020204030204" pitchFamily="34" charset="0"/>
+              <a:cs typeface="Calibri" panose="020F0502020204030204" pitchFamily="34" charset="0"/>
+            </a:endParaRPr>
+          </a:p>
+        </p:txBody>
+      </p:sp>
+      <p:pic>
+        <p:nvPicPr>
+          <p:cNvPr id="6" name="図 5">
+            <a:extLst>
+              <a:ext uri="{FF2B5EF4-FFF2-40B4-BE49-F238E27FC236}">
+                <a16:creationId xmlns:a16="http://schemas.microsoft.com/office/drawing/2014/main" id="{7AAFB354-4463-2558-B66E-58AB740A386B}"/>
+              </a:ext>
+            </a:extLst>
+          </p:cNvPr>
+          <p:cNvPicPr>
+            <a:picLocks noChangeAspect="1"/>
+          </p:cNvPicPr>
+          <p:nvPr/>
+        </p:nvPicPr>
+        <p:blipFill>
+          <a:blip r:embed="rId2"/>
+          <a:srcRect l="50237"/>
+          <a:stretch>
+            <a:fillRect/>
+          </a:stretch>
+        </p:blipFill>
+        <p:spPr>
+          <a:xfrm>
+            <a:off x="693968" y="3527862"/>
+            <a:ext cx="4454584" cy="1962656"/>
+          </a:xfrm>
+          <a:prstGeom prst="rect">
+            <a:avLst/>
+          </a:prstGeom>
+        </p:spPr>
+      </p:pic>
+      <p:pic>
+        <p:nvPicPr>
+          <p:cNvPr id="10" name="図 9">
+            <a:extLst>
+              <a:ext uri="{FF2B5EF4-FFF2-40B4-BE49-F238E27FC236}">
+                <a16:creationId xmlns:a16="http://schemas.microsoft.com/office/drawing/2014/main" id="{CAB212D3-D86B-567C-A9AE-039A280DF8D2}"/>
+              </a:ext>
+            </a:extLst>
+          </p:cNvPr>
+          <p:cNvPicPr>
+            <a:picLocks noChangeAspect="1"/>
+          </p:cNvPicPr>
+          <p:nvPr/>
+        </p:nvPicPr>
+        <p:blipFill>
+          <a:blip r:embed="rId3"/>
+          <a:stretch>
+            <a:fillRect/>
+          </a:stretch>
+        </p:blipFill>
+        <p:spPr>
+          <a:xfrm>
+            <a:off x="6091526" y="1173751"/>
+            <a:ext cx="5207118" cy="2405117"/>
+          </a:xfrm>
+          <a:prstGeom prst="rect">
+            <a:avLst/>
+          </a:prstGeom>
+        </p:spPr>
+      </p:pic>
+      <p:pic>
+        <p:nvPicPr>
+          <p:cNvPr id="11" name="図 10">
+            <a:extLst>
+              <a:ext uri="{FF2B5EF4-FFF2-40B4-BE49-F238E27FC236}">
+                <a16:creationId xmlns:a16="http://schemas.microsoft.com/office/drawing/2014/main" id="{D83A690C-EC93-43B4-3A26-510F8F558027}"/>
+              </a:ext>
+            </a:extLst>
+          </p:cNvPr>
+          <p:cNvPicPr>
+            <a:picLocks noChangeAspect="1"/>
+          </p:cNvPicPr>
+          <p:nvPr/>
+        </p:nvPicPr>
+        <p:blipFill>
+          <a:blip r:embed="rId2"/>
+          <a:srcRect r="49763"/>
+          <a:stretch>
+            <a:fillRect/>
+          </a:stretch>
+        </p:blipFill>
+        <p:spPr>
+          <a:xfrm>
+            <a:off x="705599" y="1513667"/>
+            <a:ext cx="4497045" cy="1962656"/>
+          </a:xfrm>
+          <a:prstGeom prst="rect">
+            <a:avLst/>
+          </a:prstGeom>
+        </p:spPr>
+      </p:pic>
+      <p:pic>
+        <p:nvPicPr>
+          <p:cNvPr id="13" name="図 12">
+            <a:extLst>
+              <a:ext uri="{FF2B5EF4-FFF2-40B4-BE49-F238E27FC236}">
+                <a16:creationId xmlns:a16="http://schemas.microsoft.com/office/drawing/2014/main" id="{DE15B765-CF52-10C8-AC92-577924DD1D6C}"/>
+              </a:ext>
+            </a:extLst>
+          </p:cNvPr>
+          <p:cNvPicPr>
+            <a:picLocks noChangeAspect="1"/>
+          </p:cNvPicPr>
+          <p:nvPr/>
+        </p:nvPicPr>
+        <p:blipFill>
+          <a:blip r:embed="rId4"/>
+          <a:stretch>
+            <a:fillRect/>
+          </a:stretch>
+        </p:blipFill>
+        <p:spPr>
+          <a:xfrm>
+            <a:off x="6091526" y="4041176"/>
+            <a:ext cx="5153026" cy="2444625"/>
+          </a:xfrm>
+          <a:prstGeom prst="rect">
+            <a:avLst/>
+          </a:prstGeom>
+        </p:spPr>
+      </p:pic>
+      <p:sp>
+        <p:nvSpPr>
+          <p:cNvPr id="15" name="テキスト ボックス 14">
+            <a:extLst>
+              <a:ext uri="{FF2B5EF4-FFF2-40B4-BE49-F238E27FC236}">
+                <a16:creationId xmlns:a16="http://schemas.microsoft.com/office/drawing/2014/main" id="{0804A0BE-7A49-2353-8B48-AB496571BD6A}"/>
+              </a:ext>
+            </a:extLst>
+          </p:cNvPr>
+          <p:cNvSpPr txBox="1"/>
+          <p:nvPr/>
+        </p:nvSpPr>
+        <p:spPr>
+          <a:xfrm>
+            <a:off x="5647083" y="3421826"/>
+            <a:ext cx="6096000" cy="646331"/>
+          </a:xfrm>
+          <a:prstGeom prst="rect">
+            <a:avLst/>
+          </a:prstGeom>
+          <a:noFill/>
+        </p:spPr>
+        <p:txBody>
+          <a:bodyPr wrap="square">
+            <a:spAutoFit/>
+          </a:bodyPr>
+          <a:lstStyle/>
+          <a:p>
+            <a:pPr algn="ctr"/>
+            <a:r>
+              <a:rPr lang="en-US" altLang="ja-JP" dirty="0">
+                <a:latin typeface="Calibri" panose="020F0502020204030204" pitchFamily="34" charset="0"/>
+                <a:cs typeface="Calibri" panose="020F0502020204030204" pitchFamily="34" charset="0"/>
+              </a:rPr>
+              <a:t>C</a:t>
+            </a:r>
+            <a:r>
+              <a:rPr lang="ja-JP" altLang="en-US" dirty="0">
+                <a:latin typeface="Calibri" panose="020F0502020204030204" pitchFamily="34" charset="0"/>
+                <a:cs typeface="Calibri" panose="020F0502020204030204" pitchFamily="34" charset="0"/>
+              </a:rPr>
+              <a:t>omparison of convergence </a:t>
+            </a:r>
+            <a:r>
+              <a:rPr lang="en-US" altLang="ja-JP" dirty="0">
+                <a:latin typeface="Calibri" panose="020F0502020204030204" pitchFamily="34" charset="0"/>
+                <a:cs typeface="Calibri" panose="020F0502020204030204" pitchFamily="34" charset="0"/>
+              </a:rPr>
+              <a:t>between</a:t>
+            </a:r>
+            <a:r>
+              <a:rPr lang="ja-JP" altLang="en-US" dirty="0">
+                <a:latin typeface="Calibri" panose="020F0502020204030204" pitchFamily="34" charset="0"/>
+                <a:cs typeface="Calibri" panose="020F0502020204030204" pitchFamily="34" charset="0"/>
+              </a:rPr>
+              <a:t> </a:t>
+            </a:r>
+            <a:r>
+              <a:rPr lang="en-US" altLang="ja-JP" dirty="0">
+                <a:latin typeface="Calibri" panose="020F0502020204030204" pitchFamily="34" charset="0"/>
+                <a:cs typeface="Calibri" panose="020F0502020204030204" pitchFamily="34" charset="0"/>
+              </a:rPr>
+              <a:t>pure </a:t>
+            </a:r>
+            <a:r>
+              <a:rPr lang="ja-JP" altLang="en-US" dirty="0">
+                <a:latin typeface="Calibri" panose="020F0502020204030204" pitchFamily="34" charset="0"/>
+                <a:cs typeface="Calibri" panose="020F0502020204030204" pitchFamily="34" charset="0"/>
+              </a:rPr>
+              <a:t>PPM and VCM, experimentally demonstrating that VCM is unbiased</a:t>
+            </a:r>
+          </a:p>
+        </p:txBody>
+      </p:sp>
+      <p:sp>
+        <p:nvSpPr>
+          <p:cNvPr id="16" name="テキスト ボックス 15">
+            <a:extLst>
+              <a:ext uri="{FF2B5EF4-FFF2-40B4-BE49-F238E27FC236}">
+                <a16:creationId xmlns:a16="http://schemas.microsoft.com/office/drawing/2014/main" id="{2B81196C-34C5-31F8-2911-43AC53E78CBB}"/>
+              </a:ext>
+            </a:extLst>
+          </p:cNvPr>
+          <p:cNvSpPr txBox="1"/>
+          <p:nvPr/>
+        </p:nvSpPr>
+        <p:spPr>
+          <a:xfrm>
+            <a:off x="5403160" y="6404322"/>
+            <a:ext cx="6583847" cy="369332"/>
+          </a:xfrm>
+          <a:prstGeom prst="rect">
+            <a:avLst/>
+          </a:prstGeom>
+          <a:noFill/>
+        </p:spPr>
+        <p:txBody>
+          <a:bodyPr wrap="square">
+            <a:spAutoFit/>
+          </a:bodyPr>
+          <a:lstStyle/>
+          <a:p>
+            <a:pPr algn="ctr"/>
+            <a:r>
+              <a:rPr lang="en-US" altLang="ja-JP" dirty="0">
+                <a:latin typeface="Calibri" panose="020F0502020204030204" pitchFamily="34" charset="0"/>
+                <a:cs typeface="Calibri" panose="020F0502020204030204" pitchFamily="34" charset="0"/>
+              </a:rPr>
+              <a:t>Comparison of convergence between BPT and PPM in each scene</a:t>
+            </a:r>
+            <a:endParaRPr lang="ja-JP" altLang="en-US" dirty="0">
+              <a:latin typeface="Calibri" panose="020F0502020204030204" pitchFamily="34" charset="0"/>
+              <a:cs typeface="Calibri" panose="020F0502020204030204" pitchFamily="34" charset="0"/>
+            </a:endParaRPr>
+          </a:p>
+        </p:txBody>
+      </p:sp>
+    </p:spTree>
+    <p:extLst>
+      <p:ext uri="{BB962C8B-B14F-4D97-AF65-F5344CB8AC3E}">
+        <p14:creationId xmlns:p14="http://schemas.microsoft.com/office/powerpoint/2010/main" val="3816018194"/>
+      </p:ext>
+    </p:extLst>
+  </p:cSld>
+  <p:clrMapOvr>
+    <a:masterClrMapping/>
+  </p:clrMapOvr>
+</p:sld>
+</file>
+
+<file path=ppt/slides/slide13.xml><?xml version="1.0" encoding="utf-8"?>
+<p:sld xmlns:a="http://schemas.openxmlformats.org/drawingml/2006/main" xmlns:r="http://schemas.openxmlformats.org/officeDocument/2006/relationships" xmlns:p="http://schemas.openxmlformats.org/presentationml/2006/main">
+  <p:cSld>
+    <p:spTree>
+      <p:nvGrpSpPr>
+        <p:cNvPr id="1" name="">
+          <a:extLst>
+            <a:ext uri="{FF2B5EF4-FFF2-40B4-BE49-F238E27FC236}">
+              <a16:creationId xmlns:a16="http://schemas.microsoft.com/office/drawing/2014/main" id="{0E9BCC7D-2151-05F1-8C3A-27F64EE33C70}"/>
+            </a:ext>
+          </a:extLst>
+        </p:cNvPr>
+        <p:cNvGrpSpPr/>
+        <p:nvPr/>
+      </p:nvGrpSpPr>
+      <p:grpSpPr>
+        <a:xfrm>
+          <a:off x="0" y="0"/>
+          <a:ext cx="0" cy="0"/>
+          <a:chOff x="0" y="0"/>
+          <a:chExt cx="0" cy="0"/>
+        </a:xfrm>
+      </p:grpSpPr>
+      <p:sp>
+        <p:nvSpPr>
+          <p:cNvPr id="2" name="タイトル 1">
+            <a:extLst>
+              <a:ext uri="{FF2B5EF4-FFF2-40B4-BE49-F238E27FC236}">
+                <a16:creationId xmlns:a16="http://schemas.microsoft.com/office/drawing/2014/main" id="{EDD45221-E832-DC3B-E290-C3E7A8BACB97}"/>
+              </a:ext>
+            </a:extLst>
+          </p:cNvPr>
+          <p:cNvSpPr>
+            <a:spLocks noGrp="1"/>
+          </p:cNvSpPr>
+          <p:nvPr>
+            <p:ph type="title"/>
+          </p:nvPr>
+        </p:nvSpPr>
+        <p:spPr/>
+        <p:txBody>
+          <a:bodyPr>
+            <a:normAutofit/>
+          </a:bodyPr>
+          <a:lstStyle/>
+          <a:p>
+            <a:r>
+              <a:rPr kumimoji="1" lang="en-US" altLang="ja-JP" dirty="0"/>
+              <a:t>Discussion</a:t>
+            </a:r>
+            <a:endParaRPr kumimoji="1" lang="ja-JP" altLang="en-US" dirty="0"/>
+          </a:p>
+        </p:txBody>
+      </p:sp>
+      <p:sp>
+        <p:nvSpPr>
+          <p:cNvPr id="4" name="スライド番号プレースホルダー 3">
+            <a:extLst>
+              <a:ext uri="{FF2B5EF4-FFF2-40B4-BE49-F238E27FC236}">
+                <a16:creationId xmlns:a16="http://schemas.microsoft.com/office/drawing/2014/main" id="{C1D741D2-68CC-4C51-3A1D-8F93E9BFF61C}"/>
+              </a:ext>
+            </a:extLst>
+          </p:cNvPr>
+          <p:cNvSpPr>
+            <a:spLocks noGrp="1"/>
+          </p:cNvSpPr>
+          <p:nvPr>
+            <p:ph type="sldNum" sz="quarter" idx="12"/>
+          </p:nvPr>
+        </p:nvSpPr>
+        <p:spPr/>
+        <p:txBody>
+          <a:bodyPr/>
+          <a:lstStyle/>
+          <a:p>
+            <a:fld id="{05A07A33-D779-4A79-A49C-E26576C728D8}" type="slidenum">
+              <a:rPr lang="ja-JP" altLang="en-US" smtClean="0"/>
+              <a:pPr/>
+              <a:t>13</a:t>
+            </a:fld>
+            <a:endParaRPr lang="ja-JP" altLang="en-US" dirty="0">
+              <a:latin typeface="Calibri" panose="020F0502020204030204" pitchFamily="34" charset="0"/>
+              <a:cs typeface="Calibri" panose="020F0502020204030204" pitchFamily="34" charset="0"/>
+            </a:endParaRPr>
+          </a:p>
+        </p:txBody>
+      </p:sp>
+      <p:sp>
+        <p:nvSpPr>
+          <p:cNvPr id="3" name="コンテンツ プレースホルダー 2">
+            <a:extLst>
+              <a:ext uri="{FF2B5EF4-FFF2-40B4-BE49-F238E27FC236}">
+                <a16:creationId xmlns:a16="http://schemas.microsoft.com/office/drawing/2014/main" id="{D0627909-2C57-7F2B-4D92-42B5776F507C}"/>
+              </a:ext>
+            </a:extLst>
+          </p:cNvPr>
+          <p:cNvSpPr txBox="1">
+            <a:spLocks/>
+          </p:cNvSpPr>
+          <p:nvPr/>
+        </p:nvSpPr>
+        <p:spPr>
+          <a:xfrm>
+            <a:off x="138370" y="1548018"/>
+            <a:ext cx="11915260" cy="1880982"/>
+          </a:xfrm>
+          <a:prstGeom prst="rect">
+            <a:avLst/>
+          </a:prstGeom>
+        </p:spPr>
+        <p:txBody>
+          <a:bodyPr vert="horz" lIns="91440" tIns="45720" rIns="91440" bIns="45720" rtlCol="0">
+            <a:normAutofit/>
+          </a:bodyPr>
+          <a:lstStyle>
+            <a:lvl1pPr marL="228600" indent="-228600" algn="l" defTabSz="914400" rtl="0" eaLnBrk="1" latinLnBrk="0" hangingPunct="1">
+              <a:lnSpc>
+                <a:spcPct val="90000"/>
+              </a:lnSpc>
+              <a:spcBef>
+                <a:spcPts val="1000"/>
+              </a:spcBef>
+              <a:buFont typeface="Arial" panose="020B0604020202020204" pitchFamily="34" charset="0"/>
+              <a:buChar char="•"/>
+              <a:defRPr kumimoji="1" sz="2800" kern="1200">
+                <a:solidFill>
+                  <a:schemeClr val="tx1"/>
+                </a:solidFill>
+                <a:latin typeface="+mn-lt"/>
+                <a:ea typeface="+mn-ea"/>
+                <a:cs typeface="+mn-cs"/>
+              </a:defRPr>
+            </a:lvl1pPr>
+            <a:lvl2pPr marL="685800" indent="-228600" algn="l" defTabSz="914400" rtl="0" eaLnBrk="1" latinLnBrk="0" hangingPunct="1">
+              <a:lnSpc>
+                <a:spcPct val="90000"/>
+              </a:lnSpc>
+              <a:spcBef>
+                <a:spcPts val="500"/>
+              </a:spcBef>
+              <a:buFont typeface="Arial" panose="020B0604020202020204" pitchFamily="34" charset="0"/>
+              <a:buChar char="•"/>
+              <a:defRPr kumimoji="1" sz="2400" kern="1200">
+                <a:solidFill>
+                  <a:schemeClr val="tx1"/>
+                </a:solidFill>
+                <a:latin typeface="+mn-lt"/>
+                <a:ea typeface="+mn-ea"/>
+                <a:cs typeface="+mn-cs"/>
+              </a:defRPr>
+            </a:lvl2pPr>
+            <a:lvl3pPr marL="1143000" indent="-228600" algn="l" defTabSz="914400" rtl="0" eaLnBrk="1" latinLnBrk="0" hangingPunct="1">
+              <a:lnSpc>
+                <a:spcPct val="90000"/>
+              </a:lnSpc>
+              <a:spcBef>
+                <a:spcPts val="500"/>
+              </a:spcBef>
+              <a:buFont typeface="Arial" panose="020B0604020202020204" pitchFamily="34" charset="0"/>
+              <a:buChar char="•"/>
+              <a:defRPr kumimoji="1" sz="2000" kern="1200">
+                <a:solidFill>
+                  <a:schemeClr val="tx1"/>
+                </a:solidFill>
+                <a:latin typeface="+mn-lt"/>
+                <a:ea typeface="+mn-ea"/>
+                <a:cs typeface="+mn-cs"/>
+              </a:defRPr>
+            </a:lvl3pPr>
+            <a:lvl4pPr marL="1600200" indent="-228600" algn="l" defTabSz="914400" rtl="0" eaLnBrk="1" latinLnBrk="0" hangingPunct="1">
+              <a:lnSpc>
+                <a:spcPct val="90000"/>
+              </a:lnSpc>
+              <a:spcBef>
+                <a:spcPts val="500"/>
+              </a:spcBef>
+              <a:buFont typeface="Arial" panose="020B0604020202020204" pitchFamily="34" charset="0"/>
+              <a:buChar char="•"/>
+              <a:defRPr kumimoji="1" sz="1800" kern="1200">
+                <a:solidFill>
+                  <a:schemeClr val="tx1"/>
+                </a:solidFill>
+                <a:latin typeface="+mn-lt"/>
+                <a:ea typeface="+mn-ea"/>
+                <a:cs typeface="+mn-cs"/>
+              </a:defRPr>
+            </a:lvl4pPr>
+            <a:lvl5pPr marL="2057400" indent="-228600" algn="l" defTabSz="914400" rtl="0" eaLnBrk="1" latinLnBrk="0" hangingPunct="1">
+              <a:lnSpc>
+                <a:spcPct val="90000"/>
+              </a:lnSpc>
+              <a:spcBef>
+                <a:spcPts val="500"/>
+              </a:spcBef>
+              <a:buFont typeface="Arial" panose="020B0604020202020204" pitchFamily="34" charset="0"/>
+              <a:buChar char="•"/>
+              <a:defRPr kumimoji="1" sz="1800" kern="1200">
+                <a:solidFill>
+                  <a:schemeClr val="tx1"/>
+                </a:solidFill>
+                <a:latin typeface="+mn-lt"/>
+                <a:ea typeface="+mn-ea"/>
+                <a:cs typeface="+mn-cs"/>
+              </a:defRPr>
+            </a:lvl5pPr>
+            <a:lvl6pPr marL="2514600" indent="-228600" algn="l" defTabSz="914400" rtl="0" eaLnBrk="1" latinLnBrk="0" hangingPunct="1">
+              <a:lnSpc>
+                <a:spcPct val="90000"/>
+              </a:lnSpc>
+              <a:spcBef>
+                <a:spcPts val="500"/>
+              </a:spcBef>
+              <a:buFont typeface="Arial" panose="020B0604020202020204" pitchFamily="34" charset="0"/>
+              <a:buChar char="•"/>
+              <a:defRPr kumimoji="1" sz="1800" kern="1200">
+                <a:solidFill>
+                  <a:schemeClr val="tx1"/>
+                </a:solidFill>
+                <a:latin typeface="+mn-lt"/>
+                <a:ea typeface="+mn-ea"/>
+                <a:cs typeface="+mn-cs"/>
+              </a:defRPr>
+            </a:lvl6pPr>
+            <a:lvl7pPr marL="2971800" indent="-228600" algn="l" defTabSz="914400" rtl="0" eaLnBrk="1" latinLnBrk="0" hangingPunct="1">
+              <a:lnSpc>
+                <a:spcPct val="90000"/>
+              </a:lnSpc>
+              <a:spcBef>
+                <a:spcPts val="500"/>
+              </a:spcBef>
+              <a:buFont typeface="Arial" panose="020B0604020202020204" pitchFamily="34" charset="0"/>
+              <a:buChar char="•"/>
+              <a:defRPr kumimoji="1" sz="1800" kern="1200">
+                <a:solidFill>
+                  <a:schemeClr val="tx1"/>
+                </a:solidFill>
+                <a:latin typeface="+mn-lt"/>
+                <a:ea typeface="+mn-ea"/>
+                <a:cs typeface="+mn-cs"/>
+              </a:defRPr>
+            </a:lvl7pPr>
+            <a:lvl8pPr marL="3429000" indent="-228600" algn="l" defTabSz="914400" rtl="0" eaLnBrk="1" latinLnBrk="0" hangingPunct="1">
+              <a:lnSpc>
+                <a:spcPct val="90000"/>
+              </a:lnSpc>
+              <a:spcBef>
+                <a:spcPts val="500"/>
+              </a:spcBef>
+              <a:buFont typeface="Arial" panose="020B0604020202020204" pitchFamily="34" charset="0"/>
+              <a:buChar char="•"/>
+              <a:defRPr kumimoji="1" sz="1800" kern="1200">
+                <a:solidFill>
+                  <a:schemeClr val="tx1"/>
+                </a:solidFill>
+                <a:latin typeface="+mn-lt"/>
+                <a:ea typeface="+mn-ea"/>
+                <a:cs typeface="+mn-cs"/>
+              </a:defRPr>
+            </a:lvl8pPr>
+            <a:lvl9pPr marL="3886200" indent="-228600" algn="l" defTabSz="914400" rtl="0" eaLnBrk="1" latinLnBrk="0" hangingPunct="1">
+              <a:lnSpc>
+                <a:spcPct val="90000"/>
+              </a:lnSpc>
+              <a:spcBef>
+                <a:spcPts val="500"/>
+              </a:spcBef>
+              <a:buFont typeface="Arial" panose="020B0604020202020204" pitchFamily="34" charset="0"/>
+              <a:buChar char="•"/>
+              <a:defRPr kumimoji="1" sz="1800" kern="1200">
+                <a:solidFill>
+                  <a:schemeClr val="tx1"/>
+                </a:solidFill>
+                <a:latin typeface="+mn-lt"/>
+                <a:ea typeface="+mn-ea"/>
+                <a:cs typeface="+mn-cs"/>
+              </a:defRPr>
+            </a:lvl9pPr>
+          </a:lstStyle>
+          <a:p>
+            <a:r>
+              <a:rPr lang="en-US" altLang="ja-JP" sz="2400" dirty="0">
+                <a:latin typeface="Calibri" panose="020F0502020204030204" pitchFamily="34" charset="0"/>
+                <a:cs typeface="Calibri" panose="020F0502020204030204" pitchFamily="34" charset="0"/>
+              </a:rPr>
+              <a:t>It is </a:t>
+            </a:r>
+            <a:r>
+              <a:rPr lang="en-US" altLang="ja-JP" sz="2400" b="1" dirty="0">
+                <a:latin typeface="Calibri" panose="020F0502020204030204" pitchFamily="34" charset="0"/>
+                <a:cs typeface="Calibri" panose="020F0502020204030204" pitchFamily="34" charset="0"/>
+              </a:rPr>
+              <a:t>extremely</a:t>
+            </a:r>
+            <a:r>
+              <a:rPr lang="en-US" altLang="ja-JP" sz="2400" dirty="0">
+                <a:latin typeface="Calibri" panose="020F0502020204030204" pitchFamily="34" charset="0"/>
+                <a:cs typeface="Calibri" panose="020F0502020204030204" pitchFamily="34" charset="0"/>
+              </a:rPr>
+              <a:t> difficult to implement</a:t>
+            </a:r>
+          </a:p>
+          <a:p>
+            <a:pPr lvl="1"/>
+            <a:r>
+              <a:rPr lang="en-US" altLang="ja-JP" sz="2000" b="1" dirty="0">
+                <a:latin typeface="Calibri" panose="020F0502020204030204" pitchFamily="34" charset="0"/>
+                <a:cs typeface="Calibri" panose="020F0502020204030204" pitchFamily="34" charset="0"/>
+              </a:rPr>
+              <a:t>Even though either one is complex</a:t>
+            </a:r>
+            <a:r>
+              <a:rPr lang="en-US" altLang="ja-JP" sz="2000" dirty="0">
+                <a:latin typeface="Calibri" panose="020F0502020204030204" pitchFamily="34" charset="0"/>
+                <a:cs typeface="Calibri" panose="020F0502020204030204" pitchFamily="34" charset="0"/>
+              </a:rPr>
+              <a:t>, we need the structures of </a:t>
+            </a:r>
+            <a:r>
+              <a:rPr lang="en-US" altLang="ja-JP" sz="2000" b="1" dirty="0">
+                <a:latin typeface="Calibri" panose="020F0502020204030204" pitchFamily="34" charset="0"/>
+                <a:cs typeface="Calibri" panose="020F0502020204030204" pitchFamily="34" charset="0"/>
+              </a:rPr>
+              <a:t>both</a:t>
+            </a:r>
+            <a:r>
+              <a:rPr lang="en-US" altLang="ja-JP" sz="2000" dirty="0">
+                <a:latin typeface="Calibri" panose="020F0502020204030204" pitchFamily="34" charset="0"/>
+                <a:cs typeface="Calibri" panose="020F0502020204030204" pitchFamily="34" charset="0"/>
+              </a:rPr>
+              <a:t> BPT and PPM</a:t>
+            </a:r>
+          </a:p>
+          <a:p>
+            <a:pPr lvl="1"/>
+            <a:r>
+              <a:rPr lang="en-US" altLang="ja-JP" sz="2000" dirty="0">
+                <a:latin typeface="Calibri" panose="020F0502020204030204" pitchFamily="34" charset="0"/>
+                <a:cs typeface="Calibri" panose="020F0502020204030204" pitchFamily="34" charset="0"/>
+              </a:rPr>
+              <a:t>Calculating MIS after vertex merging is </a:t>
+            </a:r>
+            <a:r>
+              <a:rPr lang="en-US" altLang="ja-JP" sz="2000" b="1" dirty="0">
+                <a:latin typeface="Calibri" panose="020F0502020204030204" pitchFamily="34" charset="0"/>
+                <a:cs typeface="Calibri" panose="020F0502020204030204" pitchFamily="34" charset="0"/>
+              </a:rPr>
+              <a:t>too complex and involves too many steps</a:t>
+            </a:r>
+          </a:p>
+          <a:p>
+            <a:pPr lvl="1"/>
+            <a:r>
+              <a:rPr lang="en-US" altLang="ja-JP" sz="2000" dirty="0">
+                <a:latin typeface="Calibri" panose="020F0502020204030204" pitchFamily="34" charset="0"/>
+                <a:cs typeface="Calibri" panose="020F0502020204030204" pitchFamily="34" charset="0"/>
+              </a:rPr>
+              <a:t>The author later even published a technical report that </a:t>
+            </a:r>
+            <a:r>
+              <a:rPr lang="en-US" altLang="ja-JP" sz="2000" b="1" dirty="0">
+                <a:latin typeface="Calibri" panose="020F0502020204030204" pitchFamily="34" charset="0"/>
+                <a:cs typeface="Calibri" panose="020F0502020204030204" pitchFamily="34" charset="0"/>
+              </a:rPr>
+              <a:t>only explained how to implement </a:t>
+            </a:r>
+            <a:r>
+              <a:rPr lang="en-US" altLang="ja-JP" sz="2000" dirty="0">
+                <a:latin typeface="Calibri" panose="020F0502020204030204" pitchFamily="34" charset="0"/>
+                <a:cs typeface="Calibri" panose="020F0502020204030204" pitchFamily="34" charset="0"/>
+              </a:rPr>
+              <a:t>VCM</a:t>
+            </a:r>
+            <a:br>
+              <a:rPr lang="en-US" altLang="ja-JP" sz="2000" dirty="0">
+                <a:latin typeface="Calibri" panose="020F0502020204030204" pitchFamily="34" charset="0"/>
+                <a:cs typeface="Calibri" panose="020F0502020204030204" pitchFamily="34" charset="0"/>
+              </a:rPr>
+            </a:br>
+            <a:r>
+              <a:rPr lang="en-US" altLang="ja-JP" sz="2000" dirty="0">
+                <a:latin typeface="Calibri" panose="020F0502020204030204" pitchFamily="34" charset="0"/>
+                <a:cs typeface="Calibri" panose="020F0502020204030204" pitchFamily="34" charset="0"/>
+              </a:rPr>
+              <a:t>“Implementing vertex connection and merging” [Georgiev, 2012]</a:t>
+            </a:r>
+          </a:p>
+        </p:txBody>
+      </p:sp>
+      <p:sp>
+        <p:nvSpPr>
+          <p:cNvPr id="9" name="コンテンツ プレースホルダー 2">
+            <a:extLst>
+              <a:ext uri="{FF2B5EF4-FFF2-40B4-BE49-F238E27FC236}">
+                <a16:creationId xmlns:a16="http://schemas.microsoft.com/office/drawing/2014/main" id="{0DCA9C12-C7C6-085F-2781-870A0F76D085}"/>
+              </a:ext>
+            </a:extLst>
+          </p:cNvPr>
+          <p:cNvSpPr txBox="1">
+            <a:spLocks/>
+          </p:cNvSpPr>
+          <p:nvPr/>
+        </p:nvSpPr>
+        <p:spPr>
+          <a:xfrm>
+            <a:off x="138370" y="3634890"/>
+            <a:ext cx="11915260" cy="957057"/>
+          </a:xfrm>
+          <a:prstGeom prst="rect">
+            <a:avLst/>
+          </a:prstGeom>
+        </p:spPr>
+        <p:txBody>
+          <a:bodyPr vert="horz" lIns="91440" tIns="45720" rIns="91440" bIns="45720" rtlCol="0">
+            <a:normAutofit/>
+          </a:bodyPr>
+          <a:lstStyle>
+            <a:lvl1pPr marL="228600" indent="-228600" algn="l" defTabSz="914400" rtl="0" eaLnBrk="1" latinLnBrk="0" hangingPunct="1">
+              <a:lnSpc>
+                <a:spcPct val="90000"/>
+              </a:lnSpc>
+              <a:spcBef>
+                <a:spcPts val="1000"/>
+              </a:spcBef>
+              <a:buFont typeface="Arial" panose="020B0604020202020204" pitchFamily="34" charset="0"/>
+              <a:buChar char="•"/>
+              <a:defRPr kumimoji="1" sz="2800" kern="1200">
+                <a:solidFill>
+                  <a:schemeClr val="tx1"/>
+                </a:solidFill>
+                <a:latin typeface="+mn-lt"/>
+                <a:ea typeface="+mn-ea"/>
+                <a:cs typeface="+mn-cs"/>
+              </a:defRPr>
+            </a:lvl1pPr>
+            <a:lvl2pPr marL="685800" indent="-228600" algn="l" defTabSz="914400" rtl="0" eaLnBrk="1" latinLnBrk="0" hangingPunct="1">
+              <a:lnSpc>
+                <a:spcPct val="90000"/>
+              </a:lnSpc>
+              <a:spcBef>
+                <a:spcPts val="500"/>
+              </a:spcBef>
+              <a:buFont typeface="Arial" panose="020B0604020202020204" pitchFamily="34" charset="0"/>
+              <a:buChar char="•"/>
+              <a:defRPr kumimoji="1" sz="2400" kern="1200">
+                <a:solidFill>
+                  <a:schemeClr val="tx1"/>
+                </a:solidFill>
+                <a:latin typeface="+mn-lt"/>
+                <a:ea typeface="+mn-ea"/>
+                <a:cs typeface="+mn-cs"/>
+              </a:defRPr>
+            </a:lvl2pPr>
+            <a:lvl3pPr marL="1143000" indent="-228600" algn="l" defTabSz="914400" rtl="0" eaLnBrk="1" latinLnBrk="0" hangingPunct="1">
+              <a:lnSpc>
+                <a:spcPct val="90000"/>
+              </a:lnSpc>
+              <a:spcBef>
+                <a:spcPts val="500"/>
+              </a:spcBef>
+              <a:buFont typeface="Arial" panose="020B0604020202020204" pitchFamily="34" charset="0"/>
+              <a:buChar char="•"/>
+              <a:defRPr kumimoji="1" sz="2000" kern="1200">
+                <a:solidFill>
+                  <a:schemeClr val="tx1"/>
+                </a:solidFill>
+                <a:latin typeface="+mn-lt"/>
+                <a:ea typeface="+mn-ea"/>
+                <a:cs typeface="+mn-cs"/>
+              </a:defRPr>
+            </a:lvl3pPr>
+            <a:lvl4pPr marL="1600200" indent="-228600" algn="l" defTabSz="914400" rtl="0" eaLnBrk="1" latinLnBrk="0" hangingPunct="1">
+              <a:lnSpc>
+                <a:spcPct val="90000"/>
+              </a:lnSpc>
+              <a:spcBef>
+                <a:spcPts val="500"/>
+              </a:spcBef>
+              <a:buFont typeface="Arial" panose="020B0604020202020204" pitchFamily="34" charset="0"/>
+              <a:buChar char="•"/>
+              <a:defRPr kumimoji="1" sz="1800" kern="1200">
+                <a:solidFill>
+                  <a:schemeClr val="tx1"/>
+                </a:solidFill>
+                <a:latin typeface="+mn-lt"/>
+                <a:ea typeface="+mn-ea"/>
+                <a:cs typeface="+mn-cs"/>
+              </a:defRPr>
+            </a:lvl4pPr>
+            <a:lvl5pPr marL="2057400" indent="-228600" algn="l" defTabSz="914400" rtl="0" eaLnBrk="1" latinLnBrk="0" hangingPunct="1">
+              <a:lnSpc>
+                <a:spcPct val="90000"/>
+              </a:lnSpc>
+              <a:spcBef>
+                <a:spcPts val="500"/>
+              </a:spcBef>
+              <a:buFont typeface="Arial" panose="020B0604020202020204" pitchFamily="34" charset="0"/>
+              <a:buChar char="•"/>
+              <a:defRPr kumimoji="1" sz="1800" kern="1200">
+                <a:solidFill>
+                  <a:schemeClr val="tx1"/>
+                </a:solidFill>
+                <a:latin typeface="+mn-lt"/>
+                <a:ea typeface="+mn-ea"/>
+                <a:cs typeface="+mn-cs"/>
+              </a:defRPr>
+            </a:lvl5pPr>
+            <a:lvl6pPr marL="2514600" indent="-228600" algn="l" defTabSz="914400" rtl="0" eaLnBrk="1" latinLnBrk="0" hangingPunct="1">
+              <a:lnSpc>
+                <a:spcPct val="90000"/>
+              </a:lnSpc>
+              <a:spcBef>
+                <a:spcPts val="500"/>
+              </a:spcBef>
+              <a:buFont typeface="Arial" panose="020B0604020202020204" pitchFamily="34" charset="0"/>
+              <a:buChar char="•"/>
+              <a:defRPr kumimoji="1" sz="1800" kern="1200">
+                <a:solidFill>
+                  <a:schemeClr val="tx1"/>
+                </a:solidFill>
+                <a:latin typeface="+mn-lt"/>
+                <a:ea typeface="+mn-ea"/>
+                <a:cs typeface="+mn-cs"/>
+              </a:defRPr>
+            </a:lvl6pPr>
+            <a:lvl7pPr marL="2971800" indent="-228600" algn="l" defTabSz="914400" rtl="0" eaLnBrk="1" latinLnBrk="0" hangingPunct="1">
+              <a:lnSpc>
+                <a:spcPct val="90000"/>
+              </a:lnSpc>
+              <a:spcBef>
+                <a:spcPts val="500"/>
+              </a:spcBef>
+              <a:buFont typeface="Arial" panose="020B0604020202020204" pitchFamily="34" charset="0"/>
+              <a:buChar char="•"/>
+              <a:defRPr kumimoji="1" sz="1800" kern="1200">
+                <a:solidFill>
+                  <a:schemeClr val="tx1"/>
+                </a:solidFill>
+                <a:latin typeface="+mn-lt"/>
+                <a:ea typeface="+mn-ea"/>
+                <a:cs typeface="+mn-cs"/>
+              </a:defRPr>
+            </a:lvl7pPr>
+            <a:lvl8pPr marL="3429000" indent="-228600" algn="l" defTabSz="914400" rtl="0" eaLnBrk="1" latinLnBrk="0" hangingPunct="1">
+              <a:lnSpc>
+                <a:spcPct val="90000"/>
+              </a:lnSpc>
+              <a:spcBef>
+                <a:spcPts val="500"/>
+              </a:spcBef>
+              <a:buFont typeface="Arial" panose="020B0604020202020204" pitchFamily="34" charset="0"/>
+              <a:buChar char="•"/>
+              <a:defRPr kumimoji="1" sz="1800" kern="1200">
+                <a:solidFill>
+                  <a:schemeClr val="tx1"/>
+                </a:solidFill>
+                <a:latin typeface="+mn-lt"/>
+                <a:ea typeface="+mn-ea"/>
+                <a:cs typeface="+mn-cs"/>
+              </a:defRPr>
+            </a:lvl8pPr>
+            <a:lvl9pPr marL="3886200" indent="-228600" algn="l" defTabSz="914400" rtl="0" eaLnBrk="1" latinLnBrk="0" hangingPunct="1">
+              <a:lnSpc>
+                <a:spcPct val="90000"/>
+              </a:lnSpc>
+              <a:spcBef>
+                <a:spcPts val="500"/>
+              </a:spcBef>
+              <a:buFont typeface="Arial" panose="020B0604020202020204" pitchFamily="34" charset="0"/>
+              <a:buChar char="•"/>
+              <a:defRPr kumimoji="1" sz="1800" kern="1200">
+                <a:solidFill>
+                  <a:schemeClr val="tx1"/>
+                </a:solidFill>
+                <a:latin typeface="+mn-lt"/>
+                <a:ea typeface="+mn-ea"/>
+                <a:cs typeface="+mn-cs"/>
+              </a:defRPr>
+            </a:lvl9pPr>
+          </a:lstStyle>
+          <a:p>
+            <a:r>
+              <a:rPr lang="en-US" altLang="ja-JP" sz="2400" dirty="0">
+                <a:latin typeface="Calibri" panose="020F0502020204030204" pitchFamily="34" charset="0"/>
+                <a:cs typeface="Calibri" panose="020F0502020204030204" pitchFamily="34" charset="0"/>
+              </a:rPr>
+              <a:t>Higher (spatial) computational costs</a:t>
+            </a:r>
+          </a:p>
+          <a:p>
+            <a:pPr lvl="1"/>
+            <a:r>
+              <a:rPr lang="en-US" altLang="ja-JP" sz="2000" dirty="0">
+                <a:latin typeface="Calibri" panose="020F0502020204030204" pitchFamily="34" charset="0"/>
+                <a:cs typeface="Calibri" panose="020F0502020204030204" pitchFamily="34" charset="0"/>
+              </a:rPr>
+              <a:t>In addition to the light path, </a:t>
+            </a:r>
+            <a:r>
+              <a:rPr lang="en-US" altLang="ja-JP" sz="2000" b="1" dirty="0">
+                <a:latin typeface="Calibri" panose="020F0502020204030204" pitchFamily="34" charset="0"/>
+                <a:cs typeface="Calibri" panose="020F0502020204030204" pitchFamily="34" charset="0"/>
+              </a:rPr>
+              <a:t>all vertices of the light path </a:t>
+            </a:r>
+            <a:r>
+              <a:rPr lang="en-US" altLang="ja-JP" sz="2000" dirty="0">
+                <a:latin typeface="Calibri" panose="020F0502020204030204" pitchFamily="34" charset="0"/>
+                <a:cs typeface="Calibri" panose="020F0502020204030204" pitchFamily="34" charset="0"/>
+              </a:rPr>
+              <a:t>must be stored in a range search structure</a:t>
+            </a:r>
+          </a:p>
+        </p:txBody>
+      </p:sp>
+      <p:sp>
+        <p:nvSpPr>
+          <p:cNvPr id="12" name="コンテンツ プレースホルダー 2">
+            <a:extLst>
+              <a:ext uri="{FF2B5EF4-FFF2-40B4-BE49-F238E27FC236}">
+                <a16:creationId xmlns:a16="http://schemas.microsoft.com/office/drawing/2014/main" id="{E7491350-FEB0-A33C-36D2-4F4E65B7C9EE}"/>
+              </a:ext>
+            </a:extLst>
+          </p:cNvPr>
+          <p:cNvSpPr txBox="1">
+            <a:spLocks/>
+          </p:cNvSpPr>
+          <p:nvPr/>
+        </p:nvSpPr>
+        <p:spPr>
+          <a:xfrm>
+            <a:off x="138369" y="5234193"/>
+            <a:ext cx="11915260" cy="1328532"/>
+          </a:xfrm>
+          <a:prstGeom prst="rect">
+            <a:avLst/>
+          </a:prstGeom>
+        </p:spPr>
+        <p:txBody>
+          <a:bodyPr vert="horz" lIns="91440" tIns="45720" rIns="91440" bIns="45720" rtlCol="0">
+            <a:normAutofit/>
+          </a:bodyPr>
+          <a:lstStyle>
+            <a:lvl1pPr marL="228600" indent="-228600" algn="l" defTabSz="914400" rtl="0" eaLnBrk="1" latinLnBrk="0" hangingPunct="1">
+              <a:lnSpc>
+                <a:spcPct val="90000"/>
+              </a:lnSpc>
+              <a:spcBef>
+                <a:spcPts val="1000"/>
+              </a:spcBef>
+              <a:buFont typeface="Arial" panose="020B0604020202020204" pitchFamily="34" charset="0"/>
+              <a:buChar char="•"/>
+              <a:defRPr kumimoji="1" sz="2800" kern="1200">
+                <a:solidFill>
+                  <a:schemeClr val="tx1"/>
+                </a:solidFill>
+                <a:latin typeface="+mn-lt"/>
+                <a:ea typeface="+mn-ea"/>
+                <a:cs typeface="+mn-cs"/>
+              </a:defRPr>
+            </a:lvl1pPr>
+            <a:lvl2pPr marL="685800" indent="-228600" algn="l" defTabSz="914400" rtl="0" eaLnBrk="1" latinLnBrk="0" hangingPunct="1">
+              <a:lnSpc>
+                <a:spcPct val="90000"/>
+              </a:lnSpc>
+              <a:spcBef>
+                <a:spcPts val="500"/>
+              </a:spcBef>
+              <a:buFont typeface="Arial" panose="020B0604020202020204" pitchFamily="34" charset="0"/>
+              <a:buChar char="•"/>
+              <a:defRPr kumimoji="1" sz="2400" kern="1200">
+                <a:solidFill>
+                  <a:schemeClr val="tx1"/>
+                </a:solidFill>
+                <a:latin typeface="+mn-lt"/>
+                <a:ea typeface="+mn-ea"/>
+                <a:cs typeface="+mn-cs"/>
+              </a:defRPr>
+            </a:lvl2pPr>
+            <a:lvl3pPr marL="1143000" indent="-228600" algn="l" defTabSz="914400" rtl="0" eaLnBrk="1" latinLnBrk="0" hangingPunct="1">
+              <a:lnSpc>
+                <a:spcPct val="90000"/>
+              </a:lnSpc>
+              <a:spcBef>
+                <a:spcPts val="500"/>
+              </a:spcBef>
+              <a:buFont typeface="Arial" panose="020B0604020202020204" pitchFamily="34" charset="0"/>
+              <a:buChar char="•"/>
+              <a:defRPr kumimoji="1" sz="2000" kern="1200">
+                <a:solidFill>
+                  <a:schemeClr val="tx1"/>
+                </a:solidFill>
+                <a:latin typeface="+mn-lt"/>
+                <a:ea typeface="+mn-ea"/>
+                <a:cs typeface="+mn-cs"/>
+              </a:defRPr>
+            </a:lvl3pPr>
+            <a:lvl4pPr marL="1600200" indent="-228600" algn="l" defTabSz="914400" rtl="0" eaLnBrk="1" latinLnBrk="0" hangingPunct="1">
+              <a:lnSpc>
+                <a:spcPct val="90000"/>
+              </a:lnSpc>
+              <a:spcBef>
+                <a:spcPts val="500"/>
+              </a:spcBef>
+              <a:buFont typeface="Arial" panose="020B0604020202020204" pitchFamily="34" charset="0"/>
+              <a:buChar char="•"/>
+              <a:defRPr kumimoji="1" sz="1800" kern="1200">
+                <a:solidFill>
+                  <a:schemeClr val="tx1"/>
+                </a:solidFill>
+                <a:latin typeface="+mn-lt"/>
+                <a:ea typeface="+mn-ea"/>
+                <a:cs typeface="+mn-cs"/>
+              </a:defRPr>
+            </a:lvl4pPr>
+            <a:lvl5pPr marL="2057400" indent="-228600" algn="l" defTabSz="914400" rtl="0" eaLnBrk="1" latinLnBrk="0" hangingPunct="1">
+              <a:lnSpc>
+                <a:spcPct val="90000"/>
+              </a:lnSpc>
+              <a:spcBef>
+                <a:spcPts val="500"/>
+              </a:spcBef>
+              <a:buFont typeface="Arial" panose="020B0604020202020204" pitchFamily="34" charset="0"/>
+              <a:buChar char="•"/>
+              <a:defRPr kumimoji="1" sz="1800" kern="1200">
+                <a:solidFill>
+                  <a:schemeClr val="tx1"/>
+                </a:solidFill>
+                <a:latin typeface="+mn-lt"/>
+                <a:ea typeface="+mn-ea"/>
+                <a:cs typeface="+mn-cs"/>
+              </a:defRPr>
+            </a:lvl5pPr>
+            <a:lvl6pPr marL="2514600" indent="-228600" algn="l" defTabSz="914400" rtl="0" eaLnBrk="1" latinLnBrk="0" hangingPunct="1">
+              <a:lnSpc>
+                <a:spcPct val="90000"/>
+              </a:lnSpc>
+              <a:spcBef>
+                <a:spcPts val="500"/>
+              </a:spcBef>
+              <a:buFont typeface="Arial" panose="020B0604020202020204" pitchFamily="34" charset="0"/>
+              <a:buChar char="•"/>
+              <a:defRPr kumimoji="1" sz="1800" kern="1200">
+                <a:solidFill>
+                  <a:schemeClr val="tx1"/>
+                </a:solidFill>
+                <a:latin typeface="+mn-lt"/>
+                <a:ea typeface="+mn-ea"/>
+                <a:cs typeface="+mn-cs"/>
+              </a:defRPr>
+            </a:lvl6pPr>
+            <a:lvl7pPr marL="2971800" indent="-228600" algn="l" defTabSz="914400" rtl="0" eaLnBrk="1" latinLnBrk="0" hangingPunct="1">
+              <a:lnSpc>
+                <a:spcPct val="90000"/>
+              </a:lnSpc>
+              <a:spcBef>
+                <a:spcPts val="500"/>
+              </a:spcBef>
+              <a:buFont typeface="Arial" panose="020B0604020202020204" pitchFamily="34" charset="0"/>
+              <a:buChar char="•"/>
+              <a:defRPr kumimoji="1" sz="1800" kern="1200">
+                <a:solidFill>
+                  <a:schemeClr val="tx1"/>
+                </a:solidFill>
+                <a:latin typeface="+mn-lt"/>
+                <a:ea typeface="+mn-ea"/>
+                <a:cs typeface="+mn-cs"/>
+              </a:defRPr>
+            </a:lvl7pPr>
+            <a:lvl8pPr marL="3429000" indent="-228600" algn="l" defTabSz="914400" rtl="0" eaLnBrk="1" latinLnBrk="0" hangingPunct="1">
+              <a:lnSpc>
+                <a:spcPct val="90000"/>
+              </a:lnSpc>
+              <a:spcBef>
+                <a:spcPts val="500"/>
+              </a:spcBef>
+              <a:buFont typeface="Arial" panose="020B0604020202020204" pitchFamily="34" charset="0"/>
+              <a:buChar char="•"/>
+              <a:defRPr kumimoji="1" sz="1800" kern="1200">
+                <a:solidFill>
+                  <a:schemeClr val="tx1"/>
+                </a:solidFill>
+                <a:latin typeface="+mn-lt"/>
+                <a:ea typeface="+mn-ea"/>
+                <a:cs typeface="+mn-cs"/>
+              </a:defRPr>
+            </a:lvl8pPr>
+            <a:lvl9pPr marL="3886200" indent="-228600" algn="l" defTabSz="914400" rtl="0" eaLnBrk="1" latinLnBrk="0" hangingPunct="1">
+              <a:lnSpc>
+                <a:spcPct val="90000"/>
+              </a:lnSpc>
+              <a:spcBef>
+                <a:spcPts val="500"/>
+              </a:spcBef>
+              <a:buFont typeface="Arial" panose="020B0604020202020204" pitchFamily="34" charset="0"/>
+              <a:buChar char="•"/>
+              <a:defRPr kumimoji="1" sz="1800" kern="1200">
+                <a:solidFill>
+                  <a:schemeClr val="tx1"/>
+                </a:solidFill>
+                <a:latin typeface="+mn-lt"/>
+                <a:ea typeface="+mn-ea"/>
+                <a:cs typeface="+mn-cs"/>
+              </a:defRPr>
+            </a:lvl9pPr>
+          </a:lstStyle>
+          <a:p>
+            <a:pPr marL="0" indent="0" algn="ctr">
+              <a:buNone/>
+            </a:pPr>
+            <a:r>
+              <a:rPr lang="en-US" altLang="ja-JP" sz="2400" dirty="0">
+                <a:latin typeface="Calibri" panose="020F0502020204030204" pitchFamily="34" charset="0"/>
+                <a:cs typeface="Calibri" panose="020F0502020204030204" pitchFamily="34" charset="0"/>
+              </a:rPr>
+              <a:t>In scenes with numerous complex reflections and refractions, </a:t>
+            </a:r>
+            <a:br>
+              <a:rPr lang="en-US" altLang="ja-JP" sz="2400" dirty="0">
+                <a:latin typeface="Calibri" panose="020F0502020204030204" pitchFamily="34" charset="0"/>
+                <a:cs typeface="Calibri" panose="020F0502020204030204" pitchFamily="34" charset="0"/>
+              </a:rPr>
+            </a:br>
+            <a:r>
+              <a:rPr lang="en-US" altLang="ja-JP" sz="2400" dirty="0">
+                <a:latin typeface="Calibri" panose="020F0502020204030204" pitchFamily="34" charset="0"/>
+                <a:cs typeface="Calibri" panose="020F0502020204030204" pitchFamily="34" charset="0"/>
+              </a:rPr>
+              <a:t>this is the </a:t>
+            </a:r>
+            <a:r>
+              <a:rPr lang="en-US" altLang="ja-JP" sz="2400" b="1" dirty="0">
+                <a:latin typeface="Calibri" panose="020F0502020204030204" pitchFamily="34" charset="0"/>
+                <a:cs typeface="Calibri" panose="020F0502020204030204" pitchFamily="34" charset="0"/>
+              </a:rPr>
+              <a:t>ultimate all-in-one approach</a:t>
+            </a:r>
+            <a:br>
+              <a:rPr lang="en-US" altLang="ja-JP" sz="2400" dirty="0">
+                <a:latin typeface="Calibri" panose="020F0502020204030204" pitchFamily="34" charset="0"/>
+                <a:cs typeface="Calibri" panose="020F0502020204030204" pitchFamily="34" charset="0"/>
+              </a:rPr>
+            </a:br>
+            <a:r>
+              <a:rPr lang="en-US" altLang="ja-JP" sz="2400" dirty="0">
+                <a:latin typeface="Calibri" panose="020F0502020204030204" pitchFamily="34" charset="0"/>
+                <a:cs typeface="Calibri" panose="020F0502020204030204" pitchFamily="34" charset="0"/>
+              </a:rPr>
+              <a:t>but especially cases which execution speed is needed,  it’s rarely necessary…</a:t>
+            </a:r>
+          </a:p>
+        </p:txBody>
+      </p:sp>
+      <p:sp>
+        <p:nvSpPr>
+          <p:cNvPr id="14" name="矢印: 下 13">
+            <a:extLst>
+              <a:ext uri="{FF2B5EF4-FFF2-40B4-BE49-F238E27FC236}">
+                <a16:creationId xmlns:a16="http://schemas.microsoft.com/office/drawing/2014/main" id="{5F4A85AF-C157-99F6-502A-50DAEC9582FC}"/>
+              </a:ext>
+            </a:extLst>
+          </p:cNvPr>
+          <p:cNvSpPr/>
+          <p:nvPr/>
+        </p:nvSpPr>
+        <p:spPr>
+          <a:xfrm>
+            <a:off x="5976937" y="4626872"/>
+            <a:ext cx="238125" cy="266700"/>
+          </a:xfrm>
+          <a:prstGeom prst="downArrow">
+            <a:avLst/>
+          </a:prstGeom>
+        </p:spPr>
+        <p:style>
+          <a:lnRef idx="2">
+            <a:schemeClr val="dk1">
+              <a:shade val="15000"/>
+            </a:schemeClr>
+          </a:lnRef>
+          <a:fillRef idx="1">
+            <a:schemeClr val="dk1"/>
+          </a:fillRef>
+          <a:effectRef idx="0">
+            <a:schemeClr val="dk1"/>
+          </a:effectRef>
+          <a:fontRef idx="minor">
+            <a:schemeClr val="lt1"/>
+          </a:fontRef>
+        </p:style>
+        <p:txBody>
+          <a:bodyPr rtlCol="0" anchor="ctr"/>
+          <a:lstStyle/>
+          <a:p>
+            <a:pPr algn="ctr"/>
+            <a:endParaRPr kumimoji="1" lang="ja-JP" altLang="en-US"/>
+          </a:p>
+        </p:txBody>
+      </p:sp>
+    </p:spTree>
+    <p:extLst>
+      <p:ext uri="{BB962C8B-B14F-4D97-AF65-F5344CB8AC3E}">
+        <p14:creationId xmlns:p14="http://schemas.microsoft.com/office/powerpoint/2010/main" val="3323072535"/>
+      </p:ext>
+    </p:extLst>
+  </p:cSld>
+  <p:clrMapOvr>
+    <a:masterClrMapping/>
+  </p:clrMapOvr>
+</p:sld>
+</file>
+
+<file path=ppt/slides/slide14.xml><?xml version="1.0" encoding="utf-8"?>
+<p:sld xmlns:a="http://schemas.openxmlformats.org/drawingml/2006/main" xmlns:r="http://schemas.openxmlformats.org/officeDocument/2006/relationships" xmlns:p="http://schemas.openxmlformats.org/presentationml/2006/main">
+  <p:cSld>
+    <p:spTree>
+      <p:nvGrpSpPr>
+        <p:cNvPr id="1" name="">
+          <a:extLst>
+            <a:ext uri="{FF2B5EF4-FFF2-40B4-BE49-F238E27FC236}">
+              <a16:creationId xmlns:a16="http://schemas.microsoft.com/office/drawing/2014/main" id="{48E5EB01-93D2-0F47-3F6F-3A4C744DE47C}"/>
+            </a:ext>
+          </a:extLst>
+        </p:cNvPr>
+        <p:cNvGrpSpPr/>
+        <p:nvPr/>
+      </p:nvGrpSpPr>
+      <p:grpSpPr>
+        <a:xfrm>
+          <a:off x="0" y="0"/>
+          <a:ext cx="0" cy="0"/>
+          <a:chOff x="0" y="0"/>
+          <a:chExt cx="0" cy="0"/>
+        </a:xfrm>
+      </p:grpSpPr>
+      <p:sp>
+        <p:nvSpPr>
+          <p:cNvPr id="2" name="タイトル 1">
+            <a:extLst>
+              <a:ext uri="{FF2B5EF4-FFF2-40B4-BE49-F238E27FC236}">
+                <a16:creationId xmlns:a16="http://schemas.microsoft.com/office/drawing/2014/main" id="{5CF54E77-1503-574C-72BB-6F9F6DC3B29B}"/>
+              </a:ext>
+            </a:extLst>
+          </p:cNvPr>
+          <p:cNvSpPr>
+            <a:spLocks noGrp="1"/>
+          </p:cNvSpPr>
+          <p:nvPr>
+            <p:ph type="title"/>
+          </p:nvPr>
+        </p:nvSpPr>
+        <p:spPr/>
+        <p:txBody>
+          <a:bodyPr/>
+          <a:lstStyle/>
+          <a:p>
+            <a:r>
+              <a:rPr kumimoji="1" lang="en-US" altLang="ja-JP" dirty="0"/>
+              <a:t>Conclusion</a:t>
+            </a:r>
+            <a:endParaRPr kumimoji="1" lang="ja-JP" altLang="en-US" dirty="0"/>
+          </a:p>
+        </p:txBody>
+      </p:sp>
+      <p:sp>
+        <p:nvSpPr>
+          <p:cNvPr id="3" name="コンテンツ プレースホルダー 2">
+            <a:extLst>
+              <a:ext uri="{FF2B5EF4-FFF2-40B4-BE49-F238E27FC236}">
+                <a16:creationId xmlns:a16="http://schemas.microsoft.com/office/drawing/2014/main" id="{5A07CEB0-D69D-3D02-C7E0-0664455B8766}"/>
+              </a:ext>
+            </a:extLst>
+          </p:cNvPr>
+          <p:cNvSpPr>
+            <a:spLocks noGrp="1"/>
+          </p:cNvSpPr>
+          <p:nvPr>
+            <p:ph idx="1"/>
+          </p:nvPr>
+        </p:nvSpPr>
+        <p:spPr/>
+        <p:txBody>
+          <a:bodyPr/>
+          <a:lstStyle/>
+          <a:p>
+            <a:r>
+              <a:rPr lang="en-US" altLang="ja-JP" dirty="0"/>
+              <a:t>Robust light transport simulation integrating </a:t>
+            </a:r>
+            <a:br>
+              <a:rPr lang="en-US" altLang="ja-JP" dirty="0"/>
+            </a:br>
+            <a:r>
+              <a:rPr lang="en-US" altLang="ja-JP" dirty="0"/>
+              <a:t>- </a:t>
+            </a:r>
+            <a:r>
+              <a:rPr lang="en-US" altLang="ja-JP" b="1" dirty="0"/>
+              <a:t>Bidirectional path tracing (BPT)</a:t>
+            </a:r>
+            <a:br>
+              <a:rPr lang="en-US" altLang="ja-JP" dirty="0"/>
+            </a:br>
+            <a:r>
+              <a:rPr lang="en-US" altLang="ja-JP" dirty="0"/>
+              <a:t>- </a:t>
+            </a:r>
+            <a:r>
+              <a:rPr lang="en-US" altLang="ja-JP" b="1" dirty="0"/>
+              <a:t>(Progressive) Photon mapping (PPM)</a:t>
+            </a:r>
+            <a:endParaRPr kumimoji="1" lang="ja-JP" altLang="en-US" b="1" dirty="0"/>
+          </a:p>
+        </p:txBody>
+      </p:sp>
+      <p:sp>
+        <p:nvSpPr>
+          <p:cNvPr id="4" name="スライド番号プレースホルダー 3">
+            <a:extLst>
+              <a:ext uri="{FF2B5EF4-FFF2-40B4-BE49-F238E27FC236}">
+                <a16:creationId xmlns:a16="http://schemas.microsoft.com/office/drawing/2014/main" id="{B99B92B3-1326-03CE-12C9-62BB8B00A111}"/>
+              </a:ext>
+            </a:extLst>
+          </p:cNvPr>
+          <p:cNvSpPr>
+            <a:spLocks noGrp="1"/>
+          </p:cNvSpPr>
+          <p:nvPr>
+            <p:ph type="sldNum" sz="quarter" idx="12"/>
+          </p:nvPr>
+        </p:nvSpPr>
+        <p:spPr/>
+        <p:txBody>
+          <a:bodyPr/>
+          <a:lstStyle/>
+          <a:p>
+            <a:fld id="{05A07A33-D779-4A79-A49C-E26576C728D8}" type="slidenum">
+              <a:rPr lang="ja-JP" altLang="en-US" smtClean="0"/>
+              <a:pPr/>
+              <a:t>14</a:t>
+            </a:fld>
+            <a:endParaRPr lang="ja-JP" altLang="en-US" dirty="0">
+              <a:latin typeface="Calibri" panose="020F0502020204030204" pitchFamily="34" charset="0"/>
+              <a:cs typeface="Calibri" panose="020F0502020204030204" pitchFamily="34" charset="0"/>
+            </a:endParaRPr>
+          </a:p>
+        </p:txBody>
+      </p:sp>
+      <p:pic>
+        <p:nvPicPr>
+          <p:cNvPr id="6" name="図 5">
+            <a:extLst>
+              <a:ext uri="{FF2B5EF4-FFF2-40B4-BE49-F238E27FC236}">
+                <a16:creationId xmlns:a16="http://schemas.microsoft.com/office/drawing/2014/main" id="{A76F2BC8-E062-0635-0674-FB15AE341140}"/>
+              </a:ext>
+            </a:extLst>
+          </p:cNvPr>
+          <p:cNvPicPr>
+            <a:picLocks noChangeAspect="1"/>
+          </p:cNvPicPr>
+          <p:nvPr/>
+        </p:nvPicPr>
+        <p:blipFill>
+          <a:blip r:embed="rId2"/>
+          <a:stretch>
+            <a:fillRect/>
+          </a:stretch>
+        </p:blipFill>
+        <p:spPr>
+          <a:xfrm>
+            <a:off x="364435" y="3266124"/>
+            <a:ext cx="5998265" cy="2098648"/>
+          </a:xfrm>
+          <a:prstGeom prst="rect">
+            <a:avLst/>
+          </a:prstGeom>
+        </p:spPr>
+      </p:pic>
+      <p:sp>
+        <p:nvSpPr>
+          <p:cNvPr id="8" name="テキスト ボックス 7">
+            <a:extLst>
+              <a:ext uri="{FF2B5EF4-FFF2-40B4-BE49-F238E27FC236}">
+                <a16:creationId xmlns:a16="http://schemas.microsoft.com/office/drawing/2014/main" id="{396660B7-595B-A1C8-CF3F-43EC9172B664}"/>
+              </a:ext>
+            </a:extLst>
+          </p:cNvPr>
+          <p:cNvSpPr txBox="1"/>
+          <p:nvPr/>
+        </p:nvSpPr>
+        <p:spPr>
+          <a:xfrm>
+            <a:off x="1568104" y="5493914"/>
+            <a:ext cx="3590925" cy="369332"/>
+          </a:xfrm>
+          <a:prstGeom prst="rect">
+            <a:avLst/>
+          </a:prstGeom>
+          <a:noFill/>
+        </p:spPr>
+        <p:txBody>
+          <a:bodyPr wrap="square" rtlCol="0">
+            <a:spAutoFit/>
+          </a:bodyPr>
+          <a:lstStyle/>
+          <a:p>
+            <a:pPr algn="ctr"/>
+            <a:r>
+              <a:rPr kumimoji="1" lang="en-US" altLang="ja-JP" dirty="0">
+                <a:latin typeface="Calibri" panose="020F0502020204030204" pitchFamily="34" charset="0"/>
+                <a:ea typeface="Calibri" panose="020F0502020204030204" pitchFamily="34" charset="0"/>
+                <a:cs typeface="Calibri" panose="020F0502020204030204" pitchFamily="34" charset="0"/>
+              </a:rPr>
+              <a:t>Teaser image</a:t>
+            </a:r>
+            <a:endParaRPr kumimoji="1" lang="ja-JP" altLang="en-US" dirty="0">
+              <a:latin typeface="Calibri" panose="020F0502020204030204" pitchFamily="34" charset="0"/>
+              <a:cs typeface="Calibri" panose="020F0502020204030204" pitchFamily="34" charset="0"/>
+            </a:endParaRPr>
+          </a:p>
+        </p:txBody>
+      </p:sp>
+      <p:pic>
+        <p:nvPicPr>
+          <p:cNvPr id="9" name="図 8">
+            <a:extLst>
+              <a:ext uri="{FF2B5EF4-FFF2-40B4-BE49-F238E27FC236}">
+                <a16:creationId xmlns:a16="http://schemas.microsoft.com/office/drawing/2014/main" id="{B17F3660-9887-3536-A9D2-8D4A7F15A142}"/>
+              </a:ext>
+            </a:extLst>
+          </p:cNvPr>
+          <p:cNvPicPr>
+            <a:picLocks noChangeAspect="1"/>
+          </p:cNvPicPr>
+          <p:nvPr/>
+        </p:nvPicPr>
+        <p:blipFill>
+          <a:blip r:embed="rId3"/>
+          <a:stretch>
+            <a:fillRect/>
+          </a:stretch>
+        </p:blipFill>
+        <p:spPr>
+          <a:xfrm>
+            <a:off x="6490249" y="2438761"/>
+            <a:ext cx="5553850" cy="3753374"/>
+          </a:xfrm>
+          <a:prstGeom prst="rect">
+            <a:avLst/>
+          </a:prstGeom>
+        </p:spPr>
+      </p:pic>
+      <p:sp>
+        <p:nvSpPr>
+          <p:cNvPr id="10" name="テキスト ボックス 9">
+            <a:extLst>
+              <a:ext uri="{FF2B5EF4-FFF2-40B4-BE49-F238E27FC236}">
+                <a16:creationId xmlns:a16="http://schemas.microsoft.com/office/drawing/2014/main" id="{40CC5736-8179-5764-4D13-941BE591B77D}"/>
+              </a:ext>
+            </a:extLst>
+          </p:cNvPr>
+          <p:cNvSpPr txBox="1"/>
+          <p:nvPr/>
+        </p:nvSpPr>
+        <p:spPr>
+          <a:xfrm>
+            <a:off x="7471711" y="6285710"/>
+            <a:ext cx="3590925" cy="369332"/>
+          </a:xfrm>
+          <a:prstGeom prst="rect">
+            <a:avLst/>
+          </a:prstGeom>
+          <a:noFill/>
+        </p:spPr>
+        <p:txBody>
+          <a:bodyPr wrap="square" rtlCol="0">
+            <a:spAutoFit/>
+          </a:bodyPr>
+          <a:lstStyle/>
+          <a:p>
+            <a:pPr algn="ctr"/>
+            <a:r>
+              <a:rPr lang="en-US" altLang="ja-JP" dirty="0">
+                <a:latin typeface="Calibri" panose="020F0502020204030204" pitchFamily="34" charset="0"/>
+                <a:cs typeface="Calibri" panose="020F0502020204030204" pitchFamily="34" charset="0"/>
+              </a:rPr>
+              <a:t>Robustness of VCM in the SDS Path</a:t>
+            </a:r>
+            <a:endParaRPr kumimoji="1" lang="ja-JP" altLang="en-US" dirty="0">
+              <a:latin typeface="Calibri" panose="020F0502020204030204" pitchFamily="34" charset="0"/>
+              <a:cs typeface="Calibri" panose="020F0502020204030204" pitchFamily="34" charset="0"/>
+            </a:endParaRPr>
+          </a:p>
+        </p:txBody>
+      </p:sp>
+    </p:spTree>
+    <p:extLst>
+      <p:ext uri="{BB962C8B-B14F-4D97-AF65-F5344CB8AC3E}">
+        <p14:creationId xmlns:p14="http://schemas.microsoft.com/office/powerpoint/2010/main" val="588886945"/>
+      </p:ext>
+    </p:extLst>
+  </p:cSld>
+  <p:clrMapOvr>
+    <a:masterClrMapping/>
+  </p:clrMapOvr>
+</p:sld>
+</file>
+
+<file path=ppt/slides/slide15.xml><?xml version="1.0" encoding="utf-8"?>
+<p:sld xmlns:a="http://schemas.openxmlformats.org/drawingml/2006/main" xmlns:r="http://schemas.openxmlformats.org/officeDocument/2006/relationships" xmlns:p="http://schemas.openxmlformats.org/presentationml/2006/main">
+  <p:cSld>
+    <p:spTree>
+      <p:nvGrpSpPr>
+        <p:cNvPr id="1" name="">
+          <a:extLst>
+            <a:ext uri="{FF2B5EF4-FFF2-40B4-BE49-F238E27FC236}">
+              <a16:creationId xmlns:a16="http://schemas.microsoft.com/office/drawing/2014/main" id="{E22901A5-B797-C553-4CF5-7B66403EFB2F}"/>
+            </a:ext>
+          </a:extLst>
+        </p:cNvPr>
+        <p:cNvGrpSpPr/>
+        <p:nvPr/>
+      </p:nvGrpSpPr>
+      <p:grpSpPr>
+        <a:xfrm>
+          <a:off x="0" y="0"/>
+          <a:ext cx="0" cy="0"/>
+          <a:chOff x="0" y="0"/>
+          <a:chExt cx="0" cy="0"/>
+        </a:xfrm>
+      </p:grpSpPr>
+      <p:sp>
+        <p:nvSpPr>
+          <p:cNvPr id="2" name="タイトル 1">
+            <a:extLst>
+              <a:ext uri="{FF2B5EF4-FFF2-40B4-BE49-F238E27FC236}">
+                <a16:creationId xmlns:a16="http://schemas.microsoft.com/office/drawing/2014/main" id="{260EA78A-CA6B-BF3E-8F6D-5054BBBA4102}"/>
+              </a:ext>
+            </a:extLst>
+          </p:cNvPr>
+          <p:cNvSpPr>
+            <a:spLocks noGrp="1"/>
+          </p:cNvSpPr>
+          <p:nvPr>
+            <p:ph type="title"/>
+          </p:nvPr>
+        </p:nvSpPr>
+        <p:spPr/>
+        <p:txBody>
+          <a:bodyPr/>
+          <a:lstStyle/>
+          <a:p>
+            <a:r>
+              <a:rPr kumimoji="1" lang="en-US" altLang="ja-JP" dirty="0"/>
+              <a:t>References</a:t>
+            </a:r>
+            <a:endParaRPr kumimoji="1" lang="ja-JP" altLang="en-US" dirty="0"/>
+          </a:p>
+        </p:txBody>
+      </p:sp>
+      <p:sp>
+        <p:nvSpPr>
+          <p:cNvPr id="4" name="スライド番号プレースホルダー 3">
+            <a:extLst>
+              <a:ext uri="{FF2B5EF4-FFF2-40B4-BE49-F238E27FC236}">
+                <a16:creationId xmlns:a16="http://schemas.microsoft.com/office/drawing/2014/main" id="{25A1C3DD-B89E-4ED4-F0F5-ED8D1F27C1F8}"/>
+              </a:ext>
+            </a:extLst>
+          </p:cNvPr>
+          <p:cNvSpPr>
+            <a:spLocks noGrp="1"/>
+          </p:cNvSpPr>
+          <p:nvPr>
+            <p:ph type="sldNum" sz="quarter" idx="12"/>
+          </p:nvPr>
+        </p:nvSpPr>
+        <p:spPr/>
+        <p:txBody>
+          <a:bodyPr/>
+          <a:lstStyle/>
+          <a:p>
+            <a:fld id="{05A07A33-D779-4A79-A49C-E26576C728D8}" type="slidenum">
+              <a:rPr lang="ja-JP" altLang="en-US" smtClean="0"/>
+              <a:pPr/>
+              <a:t>15</a:t>
+            </a:fld>
+            <a:endParaRPr lang="ja-JP" altLang="en-US" dirty="0">
+              <a:latin typeface="Calibri" panose="020F0502020204030204" pitchFamily="34" charset="0"/>
+              <a:cs typeface="Calibri" panose="020F0502020204030204" pitchFamily="34" charset="0"/>
+            </a:endParaRPr>
+          </a:p>
+        </p:txBody>
+      </p:sp>
+      <p:sp>
+        <p:nvSpPr>
+          <p:cNvPr id="3" name="コンテンツ プレースホルダー 2">
+            <a:extLst>
+              <a:ext uri="{FF2B5EF4-FFF2-40B4-BE49-F238E27FC236}">
+                <a16:creationId xmlns:a16="http://schemas.microsoft.com/office/drawing/2014/main" id="{332F36BE-3FE6-1B9A-B76C-F091CAAF7DBF}"/>
+              </a:ext>
+            </a:extLst>
+          </p:cNvPr>
+          <p:cNvSpPr txBox="1">
+            <a:spLocks/>
+          </p:cNvSpPr>
+          <p:nvPr/>
+        </p:nvSpPr>
+        <p:spPr>
+          <a:xfrm>
+            <a:off x="210065" y="1258677"/>
+            <a:ext cx="11771869" cy="5325421"/>
+          </a:xfrm>
+          <a:prstGeom prst="rect">
+            <a:avLst/>
+          </a:prstGeom>
+        </p:spPr>
+        <p:txBody>
+          <a:bodyPr vert="horz" lIns="91440" tIns="45720" rIns="91440" bIns="45720" rtlCol="0">
+            <a:normAutofit/>
+          </a:bodyPr>
+          <a:lstStyle>
+            <a:lvl1pPr marL="228600" indent="-228600" algn="l" defTabSz="914400" rtl="0" eaLnBrk="1" latinLnBrk="0" hangingPunct="1">
+              <a:lnSpc>
+                <a:spcPct val="90000"/>
+              </a:lnSpc>
+              <a:spcBef>
+                <a:spcPts val="1000"/>
+              </a:spcBef>
+              <a:buFont typeface="Arial" panose="020B0604020202020204" pitchFamily="34" charset="0"/>
+              <a:buChar char="•"/>
+              <a:defRPr kumimoji="1" sz="2800" kern="1200">
+                <a:solidFill>
+                  <a:schemeClr val="tx1"/>
+                </a:solidFill>
+                <a:latin typeface="+mn-lt"/>
+                <a:ea typeface="+mn-ea"/>
+                <a:cs typeface="+mn-cs"/>
+              </a:defRPr>
+            </a:lvl1pPr>
+            <a:lvl2pPr marL="685800" indent="-228600" algn="l" defTabSz="914400" rtl="0" eaLnBrk="1" latinLnBrk="0" hangingPunct="1">
+              <a:lnSpc>
+                <a:spcPct val="90000"/>
+              </a:lnSpc>
+              <a:spcBef>
+                <a:spcPts val="500"/>
+              </a:spcBef>
+              <a:buFont typeface="Arial" panose="020B0604020202020204" pitchFamily="34" charset="0"/>
+              <a:buChar char="•"/>
+              <a:defRPr kumimoji="1" sz="2400" kern="1200">
+                <a:solidFill>
+                  <a:schemeClr val="tx1"/>
+                </a:solidFill>
+                <a:latin typeface="+mn-lt"/>
+                <a:ea typeface="+mn-ea"/>
+                <a:cs typeface="+mn-cs"/>
+              </a:defRPr>
+            </a:lvl2pPr>
+            <a:lvl3pPr marL="1143000" indent="-228600" algn="l" defTabSz="914400" rtl="0" eaLnBrk="1" latinLnBrk="0" hangingPunct="1">
+              <a:lnSpc>
+                <a:spcPct val="90000"/>
+              </a:lnSpc>
+              <a:spcBef>
+                <a:spcPts val="500"/>
+              </a:spcBef>
+              <a:buFont typeface="Arial" panose="020B0604020202020204" pitchFamily="34" charset="0"/>
+              <a:buChar char="•"/>
+              <a:defRPr kumimoji="1" sz="2000" kern="1200">
+                <a:solidFill>
+                  <a:schemeClr val="tx1"/>
+                </a:solidFill>
+                <a:latin typeface="+mn-lt"/>
+                <a:ea typeface="+mn-ea"/>
+                <a:cs typeface="+mn-cs"/>
+              </a:defRPr>
+            </a:lvl3pPr>
+            <a:lvl4pPr marL="1600200" indent="-228600" algn="l" defTabSz="914400" rtl="0" eaLnBrk="1" latinLnBrk="0" hangingPunct="1">
+              <a:lnSpc>
+                <a:spcPct val="90000"/>
+              </a:lnSpc>
+              <a:spcBef>
+                <a:spcPts val="500"/>
+              </a:spcBef>
+              <a:buFont typeface="Arial" panose="020B0604020202020204" pitchFamily="34" charset="0"/>
+              <a:buChar char="•"/>
+              <a:defRPr kumimoji="1" sz="1800" kern="1200">
+                <a:solidFill>
+                  <a:schemeClr val="tx1"/>
+                </a:solidFill>
+                <a:latin typeface="+mn-lt"/>
+                <a:ea typeface="+mn-ea"/>
+                <a:cs typeface="+mn-cs"/>
+              </a:defRPr>
+            </a:lvl4pPr>
+            <a:lvl5pPr marL="2057400" indent="-228600" algn="l" defTabSz="914400" rtl="0" eaLnBrk="1" latinLnBrk="0" hangingPunct="1">
+              <a:lnSpc>
+                <a:spcPct val="90000"/>
+              </a:lnSpc>
+              <a:spcBef>
+                <a:spcPts val="500"/>
+              </a:spcBef>
+              <a:buFont typeface="Arial" panose="020B0604020202020204" pitchFamily="34" charset="0"/>
+              <a:buChar char="•"/>
+              <a:defRPr kumimoji="1" sz="1800" kern="1200">
+                <a:solidFill>
+                  <a:schemeClr val="tx1"/>
+                </a:solidFill>
+                <a:latin typeface="+mn-lt"/>
+                <a:ea typeface="+mn-ea"/>
+                <a:cs typeface="+mn-cs"/>
+              </a:defRPr>
+            </a:lvl5pPr>
+            <a:lvl6pPr marL="2514600" indent="-228600" algn="l" defTabSz="914400" rtl="0" eaLnBrk="1" latinLnBrk="0" hangingPunct="1">
+              <a:lnSpc>
+                <a:spcPct val="90000"/>
+              </a:lnSpc>
+              <a:spcBef>
+                <a:spcPts val="500"/>
+              </a:spcBef>
+              <a:buFont typeface="Arial" panose="020B0604020202020204" pitchFamily="34" charset="0"/>
+              <a:buChar char="•"/>
+              <a:defRPr kumimoji="1" sz="1800" kern="1200">
+                <a:solidFill>
+                  <a:schemeClr val="tx1"/>
+                </a:solidFill>
+                <a:latin typeface="+mn-lt"/>
+                <a:ea typeface="+mn-ea"/>
+                <a:cs typeface="+mn-cs"/>
+              </a:defRPr>
+            </a:lvl6pPr>
+            <a:lvl7pPr marL="2971800" indent="-228600" algn="l" defTabSz="914400" rtl="0" eaLnBrk="1" latinLnBrk="0" hangingPunct="1">
+              <a:lnSpc>
+                <a:spcPct val="90000"/>
+              </a:lnSpc>
+              <a:spcBef>
+                <a:spcPts val="500"/>
+              </a:spcBef>
+              <a:buFont typeface="Arial" panose="020B0604020202020204" pitchFamily="34" charset="0"/>
+              <a:buChar char="•"/>
+              <a:defRPr kumimoji="1" sz="1800" kern="1200">
+                <a:solidFill>
+                  <a:schemeClr val="tx1"/>
+                </a:solidFill>
+                <a:latin typeface="+mn-lt"/>
+                <a:ea typeface="+mn-ea"/>
+                <a:cs typeface="+mn-cs"/>
+              </a:defRPr>
+            </a:lvl7pPr>
+            <a:lvl8pPr marL="3429000" indent="-228600" algn="l" defTabSz="914400" rtl="0" eaLnBrk="1" latinLnBrk="0" hangingPunct="1">
+              <a:lnSpc>
+                <a:spcPct val="90000"/>
+              </a:lnSpc>
+              <a:spcBef>
+                <a:spcPts val="500"/>
+              </a:spcBef>
+              <a:buFont typeface="Arial" panose="020B0604020202020204" pitchFamily="34" charset="0"/>
+              <a:buChar char="•"/>
+              <a:defRPr kumimoji="1" sz="1800" kern="1200">
+                <a:solidFill>
+                  <a:schemeClr val="tx1"/>
+                </a:solidFill>
+                <a:latin typeface="+mn-lt"/>
+                <a:ea typeface="+mn-ea"/>
+                <a:cs typeface="+mn-cs"/>
+              </a:defRPr>
+            </a:lvl8pPr>
+            <a:lvl9pPr marL="3886200" indent="-228600" algn="l" defTabSz="914400" rtl="0" eaLnBrk="1" latinLnBrk="0" hangingPunct="1">
+              <a:lnSpc>
+                <a:spcPct val="90000"/>
+              </a:lnSpc>
+              <a:spcBef>
+                <a:spcPts val="500"/>
+              </a:spcBef>
+              <a:buFont typeface="Arial" panose="020B0604020202020204" pitchFamily="34" charset="0"/>
+              <a:buChar char="•"/>
+              <a:defRPr kumimoji="1" sz="1800" kern="1200">
+                <a:solidFill>
+                  <a:schemeClr val="tx1"/>
+                </a:solidFill>
+                <a:latin typeface="+mn-lt"/>
+                <a:ea typeface="+mn-ea"/>
+                <a:cs typeface="+mn-cs"/>
+              </a:defRPr>
+            </a:lvl9pPr>
+          </a:lstStyle>
+          <a:p>
+            <a:pPr marL="0" indent="0">
+              <a:buNone/>
+            </a:pPr>
+            <a:r>
+              <a:rPr lang="en-US" altLang="ja-JP" sz="2600" dirty="0">
+                <a:latin typeface="Calibri" panose="020F0502020204030204" pitchFamily="34" charset="0"/>
+                <a:cs typeface="Calibri" panose="020F0502020204030204" pitchFamily="34" charset="0"/>
+              </a:rPr>
+              <a:t>[1]: </a:t>
+            </a:r>
+            <a:r>
+              <a:rPr lang="en-US" altLang="ja-JP" sz="2600" dirty="0">
+                <a:latin typeface="Calibri" panose="020F0502020204030204" pitchFamily="34" charset="0"/>
+                <a:cs typeface="Calibri" panose="020F0502020204030204" pitchFamily="34" charset="0"/>
+                <a:hlinkClick r:id="rId2"/>
+              </a:rPr>
+              <a:t>https://www.semanticscholar.org/paper/Bidirectional-Path-Tracing-Vlnas/c9662ee171e68a08600203e975b4c04c770c2598</a:t>
+            </a:r>
+            <a:r>
+              <a:rPr lang="en-US" altLang="ja-JP" sz="2600" dirty="0">
+                <a:latin typeface="Calibri" panose="020F0502020204030204" pitchFamily="34" charset="0"/>
+                <a:cs typeface="Calibri" panose="020F0502020204030204" pitchFamily="34" charset="0"/>
+              </a:rPr>
+              <a:t> </a:t>
+            </a:r>
+          </a:p>
+          <a:p>
+            <a:pPr marL="0" indent="0">
+              <a:buNone/>
+            </a:pPr>
+            <a:endParaRPr lang="en-US" altLang="ja-JP" sz="2600" dirty="0">
+              <a:latin typeface="Calibri" panose="020F0502020204030204" pitchFamily="34" charset="0"/>
+              <a:cs typeface="Calibri" panose="020F0502020204030204" pitchFamily="34" charset="0"/>
+            </a:endParaRPr>
+          </a:p>
+          <a:p>
+            <a:pPr marL="0" indent="0">
+              <a:buNone/>
+            </a:pPr>
+            <a:r>
+              <a:rPr lang="en-US" altLang="ja-JP" sz="2600" dirty="0">
+                <a:latin typeface="Calibri" panose="020F0502020204030204" pitchFamily="34" charset="0"/>
+                <a:cs typeface="Calibri" panose="020F0502020204030204" pitchFamily="34" charset="0"/>
+              </a:rPr>
+              <a:t>[2]: </a:t>
+            </a:r>
+            <a:r>
+              <a:rPr lang="en-US" altLang="ja-JP" sz="2600" dirty="0">
+                <a:latin typeface="Calibri" panose="020F0502020204030204" pitchFamily="34" charset="0"/>
+                <a:cs typeface="Calibri" panose="020F0502020204030204" pitchFamily="34" charset="0"/>
+                <a:hlinkClick r:id="rId3"/>
+              </a:rPr>
+              <a:t>https://www.researchgate.net/figure/llustration-of-photon-mapping-a-Light-sources-send-out-energy-as-photons-b-a_fig7_317224001</a:t>
+            </a:r>
+            <a:r>
+              <a:rPr lang="en-US" altLang="ja-JP" sz="2600" dirty="0">
+                <a:latin typeface="Calibri" panose="020F0502020204030204" pitchFamily="34" charset="0"/>
+                <a:cs typeface="Calibri" panose="020F0502020204030204" pitchFamily="34" charset="0"/>
+              </a:rPr>
+              <a:t>  [accessed 21 Mar 2026]</a:t>
+            </a:r>
+          </a:p>
+          <a:p>
+            <a:pPr marL="0" indent="0">
+              <a:buNone/>
+            </a:pPr>
+            <a:endParaRPr lang="en-US" altLang="ja-JP" sz="2600" dirty="0">
+              <a:latin typeface="Calibri" panose="020F0502020204030204" pitchFamily="34" charset="0"/>
+              <a:cs typeface="Calibri" panose="020F0502020204030204" pitchFamily="34" charset="0"/>
+            </a:endParaRPr>
+          </a:p>
+          <a:p>
+            <a:pPr marL="0" indent="0">
+              <a:buNone/>
+            </a:pPr>
+            <a:r>
+              <a:rPr lang="en-US" altLang="ja-JP" sz="2600" dirty="0">
+                <a:latin typeface="Calibri" panose="020F0502020204030204" pitchFamily="34" charset="0"/>
+                <a:cs typeface="Calibri" panose="020F0502020204030204" pitchFamily="34" charset="0"/>
+              </a:rPr>
+              <a:t>[3]: </a:t>
+            </a:r>
+            <a:r>
+              <a:rPr lang="en-US" altLang="ja-JP" dirty="0">
+                <a:latin typeface="Calibri" panose="020F0502020204030204" pitchFamily="34" charset="0"/>
+                <a:cs typeface="Calibri" panose="020F0502020204030204" pitchFamily="34" charset="0"/>
+                <a:hlinkClick r:id="rId4"/>
+              </a:rPr>
+              <a:t>“Implementing vertex connection and merging”</a:t>
+            </a:r>
+            <a:r>
+              <a:rPr lang="en-US" altLang="ja-JP" dirty="0">
+                <a:latin typeface="Calibri" panose="020F0502020204030204" pitchFamily="34" charset="0"/>
+                <a:cs typeface="Calibri" panose="020F0502020204030204" pitchFamily="34" charset="0"/>
+              </a:rPr>
+              <a:t> [Georgiev, 2012]</a:t>
+            </a:r>
+            <a:r>
+              <a:rPr lang="en-US" altLang="ja-JP" sz="2600" dirty="0">
+                <a:latin typeface="Calibri" panose="020F0502020204030204" pitchFamily="34" charset="0"/>
+                <a:cs typeface="Calibri" panose="020F0502020204030204" pitchFamily="34" charset="0"/>
+              </a:rPr>
+              <a:t> </a:t>
+            </a:r>
+          </a:p>
+        </p:txBody>
+      </p:sp>
+    </p:spTree>
+    <p:extLst>
+      <p:ext uri="{BB962C8B-B14F-4D97-AF65-F5344CB8AC3E}">
+        <p14:creationId xmlns:p14="http://schemas.microsoft.com/office/powerpoint/2010/main" val="739186433"/>
+      </p:ext>
+    </p:extLst>
+  </p:cSld>
+  <p:clrMapOvr>
+    <a:masterClrMapping/>
+  </p:clrMapOvr>
+</p:sld>
+</file>
+
+<file path=ppt/slides/slide2.xml><?xml version="1.0" encoding="utf-8"?>
+<p:sld xmlns:a="http://schemas.openxmlformats.org/drawingml/2006/main" xmlns:r="http://schemas.openxmlformats.org/officeDocument/2006/relationships" xmlns:p="http://schemas.openxmlformats.org/presentationml/2006/main">
+  <p:cSld>
+    <p:spTree>
+      <p:nvGrpSpPr>
+        <p:cNvPr id="1" name=""/>
+        <p:cNvGrpSpPr/>
+        <p:nvPr/>
+      </p:nvGrpSpPr>
+      <p:grpSpPr>
+        <a:xfrm>
+          <a:off x="0" y="0"/>
+          <a:ext cx="0" cy="0"/>
+          <a:chOff x="0" y="0"/>
+          <a:chExt cx="0" cy="0"/>
+        </a:xfrm>
+      </p:grpSpPr>
+      <p:sp>
+        <p:nvSpPr>
+          <p:cNvPr id="2" name="タイトル 1">
+            <a:extLst>
+              <a:ext uri="{FF2B5EF4-FFF2-40B4-BE49-F238E27FC236}">
+                <a16:creationId xmlns:a16="http://schemas.microsoft.com/office/drawing/2014/main" id="{AD3284C3-A3DC-263F-2D40-BABC2BDB1186}"/>
+              </a:ext>
+            </a:extLst>
+          </p:cNvPr>
+          <p:cNvSpPr>
+            <a:spLocks noGrp="1"/>
+          </p:cNvSpPr>
+          <p:nvPr>
+            <p:ph type="title"/>
+          </p:nvPr>
+        </p:nvSpPr>
+        <p:spPr/>
+        <p:txBody>
+          <a:bodyPr/>
+          <a:lstStyle/>
+          <a:p>
+            <a:r>
+              <a:rPr kumimoji="1" lang="en-US" altLang="ja-JP" dirty="0"/>
+              <a:t>Introduction</a:t>
+            </a:r>
+            <a:endParaRPr kumimoji="1" lang="ja-JP" altLang="en-US" dirty="0"/>
+          </a:p>
+        </p:txBody>
+      </p:sp>
+      <p:sp>
+        <p:nvSpPr>
+          <p:cNvPr id="3" name="コンテンツ プレースホルダー 2">
+            <a:extLst>
+              <a:ext uri="{FF2B5EF4-FFF2-40B4-BE49-F238E27FC236}">
+                <a16:creationId xmlns:a16="http://schemas.microsoft.com/office/drawing/2014/main" id="{190438A6-7BF3-8835-F233-2855C7F36C12}"/>
+              </a:ext>
+            </a:extLst>
+          </p:cNvPr>
+          <p:cNvSpPr>
+            <a:spLocks noGrp="1"/>
+          </p:cNvSpPr>
+          <p:nvPr>
+            <p:ph idx="1"/>
+          </p:nvPr>
+        </p:nvSpPr>
+        <p:spPr/>
+        <p:txBody>
+          <a:bodyPr/>
+          <a:lstStyle/>
+          <a:p>
+            <a:r>
+              <a:rPr lang="en-US" altLang="ja-JP" dirty="0"/>
+              <a:t>Robust light transport simulation integrating </a:t>
+            </a:r>
+            <a:br>
+              <a:rPr lang="en-US" altLang="ja-JP" dirty="0"/>
+            </a:br>
+            <a:r>
+              <a:rPr lang="en-US" altLang="ja-JP" dirty="0"/>
+              <a:t>- </a:t>
+            </a:r>
+            <a:r>
+              <a:rPr lang="en-US" altLang="ja-JP" b="1" dirty="0"/>
+              <a:t>Bidirectional path tracing (BPT)</a:t>
+            </a:r>
+            <a:br>
+              <a:rPr lang="en-US" altLang="ja-JP" dirty="0"/>
+            </a:br>
+            <a:r>
+              <a:rPr lang="en-US" altLang="ja-JP" dirty="0"/>
+              <a:t>- </a:t>
+            </a:r>
+            <a:r>
+              <a:rPr lang="en-US" altLang="ja-JP" b="1" dirty="0"/>
+              <a:t>(Progressive) Photon mapping (PPM)</a:t>
+            </a:r>
+            <a:endParaRPr kumimoji="1" lang="ja-JP" altLang="en-US" b="1" dirty="0"/>
+          </a:p>
+        </p:txBody>
+      </p:sp>
+      <p:sp>
+        <p:nvSpPr>
+          <p:cNvPr id="4" name="スライド番号プレースホルダー 3">
+            <a:extLst>
+              <a:ext uri="{FF2B5EF4-FFF2-40B4-BE49-F238E27FC236}">
+                <a16:creationId xmlns:a16="http://schemas.microsoft.com/office/drawing/2014/main" id="{25C9DDA0-DC27-11B6-A399-5B5243675B9A}"/>
+              </a:ext>
+            </a:extLst>
+          </p:cNvPr>
+          <p:cNvSpPr>
+            <a:spLocks noGrp="1"/>
+          </p:cNvSpPr>
+          <p:nvPr>
+            <p:ph type="sldNum" sz="quarter" idx="12"/>
+          </p:nvPr>
+        </p:nvSpPr>
+        <p:spPr/>
+        <p:txBody>
+          <a:bodyPr/>
+          <a:lstStyle/>
+          <a:p>
+            <a:fld id="{05A07A33-D779-4A79-A49C-E26576C728D8}" type="slidenum">
+              <a:rPr lang="ja-JP" altLang="en-US" smtClean="0"/>
+              <a:pPr/>
+              <a:t>2</a:t>
+            </a:fld>
+            <a:endParaRPr lang="ja-JP" altLang="en-US" dirty="0">
+              <a:latin typeface="Calibri" panose="020F0502020204030204" pitchFamily="34" charset="0"/>
+              <a:cs typeface="Calibri" panose="020F0502020204030204" pitchFamily="34" charset="0"/>
+            </a:endParaRPr>
+          </a:p>
+        </p:txBody>
+      </p:sp>
+      <p:pic>
+        <p:nvPicPr>
+          <p:cNvPr id="6" name="図 5">
+            <a:extLst>
+              <a:ext uri="{FF2B5EF4-FFF2-40B4-BE49-F238E27FC236}">
+                <a16:creationId xmlns:a16="http://schemas.microsoft.com/office/drawing/2014/main" id="{DFFE7207-7ABF-A8ED-812E-76D42ED79424}"/>
+              </a:ext>
+            </a:extLst>
+          </p:cNvPr>
+          <p:cNvPicPr>
+            <a:picLocks noChangeAspect="1"/>
+          </p:cNvPicPr>
+          <p:nvPr/>
+        </p:nvPicPr>
+        <p:blipFill>
+          <a:blip r:embed="rId2"/>
+          <a:stretch>
+            <a:fillRect/>
+          </a:stretch>
+        </p:blipFill>
+        <p:spPr>
+          <a:xfrm>
+            <a:off x="716354" y="2673225"/>
+            <a:ext cx="10759291" cy="3764417"/>
+          </a:xfrm>
+          <a:prstGeom prst="rect">
+            <a:avLst/>
+          </a:prstGeom>
+        </p:spPr>
+      </p:pic>
+      <p:sp>
+        <p:nvSpPr>
+          <p:cNvPr id="7" name="正方形/長方形 6">
+            <a:extLst>
+              <a:ext uri="{FF2B5EF4-FFF2-40B4-BE49-F238E27FC236}">
+                <a16:creationId xmlns:a16="http://schemas.microsoft.com/office/drawing/2014/main" id="{5B1360E4-BED2-E39D-502A-3ED512B675A5}"/>
+              </a:ext>
+            </a:extLst>
+          </p:cNvPr>
+          <p:cNvSpPr/>
+          <p:nvPr/>
+        </p:nvSpPr>
+        <p:spPr>
+          <a:xfrm>
+            <a:off x="6095999" y="2673225"/>
+            <a:ext cx="2705101" cy="3764417"/>
+          </a:xfrm>
+          <a:prstGeom prst="rect">
+            <a:avLst/>
+          </a:prstGeom>
+          <a:noFill/>
+          <a:ln w="28575">
+            <a:solidFill>
+              <a:srgbClr val="C00000"/>
+            </a:solidFill>
+          </a:ln>
+        </p:spPr>
+        <p:style>
+          <a:lnRef idx="2">
+            <a:schemeClr val="accent1">
+              <a:shade val="15000"/>
+            </a:schemeClr>
+          </a:lnRef>
+          <a:fillRef idx="1">
+            <a:schemeClr val="accent1"/>
+          </a:fillRef>
+          <a:effectRef idx="0">
+            <a:schemeClr val="accent1"/>
+          </a:effectRef>
+          <a:fontRef idx="minor">
+            <a:schemeClr val="lt1"/>
+          </a:fontRef>
+        </p:style>
+        <p:txBody>
+          <a:bodyPr rtlCol="0" anchor="ctr"/>
+          <a:lstStyle/>
+          <a:p>
+            <a:pPr algn="ctr"/>
+            <a:endParaRPr kumimoji="1" lang="ja-JP" altLang="en-US"/>
+          </a:p>
+        </p:txBody>
+      </p:sp>
+      <p:sp>
+        <p:nvSpPr>
+          <p:cNvPr id="8" name="テキスト ボックス 7">
+            <a:extLst>
+              <a:ext uri="{FF2B5EF4-FFF2-40B4-BE49-F238E27FC236}">
+                <a16:creationId xmlns:a16="http://schemas.microsoft.com/office/drawing/2014/main" id="{1FDEC7E9-66DA-4E0B-331A-DF817494E0E2}"/>
+              </a:ext>
+            </a:extLst>
+          </p:cNvPr>
+          <p:cNvSpPr txBox="1"/>
+          <p:nvPr/>
+        </p:nvSpPr>
+        <p:spPr>
+          <a:xfrm>
+            <a:off x="4300536" y="6447167"/>
+            <a:ext cx="3590925" cy="369332"/>
+          </a:xfrm>
+          <a:prstGeom prst="rect">
+            <a:avLst/>
+          </a:prstGeom>
+          <a:noFill/>
+        </p:spPr>
+        <p:txBody>
+          <a:bodyPr wrap="square" rtlCol="0">
+            <a:spAutoFit/>
+          </a:bodyPr>
+          <a:lstStyle/>
+          <a:p>
+            <a:pPr algn="ctr"/>
+            <a:r>
+              <a:rPr kumimoji="1" lang="en-US" altLang="ja-JP" dirty="0">
+                <a:latin typeface="Calibri" panose="020F0502020204030204" pitchFamily="34" charset="0"/>
+                <a:ea typeface="Calibri" panose="020F0502020204030204" pitchFamily="34" charset="0"/>
+                <a:cs typeface="Calibri" panose="020F0502020204030204" pitchFamily="34" charset="0"/>
+              </a:rPr>
+              <a:t>Teaser image</a:t>
+            </a:r>
+            <a:endParaRPr kumimoji="1" lang="ja-JP" altLang="en-US" dirty="0">
+              <a:latin typeface="Calibri" panose="020F0502020204030204" pitchFamily="34" charset="0"/>
+              <a:cs typeface="Calibri" panose="020F0502020204030204" pitchFamily="34" charset="0"/>
+            </a:endParaRPr>
+          </a:p>
+        </p:txBody>
+      </p:sp>
+    </p:spTree>
+    <p:extLst>
+      <p:ext uri="{BB962C8B-B14F-4D97-AF65-F5344CB8AC3E}">
+        <p14:creationId xmlns:p14="http://schemas.microsoft.com/office/powerpoint/2010/main" val="2128308975"/>
+      </p:ext>
+    </p:extLst>
+  </p:cSld>
+  <p:clrMapOvr>
+    <a:masterClrMapping/>
+  </p:clrMapOvr>
+</p:sld>
+</file>
+
+<file path=ppt/slides/slide3.xml><?xml version="1.0" encoding="utf-8"?>
+<p:sld xmlns:a="http://schemas.openxmlformats.org/drawingml/2006/main" xmlns:r="http://schemas.openxmlformats.org/officeDocument/2006/relationships" xmlns:p="http://schemas.openxmlformats.org/presentationml/2006/main">
+  <p:cSld>
+    <p:spTree>
+      <p:nvGrpSpPr>
+        <p:cNvPr id="1" name="">
+          <a:extLst>
+            <a:ext uri="{FF2B5EF4-FFF2-40B4-BE49-F238E27FC236}">
+              <a16:creationId xmlns:a16="http://schemas.microsoft.com/office/drawing/2014/main" id="{42365341-075C-22C1-E617-E75659043553}"/>
+            </a:ext>
+          </a:extLst>
+        </p:cNvPr>
+        <p:cNvGrpSpPr/>
+        <p:nvPr/>
+      </p:nvGrpSpPr>
+      <p:grpSpPr>
+        <a:xfrm>
+          <a:off x="0" y="0"/>
+          <a:ext cx="0" cy="0"/>
+          <a:chOff x="0" y="0"/>
+          <a:chExt cx="0" cy="0"/>
+        </a:xfrm>
+      </p:grpSpPr>
+      <p:pic>
+        <p:nvPicPr>
+          <p:cNvPr id="1028" name="Picture 4" descr="PDF] Bidirectional Path Tracing | Semantic Scholar">
+            <a:extLst>
+              <a:ext uri="{FF2B5EF4-FFF2-40B4-BE49-F238E27FC236}">
+                <a16:creationId xmlns:a16="http://schemas.microsoft.com/office/drawing/2014/main" id="{CBD6611A-27F3-F6A1-4B86-7C5600E2E5C0}"/>
+              </a:ext>
+            </a:extLst>
+          </p:cNvPr>
+          <p:cNvPicPr>
+            <a:picLocks noChangeAspect="1" noChangeArrowheads="1"/>
+          </p:cNvPicPr>
+          <p:nvPr/>
+        </p:nvPicPr>
+        <p:blipFill rotWithShape="1">
+          <a:blip r:embed="rId2">
+            <a:extLst>
+              <a:ext uri="{28A0092B-C50C-407E-A947-70E740481C1C}">
+                <a14:useLocalDpi xmlns:a14="http://schemas.microsoft.com/office/drawing/2010/main" val="0"/>
+              </a:ext>
+            </a:extLst>
+          </a:blip>
+          <a:srcRect t="22136"/>
+          <a:stretch>
+            <a:fillRect/>
+          </a:stretch>
+        </p:blipFill>
+        <p:spPr bwMode="auto">
+          <a:xfrm>
+            <a:off x="5707578" y="3320743"/>
+            <a:ext cx="6119986" cy="2894342"/>
+          </a:xfrm>
+          <a:prstGeom prst="rect">
+            <a:avLst/>
+          </a:prstGeom>
+          <a:noFill/>
+          <a:extLst>
+            <a:ext uri="{909E8E84-426E-40DD-AFC4-6F175D3DCCD1}">
+              <a14:hiddenFill xmlns:a14="http://schemas.microsoft.com/office/drawing/2010/main">
+                <a:solidFill>
+                  <a:srgbClr val="FFFFFF"/>
+                </a:solidFill>
+              </a14:hiddenFill>
+            </a:ext>
+          </a:extLst>
+        </p:spPr>
+      </p:pic>
+      <p:sp>
+        <p:nvSpPr>
+          <p:cNvPr id="2" name="タイトル 1">
+            <a:extLst>
+              <a:ext uri="{FF2B5EF4-FFF2-40B4-BE49-F238E27FC236}">
+                <a16:creationId xmlns:a16="http://schemas.microsoft.com/office/drawing/2014/main" id="{7F5F4E9D-5689-CF8A-DF69-A59A80AB399C}"/>
+              </a:ext>
+            </a:extLst>
+          </p:cNvPr>
+          <p:cNvSpPr>
+            <a:spLocks noGrp="1"/>
+          </p:cNvSpPr>
+          <p:nvPr>
+            <p:ph type="title"/>
+          </p:nvPr>
+        </p:nvSpPr>
+        <p:spPr/>
+        <p:txBody>
+          <a:bodyPr/>
+          <a:lstStyle/>
+          <a:p>
+            <a:r>
+              <a:rPr kumimoji="1" lang="en-US" altLang="ja-JP" dirty="0"/>
+              <a:t>Background: BPT</a:t>
+            </a:r>
+            <a:endParaRPr kumimoji="1" lang="ja-JP" altLang="en-US" dirty="0"/>
+          </a:p>
+        </p:txBody>
+      </p:sp>
+      <p:sp>
+        <p:nvSpPr>
+          <p:cNvPr id="3" name="コンテンツ プレースホルダー 2">
+            <a:extLst>
+              <a:ext uri="{FF2B5EF4-FFF2-40B4-BE49-F238E27FC236}">
+                <a16:creationId xmlns:a16="http://schemas.microsoft.com/office/drawing/2014/main" id="{4857923A-63F2-32A4-CEDC-A13261EC0470}"/>
+              </a:ext>
+            </a:extLst>
+          </p:cNvPr>
+          <p:cNvSpPr>
+            <a:spLocks noGrp="1"/>
+          </p:cNvSpPr>
+          <p:nvPr>
+            <p:ph idx="1"/>
+          </p:nvPr>
+        </p:nvSpPr>
+        <p:spPr/>
+        <p:txBody>
+          <a:bodyPr/>
+          <a:lstStyle/>
+          <a:p>
+            <a:r>
+              <a:rPr lang="en-US" altLang="ja-JP" dirty="0"/>
+              <a:t>Path tracing is always suffering from MC noise…</a:t>
+            </a:r>
+            <a:br>
+              <a:rPr lang="en-US" altLang="ja-JP" dirty="0"/>
+            </a:br>
+            <a:r>
+              <a:rPr lang="ja-JP" altLang="en-US" dirty="0"/>
+              <a:t>→ </a:t>
+            </a:r>
+            <a:r>
+              <a:rPr lang="en-US" altLang="ja-JP" dirty="0"/>
+              <a:t>Various methods have been proposed, like </a:t>
+            </a:r>
+            <a:r>
+              <a:rPr lang="en-US" altLang="ja-JP" b="1" dirty="0"/>
+              <a:t>BPT</a:t>
+            </a:r>
+            <a:r>
+              <a:rPr lang="en-US" altLang="ja-JP" dirty="0"/>
+              <a:t>, </a:t>
+            </a:r>
+            <a:r>
+              <a:rPr lang="en-US" altLang="ja-JP" b="1" dirty="0"/>
+              <a:t>PPM</a:t>
+            </a:r>
+            <a:r>
+              <a:rPr lang="en-US" altLang="ja-JP" dirty="0"/>
+              <a:t>, MLT, etc.</a:t>
+            </a:r>
+          </a:p>
+          <a:p>
+            <a:endParaRPr kumimoji="1" lang="en-US" altLang="ja-JP" dirty="0"/>
+          </a:p>
+          <a:p>
+            <a:r>
+              <a:rPr kumimoji="1" lang="en-US" altLang="ja-JP" u="sng" dirty="0"/>
+              <a:t>Bidirectional Path </a:t>
+            </a:r>
+            <a:r>
+              <a:rPr lang="en-US" altLang="ja-JP" u="sng" dirty="0"/>
+              <a:t>Tracing (BPT)</a:t>
+            </a:r>
+            <a:r>
+              <a:rPr lang="en-US" altLang="ja-JP" dirty="0"/>
+              <a:t>:</a:t>
+            </a:r>
+            <a:br>
+              <a:rPr lang="en-US" altLang="ja-JP" dirty="0"/>
+            </a:br>
+            <a:r>
+              <a:rPr lang="en-US" altLang="ja-JP" dirty="0"/>
+              <a:t>Conventional path tracing trace paths </a:t>
+            </a:r>
+            <a:br>
+              <a:rPr lang="en-US" altLang="ja-JP" dirty="0"/>
+            </a:br>
+            <a:r>
+              <a:rPr lang="en-US" altLang="ja-JP" b="1" dirty="0"/>
+              <a:t>(only) from the viewpoint</a:t>
+            </a:r>
+          </a:p>
+          <a:p>
+            <a:pPr marL="0" indent="0">
+              <a:buNone/>
+            </a:pPr>
+            <a:r>
+              <a:rPr lang="ja-JP" altLang="en-US" dirty="0"/>
+              <a:t>→ </a:t>
+            </a:r>
+            <a:r>
+              <a:rPr lang="en-US" altLang="ja-JP" dirty="0"/>
+              <a:t>Trace the path from the light source </a:t>
+            </a:r>
+            <a:br>
+              <a:rPr lang="en-US" altLang="ja-JP" dirty="0"/>
+            </a:br>
+            <a:r>
+              <a:rPr lang="en-US" altLang="ja-JP" dirty="0"/>
+              <a:t>     and consider </a:t>
+            </a:r>
+            <a:r>
+              <a:rPr lang="en-US" altLang="ja-JP" b="1" dirty="0"/>
+              <a:t>all possible </a:t>
+            </a:r>
+            <a:br>
+              <a:rPr lang="en-US" altLang="ja-JP" b="1" dirty="0"/>
+            </a:br>
+            <a:r>
+              <a:rPr lang="en-US" altLang="ja-JP" b="1" dirty="0"/>
+              <a:t>     combinations of connections!</a:t>
+            </a:r>
+            <a:r>
+              <a:rPr lang="en-US" altLang="ja-JP" dirty="0"/>
+              <a:t> </a:t>
+            </a:r>
+          </a:p>
+          <a:p>
+            <a:pPr marL="0" indent="0">
+              <a:buNone/>
+            </a:pPr>
+            <a:r>
+              <a:rPr kumimoji="1" lang="ja-JP" altLang="en-US" dirty="0"/>
+              <a:t>→ </a:t>
+            </a:r>
+            <a:r>
+              <a:rPr lang="en-US" altLang="ja-JP" dirty="0"/>
+              <a:t>Significantly reduces</a:t>
+            </a:r>
+            <a:br>
+              <a:rPr lang="en-US" altLang="ja-JP" dirty="0"/>
+            </a:br>
+            <a:r>
+              <a:rPr lang="en-US" altLang="ja-JP" dirty="0"/>
+              <a:t>     MC noise of </a:t>
+            </a:r>
+            <a:r>
+              <a:rPr lang="en-US" altLang="ja-JP" b="1" dirty="0"/>
+              <a:t>indirect light</a:t>
+            </a:r>
+            <a:endParaRPr kumimoji="1" lang="ja-JP" altLang="en-US" b="1" dirty="0"/>
+          </a:p>
+        </p:txBody>
+      </p:sp>
+      <p:sp>
+        <p:nvSpPr>
+          <p:cNvPr id="4" name="スライド番号プレースホルダー 3">
+            <a:extLst>
+              <a:ext uri="{FF2B5EF4-FFF2-40B4-BE49-F238E27FC236}">
+                <a16:creationId xmlns:a16="http://schemas.microsoft.com/office/drawing/2014/main" id="{B401934C-B148-65CF-5C9F-78EC49853D12}"/>
+              </a:ext>
+            </a:extLst>
+          </p:cNvPr>
+          <p:cNvSpPr>
+            <a:spLocks noGrp="1"/>
+          </p:cNvSpPr>
+          <p:nvPr>
+            <p:ph type="sldNum" sz="quarter" idx="12"/>
+          </p:nvPr>
+        </p:nvSpPr>
+        <p:spPr/>
+        <p:txBody>
+          <a:bodyPr/>
+          <a:lstStyle/>
+          <a:p>
+            <a:fld id="{05A07A33-D779-4A79-A49C-E26576C728D8}" type="slidenum">
+              <a:rPr lang="ja-JP" altLang="en-US" smtClean="0"/>
+              <a:pPr/>
+              <a:t>3</a:t>
+            </a:fld>
+            <a:endParaRPr lang="ja-JP" altLang="en-US" dirty="0">
+              <a:latin typeface="Calibri" panose="020F0502020204030204" pitchFamily="34" charset="0"/>
+              <a:cs typeface="Calibri" panose="020F0502020204030204" pitchFamily="34" charset="0"/>
+            </a:endParaRPr>
+          </a:p>
+        </p:txBody>
+      </p:sp>
+      <p:sp>
+        <p:nvSpPr>
+          <p:cNvPr id="5" name="テキスト ボックス 4">
+            <a:extLst>
+              <a:ext uri="{FF2B5EF4-FFF2-40B4-BE49-F238E27FC236}">
+                <a16:creationId xmlns:a16="http://schemas.microsoft.com/office/drawing/2014/main" id="{4211535D-E778-B46F-D478-8593DF35E748}"/>
+              </a:ext>
+            </a:extLst>
+          </p:cNvPr>
+          <p:cNvSpPr txBox="1"/>
+          <p:nvPr/>
+        </p:nvSpPr>
+        <p:spPr>
+          <a:xfrm>
+            <a:off x="6836503" y="6319651"/>
+            <a:ext cx="3862135" cy="369332"/>
+          </a:xfrm>
+          <a:prstGeom prst="rect">
+            <a:avLst/>
+          </a:prstGeom>
+          <a:noFill/>
+        </p:spPr>
+        <p:txBody>
+          <a:bodyPr wrap="square" rtlCol="0">
+            <a:spAutoFit/>
+          </a:bodyPr>
+          <a:lstStyle/>
+          <a:p>
+            <a:pPr algn="ctr"/>
+            <a:r>
+              <a:rPr kumimoji="1" lang="en-US" altLang="ja-JP" dirty="0">
+                <a:latin typeface="Calibri" panose="020F0502020204030204" pitchFamily="34" charset="0"/>
+                <a:cs typeface="Calibri" panose="020F0502020204030204" pitchFamily="34" charset="0"/>
+              </a:rPr>
+              <a:t>BPT’s overview [1]</a:t>
+            </a:r>
+            <a:endParaRPr kumimoji="1" lang="ja-JP" altLang="en-US" dirty="0">
+              <a:latin typeface="Calibri" panose="020F0502020204030204" pitchFamily="34" charset="0"/>
+              <a:cs typeface="Calibri" panose="020F0502020204030204" pitchFamily="34" charset="0"/>
+            </a:endParaRPr>
+          </a:p>
+        </p:txBody>
+      </p:sp>
+      <p:sp>
+        <p:nvSpPr>
+          <p:cNvPr id="6" name="正方形/長方形 5">
+            <a:extLst>
+              <a:ext uri="{FF2B5EF4-FFF2-40B4-BE49-F238E27FC236}">
+                <a16:creationId xmlns:a16="http://schemas.microsoft.com/office/drawing/2014/main" id="{BE77F3B1-4DF9-A0ED-105E-BA14E0FC7D84}"/>
+              </a:ext>
+            </a:extLst>
+          </p:cNvPr>
+          <p:cNvSpPr/>
+          <p:nvPr/>
+        </p:nvSpPr>
+        <p:spPr>
+          <a:xfrm>
+            <a:off x="6846028" y="3471758"/>
+            <a:ext cx="878747" cy="381000"/>
+          </a:xfrm>
+          <a:prstGeom prst="rect">
+            <a:avLst/>
+          </a:prstGeom>
+          <a:noFill/>
+          <a:ln w="28575">
+            <a:solidFill>
+              <a:srgbClr val="C00000"/>
+            </a:solidFill>
+          </a:ln>
+        </p:spPr>
+        <p:style>
+          <a:lnRef idx="2">
+            <a:schemeClr val="accent1">
+              <a:shade val="15000"/>
+            </a:schemeClr>
+          </a:lnRef>
+          <a:fillRef idx="1">
+            <a:schemeClr val="accent1"/>
+          </a:fillRef>
+          <a:effectRef idx="0">
+            <a:schemeClr val="accent1"/>
+          </a:effectRef>
+          <a:fontRef idx="minor">
+            <a:schemeClr val="lt1"/>
+          </a:fontRef>
+        </p:style>
+        <p:txBody>
+          <a:bodyPr rtlCol="0" anchor="ctr"/>
+          <a:lstStyle/>
+          <a:p>
+            <a:pPr algn="ctr"/>
+            <a:endParaRPr kumimoji="1" lang="ja-JP" altLang="en-US"/>
+          </a:p>
+        </p:txBody>
+      </p:sp>
+      <p:sp>
+        <p:nvSpPr>
+          <p:cNvPr id="7" name="正方形/長方形 6">
+            <a:extLst>
+              <a:ext uri="{FF2B5EF4-FFF2-40B4-BE49-F238E27FC236}">
+                <a16:creationId xmlns:a16="http://schemas.microsoft.com/office/drawing/2014/main" id="{A3B4233E-892D-162A-82D3-8ADCA63DC48D}"/>
+              </a:ext>
+            </a:extLst>
+          </p:cNvPr>
+          <p:cNvSpPr/>
+          <p:nvPr/>
+        </p:nvSpPr>
+        <p:spPr>
+          <a:xfrm>
+            <a:off x="11015492" y="3462233"/>
+            <a:ext cx="878747" cy="381000"/>
+          </a:xfrm>
+          <a:prstGeom prst="rect">
+            <a:avLst/>
+          </a:prstGeom>
+          <a:noFill/>
+          <a:ln w="28575">
+            <a:solidFill>
+              <a:srgbClr val="C00000"/>
+            </a:solidFill>
+          </a:ln>
+        </p:spPr>
+        <p:style>
+          <a:lnRef idx="2">
+            <a:schemeClr val="accent1">
+              <a:shade val="15000"/>
+            </a:schemeClr>
+          </a:lnRef>
+          <a:fillRef idx="1">
+            <a:schemeClr val="accent1"/>
+          </a:fillRef>
+          <a:effectRef idx="0">
+            <a:schemeClr val="accent1"/>
+          </a:effectRef>
+          <a:fontRef idx="minor">
+            <a:schemeClr val="lt1"/>
+          </a:fontRef>
+        </p:style>
+        <p:txBody>
+          <a:bodyPr rtlCol="0" anchor="ctr"/>
+          <a:lstStyle/>
+          <a:p>
+            <a:pPr algn="ctr"/>
+            <a:endParaRPr kumimoji="1" lang="ja-JP" altLang="en-US"/>
+          </a:p>
+        </p:txBody>
+      </p:sp>
+    </p:spTree>
+    <p:extLst>
+      <p:ext uri="{BB962C8B-B14F-4D97-AF65-F5344CB8AC3E}">
+        <p14:creationId xmlns:p14="http://schemas.microsoft.com/office/powerpoint/2010/main" val="272362213"/>
+      </p:ext>
+    </p:extLst>
+  </p:cSld>
+  <p:clrMapOvr>
+    <a:masterClrMapping/>
+  </p:clrMapOvr>
+</p:sld>
+</file>
+
+<file path=ppt/slides/slide4.xml><?xml version="1.0" encoding="utf-8"?>
+<p:sld xmlns:a="http://schemas.openxmlformats.org/drawingml/2006/main" xmlns:r="http://schemas.openxmlformats.org/officeDocument/2006/relationships" xmlns:p="http://schemas.openxmlformats.org/presentationml/2006/main">
+  <p:cSld>
+    <p:spTree>
+      <p:nvGrpSpPr>
+        <p:cNvPr id="1" name="">
+          <a:extLst>
+            <a:ext uri="{FF2B5EF4-FFF2-40B4-BE49-F238E27FC236}">
+              <a16:creationId xmlns:a16="http://schemas.microsoft.com/office/drawing/2014/main" id="{29B058D6-5919-7A36-FB5C-E733670A75D4}"/>
+            </a:ext>
+          </a:extLst>
+        </p:cNvPr>
+        <p:cNvGrpSpPr/>
+        <p:nvPr/>
+      </p:nvGrpSpPr>
+      <p:grpSpPr>
+        <a:xfrm>
+          <a:off x="0" y="0"/>
+          <a:ext cx="0" cy="0"/>
+          <a:chOff x="0" y="0"/>
+          <a:chExt cx="0" cy="0"/>
+        </a:xfrm>
+      </p:grpSpPr>
+      <p:sp>
+        <p:nvSpPr>
+          <p:cNvPr id="2" name="タイトル 1">
+            <a:extLst>
+              <a:ext uri="{FF2B5EF4-FFF2-40B4-BE49-F238E27FC236}">
+                <a16:creationId xmlns:a16="http://schemas.microsoft.com/office/drawing/2014/main" id="{84CAE209-4ACA-55D1-F4E9-4C6DC07487F1}"/>
+              </a:ext>
+            </a:extLst>
+          </p:cNvPr>
+          <p:cNvSpPr>
+            <a:spLocks noGrp="1"/>
+          </p:cNvSpPr>
+          <p:nvPr>
+            <p:ph type="title"/>
+          </p:nvPr>
+        </p:nvSpPr>
+        <p:spPr/>
+        <p:txBody>
+          <a:bodyPr/>
+          <a:lstStyle/>
+          <a:p>
+            <a:r>
+              <a:rPr kumimoji="1" lang="en-US" altLang="ja-JP" dirty="0"/>
+              <a:t>Background: (P)PM</a:t>
+            </a:r>
+            <a:endParaRPr kumimoji="1" lang="ja-JP" altLang="en-US" dirty="0"/>
+          </a:p>
+        </p:txBody>
+      </p:sp>
+      <p:sp>
+        <p:nvSpPr>
+          <p:cNvPr id="4" name="スライド番号プレースホルダー 3">
+            <a:extLst>
+              <a:ext uri="{FF2B5EF4-FFF2-40B4-BE49-F238E27FC236}">
+                <a16:creationId xmlns:a16="http://schemas.microsoft.com/office/drawing/2014/main" id="{752FE830-7059-F639-2527-C992AF07BC8B}"/>
+              </a:ext>
+            </a:extLst>
+          </p:cNvPr>
+          <p:cNvSpPr>
+            <a:spLocks noGrp="1"/>
+          </p:cNvSpPr>
+          <p:nvPr>
+            <p:ph type="sldNum" sz="quarter" idx="12"/>
+          </p:nvPr>
+        </p:nvSpPr>
+        <p:spPr/>
+        <p:txBody>
+          <a:bodyPr/>
+          <a:lstStyle/>
+          <a:p>
+            <a:fld id="{05A07A33-D779-4A79-A49C-E26576C728D8}" type="slidenum">
+              <a:rPr lang="ja-JP" altLang="en-US" smtClean="0"/>
+              <a:pPr/>
+              <a:t>4</a:t>
+            </a:fld>
+            <a:endParaRPr lang="ja-JP" altLang="en-US" dirty="0">
+              <a:latin typeface="Calibri" panose="020F0502020204030204" pitchFamily="34" charset="0"/>
+              <a:cs typeface="Calibri" panose="020F0502020204030204" pitchFamily="34" charset="0"/>
+            </a:endParaRPr>
+          </a:p>
+        </p:txBody>
+      </p:sp>
+      <p:sp>
+        <p:nvSpPr>
+          <p:cNvPr id="27" name="コンテンツ プレースホルダー 2">
+            <a:extLst>
+              <a:ext uri="{FF2B5EF4-FFF2-40B4-BE49-F238E27FC236}">
+                <a16:creationId xmlns:a16="http://schemas.microsoft.com/office/drawing/2014/main" id="{6F868C25-B29E-AAFB-FFC1-4EDBB120BC7E}"/>
+              </a:ext>
+            </a:extLst>
+          </p:cNvPr>
+          <p:cNvSpPr txBox="1">
+            <a:spLocks/>
+          </p:cNvSpPr>
+          <p:nvPr/>
+        </p:nvSpPr>
+        <p:spPr>
+          <a:xfrm>
+            <a:off x="247650" y="1325594"/>
+            <a:ext cx="11430000" cy="5325421"/>
+          </a:xfrm>
+          <a:prstGeom prst="rect">
+            <a:avLst/>
+          </a:prstGeom>
+        </p:spPr>
+        <p:txBody>
+          <a:bodyPr vert="horz" lIns="91440" tIns="45720" rIns="91440" bIns="45720" rtlCol="0">
+            <a:normAutofit/>
+          </a:bodyPr>
+          <a:lstStyle>
+            <a:lvl1pPr marL="228600" indent="-228600" algn="l" defTabSz="914400" rtl="0" eaLnBrk="1" latinLnBrk="0" hangingPunct="1">
+              <a:lnSpc>
+                <a:spcPct val="90000"/>
+              </a:lnSpc>
+              <a:spcBef>
+                <a:spcPts val="1000"/>
+              </a:spcBef>
+              <a:buFont typeface="Arial" panose="020B0604020202020204" pitchFamily="34" charset="0"/>
+              <a:buChar char="•"/>
+              <a:defRPr kumimoji="1" sz="2800" kern="1200">
+                <a:solidFill>
+                  <a:schemeClr val="tx1"/>
+                </a:solidFill>
+                <a:latin typeface="+mn-lt"/>
+                <a:ea typeface="+mn-ea"/>
+                <a:cs typeface="+mn-cs"/>
+              </a:defRPr>
+            </a:lvl1pPr>
+            <a:lvl2pPr marL="685800" indent="-228600" algn="l" defTabSz="914400" rtl="0" eaLnBrk="1" latinLnBrk="0" hangingPunct="1">
+              <a:lnSpc>
+                <a:spcPct val="90000"/>
+              </a:lnSpc>
+              <a:spcBef>
+                <a:spcPts val="500"/>
+              </a:spcBef>
+              <a:buFont typeface="Arial" panose="020B0604020202020204" pitchFamily="34" charset="0"/>
+              <a:buChar char="•"/>
+              <a:defRPr kumimoji="1" sz="2400" kern="1200">
+                <a:solidFill>
+                  <a:schemeClr val="tx1"/>
+                </a:solidFill>
+                <a:latin typeface="+mn-lt"/>
+                <a:ea typeface="+mn-ea"/>
+                <a:cs typeface="+mn-cs"/>
+              </a:defRPr>
+            </a:lvl2pPr>
+            <a:lvl3pPr marL="1143000" indent="-228600" algn="l" defTabSz="914400" rtl="0" eaLnBrk="1" latinLnBrk="0" hangingPunct="1">
+              <a:lnSpc>
+                <a:spcPct val="90000"/>
+              </a:lnSpc>
+              <a:spcBef>
+                <a:spcPts val="500"/>
+              </a:spcBef>
+              <a:buFont typeface="Arial" panose="020B0604020202020204" pitchFamily="34" charset="0"/>
+              <a:buChar char="•"/>
+              <a:defRPr kumimoji="1" sz="2000" kern="1200">
+                <a:solidFill>
+                  <a:schemeClr val="tx1"/>
+                </a:solidFill>
+                <a:latin typeface="+mn-lt"/>
+                <a:ea typeface="+mn-ea"/>
+                <a:cs typeface="+mn-cs"/>
+              </a:defRPr>
+            </a:lvl3pPr>
+            <a:lvl4pPr marL="1600200" indent="-228600" algn="l" defTabSz="914400" rtl="0" eaLnBrk="1" latinLnBrk="0" hangingPunct="1">
+              <a:lnSpc>
+                <a:spcPct val="90000"/>
+              </a:lnSpc>
+              <a:spcBef>
+                <a:spcPts val="500"/>
+              </a:spcBef>
+              <a:buFont typeface="Arial" panose="020B0604020202020204" pitchFamily="34" charset="0"/>
+              <a:buChar char="•"/>
+              <a:defRPr kumimoji="1" sz="1800" kern="1200">
+                <a:solidFill>
+                  <a:schemeClr val="tx1"/>
+                </a:solidFill>
+                <a:latin typeface="+mn-lt"/>
+                <a:ea typeface="+mn-ea"/>
+                <a:cs typeface="+mn-cs"/>
+              </a:defRPr>
+            </a:lvl4pPr>
+            <a:lvl5pPr marL="2057400" indent="-228600" algn="l" defTabSz="914400" rtl="0" eaLnBrk="1" latinLnBrk="0" hangingPunct="1">
+              <a:lnSpc>
+                <a:spcPct val="90000"/>
+              </a:lnSpc>
+              <a:spcBef>
+                <a:spcPts val="500"/>
+              </a:spcBef>
+              <a:buFont typeface="Arial" panose="020B0604020202020204" pitchFamily="34" charset="0"/>
+              <a:buChar char="•"/>
+              <a:defRPr kumimoji="1" sz="1800" kern="1200">
+                <a:solidFill>
+                  <a:schemeClr val="tx1"/>
+                </a:solidFill>
+                <a:latin typeface="+mn-lt"/>
+                <a:ea typeface="+mn-ea"/>
+                <a:cs typeface="+mn-cs"/>
+              </a:defRPr>
+            </a:lvl5pPr>
+            <a:lvl6pPr marL="2514600" indent="-228600" algn="l" defTabSz="914400" rtl="0" eaLnBrk="1" latinLnBrk="0" hangingPunct="1">
+              <a:lnSpc>
+                <a:spcPct val="90000"/>
+              </a:lnSpc>
+              <a:spcBef>
+                <a:spcPts val="500"/>
+              </a:spcBef>
+              <a:buFont typeface="Arial" panose="020B0604020202020204" pitchFamily="34" charset="0"/>
+              <a:buChar char="•"/>
+              <a:defRPr kumimoji="1" sz="1800" kern="1200">
+                <a:solidFill>
+                  <a:schemeClr val="tx1"/>
+                </a:solidFill>
+                <a:latin typeface="+mn-lt"/>
+                <a:ea typeface="+mn-ea"/>
+                <a:cs typeface="+mn-cs"/>
+              </a:defRPr>
+            </a:lvl6pPr>
+            <a:lvl7pPr marL="2971800" indent="-228600" algn="l" defTabSz="914400" rtl="0" eaLnBrk="1" latinLnBrk="0" hangingPunct="1">
+              <a:lnSpc>
+                <a:spcPct val="90000"/>
+              </a:lnSpc>
+              <a:spcBef>
+                <a:spcPts val="500"/>
+              </a:spcBef>
+              <a:buFont typeface="Arial" panose="020B0604020202020204" pitchFamily="34" charset="0"/>
+              <a:buChar char="•"/>
+              <a:defRPr kumimoji="1" sz="1800" kern="1200">
+                <a:solidFill>
+                  <a:schemeClr val="tx1"/>
+                </a:solidFill>
+                <a:latin typeface="+mn-lt"/>
+                <a:ea typeface="+mn-ea"/>
+                <a:cs typeface="+mn-cs"/>
+              </a:defRPr>
+            </a:lvl7pPr>
+            <a:lvl8pPr marL="3429000" indent="-228600" algn="l" defTabSz="914400" rtl="0" eaLnBrk="1" latinLnBrk="0" hangingPunct="1">
+              <a:lnSpc>
+                <a:spcPct val="90000"/>
+              </a:lnSpc>
+              <a:spcBef>
+                <a:spcPts val="500"/>
+              </a:spcBef>
+              <a:buFont typeface="Arial" panose="020B0604020202020204" pitchFamily="34" charset="0"/>
+              <a:buChar char="•"/>
+              <a:defRPr kumimoji="1" sz="1800" kern="1200">
+                <a:solidFill>
+                  <a:schemeClr val="tx1"/>
+                </a:solidFill>
+                <a:latin typeface="+mn-lt"/>
+                <a:ea typeface="+mn-ea"/>
+                <a:cs typeface="+mn-cs"/>
+              </a:defRPr>
+            </a:lvl8pPr>
+            <a:lvl9pPr marL="3886200" indent="-228600" algn="l" defTabSz="914400" rtl="0" eaLnBrk="1" latinLnBrk="0" hangingPunct="1">
+              <a:lnSpc>
+                <a:spcPct val="90000"/>
+              </a:lnSpc>
+              <a:spcBef>
+                <a:spcPts val="500"/>
+              </a:spcBef>
+              <a:buFont typeface="Arial" panose="020B0604020202020204" pitchFamily="34" charset="0"/>
+              <a:buChar char="•"/>
+              <a:defRPr kumimoji="1" sz="1800" kern="1200">
+                <a:solidFill>
+                  <a:schemeClr val="tx1"/>
+                </a:solidFill>
+                <a:latin typeface="+mn-lt"/>
+                <a:ea typeface="+mn-ea"/>
+                <a:cs typeface="+mn-cs"/>
+              </a:defRPr>
+            </a:lvl9pPr>
+          </a:lstStyle>
+          <a:p>
             <a:pPr marL="0" indent="0">
               <a:buFont typeface="Arial" panose="020B0604020202020204" pitchFamily="34" charset="0"/>
               <a:buNone/>
@@ -10049,8 +13886,8 @@
           </a:p>
         </p:txBody>
       </p:sp>
-      <mc:AlternateContent xmlns:mc="http://schemas.openxmlformats.org/markup-compatibility/2006">
-        <mc:Choice xmlns:a14="http://schemas.microsoft.com/office/drawing/2010/main" Requires="a14">
+      <mc:AlternateContent xmlns:mc="http://schemas.openxmlformats.org/markup-compatibility/2006" xmlns:a14="http://schemas.microsoft.com/office/drawing/2010/main">
+        <mc:Choice Requires="a14">
           <p:sp>
             <p:nvSpPr>
               <p:cNvPr id="3" name="コンテンツ プレースホルダー 2">
@@ -10499,7 +14336,7 @@
             </p:txBody>
           </p:sp>
         </mc:Choice>
-        <mc:Fallback>
+        <mc:Fallback xmlns="">
           <p:sp>
             <p:nvSpPr>
               <p:cNvPr id="3" name="コンテンツ プレースホルダー 2">
@@ -10856,7 +14693,7 @@
                 <a:latin typeface="Calibri" panose="020F0502020204030204" pitchFamily="34" charset="0"/>
                 <a:cs typeface="Calibri" panose="020F0502020204030204" pitchFamily="34" charset="0"/>
               </a:rPr>
-              <a:t>BDPT: </a:t>
+              <a:t>BPT: </a:t>
             </a:r>
             <a:r>
               <a:rPr lang="en-US" altLang="ja-JP" sz="2200" b="1" dirty="0">
@@ -11155,7 +14992,7 @@
                 <a:latin typeface="Calibri" panose="020F0502020204030204" pitchFamily="34" charset="0"/>
                 <a:cs typeface="Calibri" panose="020F0502020204030204" pitchFamily="34" charset="0"/>
               </a:rPr>
-              <a:t>BDPT: Based on </a:t>
+              <a:t>BPT: Based on </a:t>
             </a:r>
             <a:r>
               <a:rPr lang="en-US" altLang="ja-JP" sz="2200" b="1" dirty="0">
@@ -11428,7 +15265,7 @@
                 <a:latin typeface="Calibri" panose="020F0502020204030204" pitchFamily="34" charset="0"/>
                 <a:cs typeface="Calibri" panose="020F0502020204030204" pitchFamily="34" charset="0"/>
               </a:rPr>
-              <a:t>from BDPT</a:t>
+              <a:t>from BPT</a:t>
             </a:r>
           </a:p>
           <a:p>
@@ -11554,7 +15391,7 @@
         <p:cNvPr id="1" name="">
           <a:extLst>
             <a:ext uri="{FF2B5EF4-FFF2-40B4-BE49-F238E27FC236}">
-              <a16:creationId xmlns:a16="http://schemas.microsoft.com/office/drawing/2014/main" id="{B030A141-E790-D52D-C078-B5DB4A0E339F}"/>
+              <a16:creationId xmlns:a16="http://schemas.microsoft.com/office/drawing/2014/main" id="{29D2B995-BA87-0FBE-B75D-1A72DD0638D9}"/>
             </a:ext>
           </a:extLst>
         </p:cNvPr>
@@ -11574,7 +15411,7 @@
           <p:cNvPr id="2" name="タイトル 1">
             <a:extLst>
               <a:ext uri="{FF2B5EF4-FFF2-40B4-BE49-F238E27FC236}">
-                <a16:creationId xmlns:a16="http://schemas.microsoft.com/office/drawing/2014/main" id="{9F973ED3-8BE4-5C2C-1807-5597D278473B}"/>
+                <a16:creationId xmlns:a16="http://schemas.microsoft.com/office/drawing/2014/main" id="{6084C8A2-FA74-1B63-A12B-AC5126145217}"/>
               </a:ext>
             </a:extLst>
           </p:cNvPr>
@@ -11587,14 +15424,12 @@
         </p:nvSpPr>
         <p:spPr/>
         <p:txBody>
-          <a:bodyPr>
-            <a:normAutofit/>
-          </a:bodyPr>
+          <a:bodyPr/>
           <a:lstStyle/>
           <a:p>
             <a:r>
-              <a:rPr lang="en-US" altLang="ja-JP" dirty="0"/>
-              <a:t>Rewriting photons in path space</a:t>
+              <a:rPr kumimoji="1" lang="en-US" altLang="ja-JP" dirty="0"/>
+              <a:t>Overview</a:t>
             </a:r>
             <a:endParaRPr kumimoji="1" lang="ja-JP" altLang="en-US" dirty="0"/>
           </a:p>
@@ -11605,7 +15440,7 @@
           <p:cNvPr id="4" name="スライド番号プレースホルダー 3">
             <a:extLst>
               <a:ext uri="{FF2B5EF4-FFF2-40B4-BE49-F238E27FC236}">
-                <a16:creationId xmlns:a16="http://schemas.microsoft.com/office/drawing/2014/main" id="{69C78673-E48A-A539-2C14-181AA317CDFA}"/>
+                <a16:creationId xmlns:a16="http://schemas.microsoft.com/office/drawing/2014/main" id="{BD0E1B06-C203-CDB8-95A5-B56101FDDA65}"/>
               </a:ext>
             </a:extLst>
           </p:cNvPr>
@@ -11633,10 +15468,83 @@
           </a:p>
         </p:txBody>
       </p:sp>
+      <p:pic>
+        <p:nvPicPr>
+          <p:cNvPr id="12" name="図 11">
+            <a:extLst>
+              <a:ext uri="{FF2B5EF4-FFF2-40B4-BE49-F238E27FC236}">
+                <a16:creationId xmlns:a16="http://schemas.microsoft.com/office/drawing/2014/main" id="{8590BEA4-F800-E285-DECF-9D4A4580FDE4}"/>
+              </a:ext>
+            </a:extLst>
+          </p:cNvPr>
+          <p:cNvPicPr>
+            <a:picLocks noChangeAspect="1"/>
+          </p:cNvPicPr>
+          <p:nvPr/>
+        </p:nvPicPr>
+        <p:blipFill>
+          <a:blip r:embed="rId2"/>
+          <a:stretch>
+            <a:fillRect/>
+          </a:stretch>
+        </p:blipFill>
+        <p:spPr>
+          <a:xfrm>
+            <a:off x="1523778" y="1258677"/>
+            <a:ext cx="9153232" cy="5237373"/>
+          </a:xfrm>
+          <a:prstGeom prst="rect">
+            <a:avLst/>
+          </a:prstGeom>
+        </p:spPr>
+      </p:pic>
+      <p:sp>
+        <p:nvSpPr>
+          <p:cNvPr id="13" name="テキスト ボックス 12">
+            <a:extLst>
+              <a:ext uri="{FF2B5EF4-FFF2-40B4-BE49-F238E27FC236}">
+                <a16:creationId xmlns:a16="http://schemas.microsoft.com/office/drawing/2014/main" id="{D3599549-E2CA-2255-362A-1131E4AFBBC0}"/>
+              </a:ext>
+            </a:extLst>
+          </p:cNvPr>
+          <p:cNvSpPr txBox="1"/>
+          <p:nvPr/>
+        </p:nvSpPr>
+        <p:spPr>
+          <a:xfrm>
+            <a:off x="3982776" y="6385272"/>
+            <a:ext cx="4226447" cy="369332"/>
+          </a:xfrm>
+          <a:prstGeom prst="rect">
+            <a:avLst/>
+          </a:prstGeom>
+          <a:noFill/>
+        </p:spPr>
+        <p:txBody>
+          <a:bodyPr wrap="square" rtlCol="0">
+            <a:spAutoFit/>
+          </a:bodyPr>
+          <a:lstStyle/>
+          <a:p>
+            <a:pPr algn="ctr"/>
+            <a:r>
+              <a:rPr kumimoji="1" lang="en-US" altLang="ja-JP" dirty="0">
+                <a:latin typeface="Calibri" panose="020F0502020204030204" pitchFamily="34" charset="0"/>
+                <a:cs typeface="Calibri" panose="020F0502020204030204" pitchFamily="34" charset="0"/>
+              </a:rPr>
+              <a:t>Overview of VCM method [3]</a:t>
+            </a:r>
+            <a:endParaRPr kumimoji="1" lang="ja-JP" altLang="en-US" dirty="0">
+              <a:latin typeface="Calibri" panose="020F0502020204030204" pitchFamily="34" charset="0"/>
+              <a:cs typeface="Calibri" panose="020F0502020204030204" pitchFamily="34" charset="0"/>
+            </a:endParaRPr>
+          </a:p>
+        </p:txBody>
+      </p:sp>
     </p:spTree>
     <p:extLst>
       <p:ext uri="{BB962C8B-B14F-4D97-AF65-F5344CB8AC3E}">
-        <p14:creationId xmlns:p14="http://schemas.microsoft.com/office/powerpoint/2010/main" val="1514167130"/>
+        <p14:creationId xmlns:p14="http://schemas.microsoft.com/office/powerpoint/2010/main" val="3169626008"/>
       </p:ext>
     </p:extLst>
   </p:cSld>
@@ -11654,7 +15562,7 @@
         <p:cNvPr id="1" name="">
           <a:extLst>
             <a:ext uri="{FF2B5EF4-FFF2-40B4-BE49-F238E27FC236}">
-              <a16:creationId xmlns:a16="http://schemas.microsoft.com/office/drawing/2014/main" id="{E22901A5-B797-C553-4CF5-7B66403EFB2F}"/>
+              <a16:creationId xmlns:a16="http://schemas.microsoft.com/office/drawing/2014/main" id="{B030A141-E790-D52D-C078-B5DB4A0E339F}"/>
             </a:ext>
           </a:extLst>
         </p:cNvPr>
@@ -11674,7 +15582,7 @@
           <p:cNvPr id="2" name="タイトル 1">
             <a:extLst>
               <a:ext uri="{FF2B5EF4-FFF2-40B4-BE49-F238E27FC236}">
-                <a16:creationId xmlns:a16="http://schemas.microsoft.com/office/drawing/2014/main" id="{260EA78A-CA6B-BF3E-8F6D-5054BBBA4102}"/>
+                <a16:creationId xmlns:a16="http://schemas.microsoft.com/office/drawing/2014/main" id="{9F973ED3-8BE4-5C2C-1807-5597D278473B}"/>
               </a:ext>
             </a:extLst>
           </p:cNvPr>
@@ -11687,12 +15595,14 @@
         </p:nvSpPr>
         <p:spPr/>
         <p:txBody>
-          <a:bodyPr/>
+          <a:bodyPr>
+            <a:normAutofit/>
+          </a:bodyPr>
           <a:lstStyle/>
           <a:p>
             <a:r>
-              <a:rPr kumimoji="1" lang="en-US" altLang="ja-JP" dirty="0"/>
-              <a:t>References</a:t>
+              <a:rPr lang="en-US" altLang="ja-JP" dirty="0"/>
+              <a:t>Vertex merging</a:t>
             </a:r>
             <a:endParaRPr kumimoji="1" lang="ja-JP" altLang="en-US" dirty="0"/>
           </a:p>
@@ -11703,7 +15613,7 @@
           <p:cNvPr id="4" name="スライド番号プレースホルダー 3">
             <a:extLst>
               <a:ext uri="{FF2B5EF4-FFF2-40B4-BE49-F238E27FC236}">
-                <a16:creationId xmlns:a16="http://schemas.microsoft.com/office/drawing/2014/main" id="{25A1C3DD-B89E-4ED4-F0F5-ED8D1F27C1F8}"/>
+                <a16:creationId xmlns:a16="http://schemas.microsoft.com/office/drawing/2014/main" id="{69C78673-E48A-A539-2C14-181AA317CDFA}"/>
               </a:ext>
             </a:extLst>
           </p:cNvPr>
@@ -11731,32 +15641,1089 @@
           </a:p>
         </p:txBody>
       </p:sp>
-      <p:sp>
-        <p:nvSpPr>
-          <p:cNvPr id="3" name="コンテンツ プレースホルダー 2">
-            <a:extLst>
-              <a:ext uri="{FF2B5EF4-FFF2-40B4-BE49-F238E27FC236}">
-                <a16:creationId xmlns:a16="http://schemas.microsoft.com/office/drawing/2014/main" id="{332F36BE-3FE6-1B9A-B76C-F091CAAF7DBF}"/>
-              </a:ext>
-            </a:extLst>
-          </p:cNvPr>
-          <p:cNvSpPr txBox="1">
-            <a:spLocks/>
-          </p:cNvSpPr>
+      <mc:AlternateContent xmlns:mc="http://schemas.openxmlformats.org/markup-compatibility/2006">
+        <mc:Choice xmlns:a14="http://schemas.microsoft.com/office/drawing/2010/main" Requires="a14">
+          <p:sp>
+            <p:nvSpPr>
+              <p:cNvPr id="6" name="コンテンツ プレースホルダー 2">
+                <a:extLst>
+                  <a:ext uri="{FF2B5EF4-FFF2-40B4-BE49-F238E27FC236}">
+                    <a16:creationId xmlns:a16="http://schemas.microsoft.com/office/drawing/2014/main" id="{63B9AFB6-6E92-C014-B09C-F7E514232D9C}"/>
+                  </a:ext>
+                </a:extLst>
+              </p:cNvPr>
+              <p:cNvSpPr txBox="1">
+                <a:spLocks/>
+              </p:cNvSpPr>
+              <p:nvPr/>
+            </p:nvSpPr>
+            <p:spPr>
+              <a:xfrm>
+                <a:off x="138370" y="1430127"/>
+                <a:ext cx="11915260" cy="1589298"/>
+              </a:xfrm>
+              <a:prstGeom prst="rect">
+                <a:avLst/>
+              </a:prstGeom>
+            </p:spPr>
+            <p:txBody>
+              <a:bodyPr vert="horz" lIns="91440" tIns="45720" rIns="91440" bIns="45720" rtlCol="0">
+                <a:normAutofit/>
+              </a:bodyPr>
+              <a:lstStyle>
+                <a:lvl1pPr marL="228600" indent="-228600" algn="l" defTabSz="914400" rtl="0" eaLnBrk="1" latinLnBrk="0" hangingPunct="1">
+                  <a:lnSpc>
+                    <a:spcPct val="90000"/>
+                  </a:lnSpc>
+                  <a:spcBef>
+                    <a:spcPts val="1000"/>
+                  </a:spcBef>
+                  <a:buFont typeface="Arial" panose="020B0604020202020204" pitchFamily="34" charset="0"/>
+                  <a:buChar char="•"/>
+                  <a:defRPr kumimoji="1" sz="2800" kern="1200">
+                    <a:solidFill>
+                      <a:schemeClr val="tx1"/>
+                    </a:solidFill>
+                    <a:latin typeface="+mn-lt"/>
+                    <a:ea typeface="+mn-ea"/>
+                    <a:cs typeface="+mn-cs"/>
+                  </a:defRPr>
+                </a:lvl1pPr>
+                <a:lvl2pPr marL="685800" indent="-228600" algn="l" defTabSz="914400" rtl="0" eaLnBrk="1" latinLnBrk="0" hangingPunct="1">
+                  <a:lnSpc>
+                    <a:spcPct val="90000"/>
+                  </a:lnSpc>
+                  <a:spcBef>
+                    <a:spcPts val="500"/>
+                  </a:spcBef>
+                  <a:buFont typeface="Arial" panose="020B0604020202020204" pitchFamily="34" charset="0"/>
+                  <a:buChar char="•"/>
+                  <a:defRPr kumimoji="1" sz="2400" kern="1200">
+                    <a:solidFill>
+                      <a:schemeClr val="tx1"/>
+                    </a:solidFill>
+                    <a:latin typeface="+mn-lt"/>
+                    <a:ea typeface="+mn-ea"/>
+                    <a:cs typeface="+mn-cs"/>
+                  </a:defRPr>
+                </a:lvl2pPr>
+                <a:lvl3pPr marL="1143000" indent="-228600" algn="l" defTabSz="914400" rtl="0" eaLnBrk="1" latinLnBrk="0" hangingPunct="1">
+                  <a:lnSpc>
+                    <a:spcPct val="90000"/>
+                  </a:lnSpc>
+                  <a:spcBef>
+                    <a:spcPts val="500"/>
+                  </a:spcBef>
+                  <a:buFont typeface="Arial" panose="020B0604020202020204" pitchFamily="34" charset="0"/>
+                  <a:buChar char="•"/>
+                  <a:defRPr kumimoji="1" sz="2000" kern="1200">
+                    <a:solidFill>
+                      <a:schemeClr val="tx1"/>
+                    </a:solidFill>
+                    <a:latin typeface="+mn-lt"/>
+                    <a:ea typeface="+mn-ea"/>
+                    <a:cs typeface="+mn-cs"/>
+                  </a:defRPr>
+                </a:lvl3pPr>
+                <a:lvl4pPr marL="1600200" indent="-228600" algn="l" defTabSz="914400" rtl="0" eaLnBrk="1" latinLnBrk="0" hangingPunct="1">
+                  <a:lnSpc>
+                    <a:spcPct val="90000"/>
+                  </a:lnSpc>
+                  <a:spcBef>
+                    <a:spcPts val="500"/>
+                  </a:spcBef>
+                  <a:buFont typeface="Arial" panose="020B0604020202020204" pitchFamily="34" charset="0"/>
+                  <a:buChar char="•"/>
+                  <a:defRPr kumimoji="1" sz="1800" kern="1200">
+                    <a:solidFill>
+                      <a:schemeClr val="tx1"/>
+                    </a:solidFill>
+                    <a:latin typeface="+mn-lt"/>
+                    <a:ea typeface="+mn-ea"/>
+                    <a:cs typeface="+mn-cs"/>
+                  </a:defRPr>
+                </a:lvl4pPr>
+                <a:lvl5pPr marL="2057400" indent="-228600" algn="l" defTabSz="914400" rtl="0" eaLnBrk="1" latinLnBrk="0" hangingPunct="1">
+                  <a:lnSpc>
+                    <a:spcPct val="90000"/>
+                  </a:lnSpc>
+                  <a:spcBef>
+                    <a:spcPts val="500"/>
+                  </a:spcBef>
+                  <a:buFont typeface="Arial" panose="020B0604020202020204" pitchFamily="34" charset="0"/>
+                  <a:buChar char="•"/>
+                  <a:defRPr kumimoji="1" sz="1800" kern="1200">
+                    <a:solidFill>
+                      <a:schemeClr val="tx1"/>
+                    </a:solidFill>
+                    <a:latin typeface="+mn-lt"/>
+                    <a:ea typeface="+mn-ea"/>
+                    <a:cs typeface="+mn-cs"/>
+                  </a:defRPr>
+                </a:lvl5pPr>
+                <a:lvl6pPr marL="2514600" indent="-228600" algn="l" defTabSz="914400" rtl="0" eaLnBrk="1" latinLnBrk="0" hangingPunct="1">
+                  <a:lnSpc>
+                    <a:spcPct val="90000"/>
+                  </a:lnSpc>
+                  <a:spcBef>
+                    <a:spcPts val="500"/>
+                  </a:spcBef>
+                  <a:buFont typeface="Arial" panose="020B0604020202020204" pitchFamily="34" charset="0"/>
+                  <a:buChar char="•"/>
+                  <a:defRPr kumimoji="1" sz="1800" kern="1200">
+                    <a:solidFill>
+                      <a:schemeClr val="tx1"/>
+                    </a:solidFill>
+                    <a:latin typeface="+mn-lt"/>
+                    <a:ea typeface="+mn-ea"/>
+                    <a:cs typeface="+mn-cs"/>
+                  </a:defRPr>
+                </a:lvl6pPr>
+                <a:lvl7pPr marL="2971800" indent="-228600" algn="l" defTabSz="914400" rtl="0" eaLnBrk="1" latinLnBrk="0" hangingPunct="1">
+                  <a:lnSpc>
+                    <a:spcPct val="90000"/>
+                  </a:lnSpc>
+                  <a:spcBef>
+                    <a:spcPts val="500"/>
+                  </a:spcBef>
+                  <a:buFont typeface="Arial" panose="020B0604020202020204" pitchFamily="34" charset="0"/>
+                  <a:buChar char="•"/>
+                  <a:defRPr kumimoji="1" sz="1800" kern="1200">
+                    <a:solidFill>
+                      <a:schemeClr val="tx1"/>
+                    </a:solidFill>
+                    <a:latin typeface="+mn-lt"/>
+                    <a:ea typeface="+mn-ea"/>
+                    <a:cs typeface="+mn-cs"/>
+                  </a:defRPr>
+                </a:lvl7pPr>
+                <a:lvl8pPr marL="3429000" indent="-228600" algn="l" defTabSz="914400" rtl="0" eaLnBrk="1" latinLnBrk="0" hangingPunct="1">
+                  <a:lnSpc>
+                    <a:spcPct val="90000"/>
+                  </a:lnSpc>
+                  <a:spcBef>
+                    <a:spcPts val="500"/>
+                  </a:spcBef>
+                  <a:buFont typeface="Arial" panose="020B0604020202020204" pitchFamily="34" charset="0"/>
+                  <a:buChar char="•"/>
+                  <a:defRPr kumimoji="1" sz="1800" kern="1200">
+                    <a:solidFill>
+                      <a:schemeClr val="tx1"/>
+                    </a:solidFill>
+                    <a:latin typeface="+mn-lt"/>
+                    <a:ea typeface="+mn-ea"/>
+                    <a:cs typeface="+mn-cs"/>
+                  </a:defRPr>
+                </a:lvl8pPr>
+                <a:lvl9pPr marL="3886200" indent="-228600" algn="l" defTabSz="914400" rtl="0" eaLnBrk="1" latinLnBrk="0" hangingPunct="1">
+                  <a:lnSpc>
+                    <a:spcPct val="90000"/>
+                  </a:lnSpc>
+                  <a:spcBef>
+                    <a:spcPts val="500"/>
+                  </a:spcBef>
+                  <a:buFont typeface="Arial" panose="020B0604020202020204" pitchFamily="34" charset="0"/>
+                  <a:buChar char="•"/>
+                  <a:defRPr kumimoji="1" sz="1800" kern="1200">
+                    <a:solidFill>
+                      <a:schemeClr val="tx1"/>
+                    </a:solidFill>
+                    <a:latin typeface="+mn-lt"/>
+                    <a:ea typeface="+mn-ea"/>
+                    <a:cs typeface="+mn-cs"/>
+                  </a:defRPr>
+                </a:lvl9pPr>
+              </a:lstStyle>
+              <a:p>
+                <a:pPr marL="0" indent="0">
+                  <a:buNone/>
+                </a:pPr>
+                <a:r>
+                  <a:rPr lang="en-US" altLang="ja-JP" sz="2600" dirty="0">
+                    <a:latin typeface="Calibri" panose="020F0502020204030204" pitchFamily="34" charset="0"/>
+                    <a:cs typeface="Calibri" panose="020F0502020204030204" pitchFamily="34" charset="0"/>
+                  </a:rPr>
+                  <a:t>Treat photon density estimation as “path’s </a:t>
+                </a:r>
+                <a:r>
+                  <a:rPr lang="en-US" altLang="ja-JP" sz="2600" b="1" dirty="0">
+                    <a:latin typeface="Calibri" panose="020F0502020204030204" pitchFamily="34" charset="0"/>
+                    <a:cs typeface="Calibri" panose="020F0502020204030204" pitchFamily="34" charset="0"/>
+                  </a:rPr>
+                  <a:t>vertex merging</a:t>
+                </a:r>
+                <a:r>
+                  <a:rPr lang="en-US" altLang="ja-JP" sz="2600" dirty="0">
+                    <a:latin typeface="Calibri" panose="020F0502020204030204" pitchFamily="34" charset="0"/>
+                    <a:cs typeface="Calibri" panose="020F0502020204030204" pitchFamily="34" charset="0"/>
+                  </a:rPr>
+                  <a:t>”</a:t>
+                </a:r>
+              </a:p>
+              <a:p>
+                <a:pPr marL="0" indent="0">
+                  <a:buNone/>
+                </a:pPr>
+                <a:r>
+                  <a:rPr lang="ja-JP" altLang="en-US" sz="2600" dirty="0">
+                    <a:latin typeface="Calibri" panose="020F0502020204030204" pitchFamily="34" charset="0"/>
+                    <a:cs typeface="Calibri" panose="020F0502020204030204" pitchFamily="34" charset="0"/>
+                  </a:rPr>
+                  <a:t>→ </a:t>
+                </a:r>
+                <a:r>
+                  <a:rPr lang="en-US" altLang="ja-JP" sz="2600" dirty="0">
+                    <a:latin typeface="Calibri" panose="020F0502020204030204" pitchFamily="34" charset="0"/>
+                    <a:cs typeface="Calibri" panose="020F0502020204030204" pitchFamily="34" charset="0"/>
+                  </a:rPr>
+                  <a:t>Photon is like a </a:t>
+                </a:r>
+                <a:r>
+                  <a:rPr lang="en-US" altLang="ja-JP" sz="2600" b="1" dirty="0">
+                    <a:latin typeface="Calibri" panose="020F0502020204030204" pitchFamily="34" charset="0"/>
+                    <a:cs typeface="Calibri" panose="020F0502020204030204" pitchFamily="34" charset="0"/>
+                  </a:rPr>
+                  <a:t>probabilistic vertex </a:t>
+                </a:r>
+                <a:r>
+                  <a:rPr lang="en-US" altLang="ja-JP" sz="2600" dirty="0">
+                    <a:latin typeface="Calibri" panose="020F0502020204030204" pitchFamily="34" charset="0"/>
+                    <a:cs typeface="Calibri" panose="020F0502020204030204" pitchFamily="34" charset="0"/>
+                  </a:rPr>
+                  <a:t>in BPT, MIS candidates increase </a:t>
+                </a:r>
+                <a14:m>
+                  <m:oMath xmlns:m="http://schemas.openxmlformats.org/officeDocument/2006/math">
+                    <m:r>
+                      <m:rPr>
+                        <m:sty m:val="p"/>
+                      </m:rPr>
+                      <a:rPr lang="en-US" altLang="ja-JP" sz="2600" b="0" i="1" smtClean="0">
+                        <a:latin typeface="Cambria Math" panose="02040503050406030204" pitchFamily="18" charset="0"/>
+                        <a:cs typeface="Calibri" panose="020F0502020204030204" pitchFamily="34" charset="0"/>
+                      </a:rPr>
+                      <m:t>k</m:t>
+                    </m:r>
+                    <m:r>
+                      <a:rPr lang="en-US" altLang="ja-JP" sz="2600" b="0" i="1" smtClean="0">
+                        <a:latin typeface="Cambria Math" panose="02040503050406030204" pitchFamily="18" charset="0"/>
+                        <a:cs typeface="Calibri" panose="020F0502020204030204" pitchFamily="34" charset="0"/>
+                      </a:rPr>
+                      <m:t>+2</m:t>
+                    </m:r>
+                  </m:oMath>
+                </a14:m>
+                <a:r>
+                  <a:rPr lang="ja-JP" altLang="en-US" sz="2600" dirty="0">
+                    <a:latin typeface="Calibri" panose="020F0502020204030204" pitchFamily="34" charset="0"/>
+                    <a:cs typeface="Calibri" panose="020F0502020204030204" pitchFamily="34" charset="0"/>
+                  </a:rPr>
+                  <a:t> → </a:t>
+                </a:r>
+                <a14:m>
+                  <m:oMath xmlns:m="http://schemas.openxmlformats.org/officeDocument/2006/math">
+                    <m:r>
+                      <a:rPr lang="en-US" altLang="ja-JP" sz="2600" b="0" i="1" dirty="0" smtClean="0">
+                        <a:latin typeface="Cambria Math" panose="02040503050406030204" pitchFamily="18" charset="0"/>
+                        <a:cs typeface="Calibri" panose="020F0502020204030204" pitchFamily="34" charset="0"/>
+                      </a:rPr>
+                      <m:t>2</m:t>
+                    </m:r>
+                    <m:r>
+                      <m:rPr>
+                        <m:sty m:val="p"/>
+                      </m:rPr>
+                      <a:rPr lang="en-US" altLang="ja-JP" sz="2600" b="0" i="1" dirty="0" smtClean="0">
+                        <a:latin typeface="Cambria Math" panose="02040503050406030204" pitchFamily="18" charset="0"/>
+                        <a:cs typeface="Calibri" panose="020F0502020204030204" pitchFamily="34" charset="0"/>
+                      </a:rPr>
+                      <m:t>k</m:t>
+                    </m:r>
+                    <m:r>
+                      <a:rPr lang="en-US" altLang="ja-JP" sz="2600" b="0" i="1" dirty="0" smtClean="0">
+                        <a:latin typeface="Cambria Math" panose="02040503050406030204" pitchFamily="18" charset="0"/>
+                        <a:cs typeface="Calibri" panose="020F0502020204030204" pitchFamily="34" charset="0"/>
+                      </a:rPr>
+                      <m:t>+1</m:t>
+                    </m:r>
+                  </m:oMath>
+                </a14:m>
+                <a:endParaRPr lang="en-US" altLang="ja-JP" sz="2600" b="1" dirty="0">
+                  <a:latin typeface="Calibri" panose="020F0502020204030204" pitchFamily="34" charset="0"/>
+                  <a:cs typeface="Calibri" panose="020F0502020204030204" pitchFamily="34" charset="0"/>
+                </a:endParaRPr>
+              </a:p>
+            </p:txBody>
+          </p:sp>
+        </mc:Choice>
+        <mc:Fallback>
+          <p:sp>
+            <p:nvSpPr>
+              <p:cNvPr id="6" name="コンテンツ プレースホルダー 2">
+                <a:extLst>
+                  <a:ext uri="{FF2B5EF4-FFF2-40B4-BE49-F238E27FC236}">
+                    <a16:creationId xmlns:a16="http://schemas.microsoft.com/office/drawing/2014/main" id="{63B9AFB6-6E92-C014-B09C-F7E514232D9C}"/>
+                  </a:ext>
+                </a:extLst>
+              </p:cNvPr>
+              <p:cNvSpPr txBox="1">
+                <a:spLocks noRot="1" noChangeAspect="1" noMove="1" noResize="1" noEditPoints="1" noAdjustHandles="1" noChangeArrowheads="1" noChangeShapeType="1" noTextEdit="1"/>
+              </p:cNvSpPr>
+              <p:nvPr/>
+            </p:nvSpPr>
+            <p:spPr>
+              <a:xfrm>
+                <a:off x="138370" y="1430127"/>
+                <a:ext cx="11915260" cy="1589298"/>
+              </a:xfrm>
+              <a:prstGeom prst="rect">
+                <a:avLst/>
+              </a:prstGeom>
+              <a:blipFill>
+                <a:blip r:embed="rId2"/>
+                <a:stretch>
+                  <a:fillRect l="-921" t="-6154"/>
+                </a:stretch>
+              </a:blipFill>
+            </p:spPr>
+            <p:txBody>
+              <a:bodyPr/>
+              <a:lstStyle/>
+              <a:p>
+                <a:r>
+                  <a:rPr lang="ja-JP" altLang="en-US">
+                    <a:noFill/>
+                  </a:rPr>
+                  <a:t> </a:t>
+                </a:r>
+              </a:p>
+            </p:txBody>
+          </p:sp>
+        </mc:Fallback>
+      </mc:AlternateContent>
+      <p:pic>
+        <p:nvPicPr>
+          <p:cNvPr id="9" name="図 8">
+            <a:extLst>
+              <a:ext uri="{FF2B5EF4-FFF2-40B4-BE49-F238E27FC236}">
+                <a16:creationId xmlns:a16="http://schemas.microsoft.com/office/drawing/2014/main" id="{A3859A39-09E1-F858-2CA6-C0D771D29277}"/>
+              </a:ext>
+            </a:extLst>
+          </p:cNvPr>
+          <p:cNvPicPr>
+            <a:picLocks noChangeAspect="1"/>
+          </p:cNvPicPr>
           <p:nvPr/>
-        </p:nvSpPr>
+        </p:nvPicPr>
+        <p:blipFill>
+          <a:blip r:embed="rId3"/>
+          <a:stretch>
+            <a:fillRect/>
+          </a:stretch>
+        </p:blipFill>
         <p:spPr>
           <a:xfrm>
-            <a:off x="210065" y="1258677"/>
-            <a:ext cx="11771869" cy="5325421"/>
+            <a:off x="2721699" y="3258512"/>
+            <a:ext cx="6748602" cy="3210391"/>
           </a:xfrm>
           <a:prstGeom prst="rect">
             <a:avLst/>
           </a:prstGeom>
         </p:spPr>
+      </p:pic>
+      <mc:AlternateContent xmlns:mc="http://schemas.openxmlformats.org/markup-compatibility/2006">
+        <mc:Choice xmlns:a14="http://schemas.microsoft.com/office/drawing/2010/main" Requires="a14">
+          <p:sp>
+            <p:nvSpPr>
+              <p:cNvPr id="14" name="テキスト ボックス 13">
+                <a:extLst>
+                  <a:ext uri="{FF2B5EF4-FFF2-40B4-BE49-F238E27FC236}">
+                    <a16:creationId xmlns:a16="http://schemas.microsoft.com/office/drawing/2014/main" id="{23DEAFF6-63E2-9FD2-7BB3-8C81C9284C10}"/>
+                  </a:ext>
+                </a:extLst>
+              </p:cNvPr>
+              <p:cNvSpPr txBox="1"/>
+              <p:nvPr/>
+            </p:nvSpPr>
+            <p:spPr>
+              <a:xfrm>
+                <a:off x="3399233" y="2389364"/>
+                <a:ext cx="5393531" cy="830997"/>
+              </a:xfrm>
+              <a:prstGeom prst="rect">
+                <a:avLst/>
+              </a:prstGeom>
+              <a:noFill/>
+            </p:spPr>
+            <p:txBody>
+              <a:bodyPr wrap="square" rtlCol="0">
+                <a:spAutoFit/>
+              </a:bodyPr>
+              <a:lstStyle/>
+              <a:p>
+                <a:pPr algn="ctr"/>
+                <a14:m>
+                  <m:oMathPara xmlns:m="http://schemas.openxmlformats.org/officeDocument/2006/math">
+                    <m:oMathParaPr>
+                      <m:jc m:val="centerGroup"/>
+                    </m:oMathParaPr>
+                    <m:oMath xmlns:m="http://schemas.openxmlformats.org/officeDocument/2006/math">
+                      <m:sSub>
+                        <m:sSubPr>
+                          <m:ctrlPr>
+                            <a:rPr kumimoji="1" lang="en-US" altLang="ja-JP" sz="2400" b="0" i="1" smtClean="0">
+                              <a:latin typeface="Cambria Math" panose="02040503050406030204" pitchFamily="18" charset="0"/>
+                            </a:rPr>
+                          </m:ctrlPr>
+                        </m:sSubPr>
+                        <m:e>
+                          <m:r>
+                            <a:rPr kumimoji="1" lang="en-US" altLang="ja-JP" sz="2400" b="0" i="1" smtClean="0">
+                              <a:latin typeface="Cambria Math" panose="02040503050406030204" pitchFamily="18" charset="0"/>
+                            </a:rPr>
+                            <m:t>𝑝</m:t>
+                          </m:r>
+                        </m:e>
+                        <m:sub>
+                          <m:r>
+                            <m:rPr>
+                              <m:sty m:val="p"/>
+                            </m:rPr>
+                            <a:rPr kumimoji="1" lang="en-US" altLang="ja-JP" sz="2400" b="0" i="0" smtClean="0">
+                              <a:latin typeface="Cambria Math" panose="02040503050406030204" pitchFamily="18" charset="0"/>
+                            </a:rPr>
+                            <m:t>VM</m:t>
+                          </m:r>
+                        </m:sub>
+                      </m:sSub>
+                      <m:r>
+                        <a:rPr kumimoji="1" lang="en-US" altLang="ja-JP" sz="2400" b="0" i="1" smtClean="0">
+                          <a:latin typeface="Cambria Math" panose="02040503050406030204" pitchFamily="18" charset="0"/>
+                        </a:rPr>
+                        <m:t> ∼ </m:t>
+                      </m:r>
+                      <m:r>
+                        <m:rPr>
+                          <m:sty m:val="p"/>
+                        </m:rPr>
+                        <a:rPr kumimoji="1" lang="en-US" altLang="ja-JP" sz="2400" b="0" i="0" smtClean="0">
+                          <a:latin typeface="Cambria Math" panose="02040503050406030204" pitchFamily="18" charset="0"/>
+                        </a:rPr>
+                        <m:t>π</m:t>
+                      </m:r>
+                      <m:sSup>
+                        <m:sSupPr>
+                          <m:ctrlPr>
+                            <a:rPr kumimoji="1" lang="en-US" altLang="ja-JP" sz="2400" b="0" i="1" smtClean="0">
+                              <a:latin typeface="Cambria Math" panose="02040503050406030204" pitchFamily="18" charset="0"/>
+                            </a:rPr>
+                          </m:ctrlPr>
+                        </m:sSupPr>
+                        <m:e>
+                          <m:r>
+                            <a:rPr kumimoji="1" lang="en-US" altLang="ja-JP" sz="2400" b="0" i="1" smtClean="0">
+                              <a:latin typeface="Cambria Math" panose="02040503050406030204" pitchFamily="18" charset="0"/>
+                            </a:rPr>
+                            <m:t>𝑟</m:t>
+                          </m:r>
+                        </m:e>
+                        <m:sup>
+                          <m:r>
+                            <a:rPr kumimoji="1" lang="en-US" altLang="ja-JP" sz="2400" b="0" i="1" smtClean="0">
+                              <a:latin typeface="Cambria Math" panose="02040503050406030204" pitchFamily="18" charset="0"/>
+                            </a:rPr>
+                            <m:t>2</m:t>
+                          </m:r>
+                        </m:sup>
+                      </m:sSup>
+                      <m:r>
+                        <a:rPr kumimoji="1" lang="en-US" altLang="ja-JP" sz="2400" b="0" i="1" smtClean="0">
+                          <a:latin typeface="Cambria Math" panose="02040503050406030204" pitchFamily="18" charset="0"/>
+                        </a:rPr>
+                        <m:t>𝑝</m:t>
+                      </m:r>
+                      <m:r>
+                        <a:rPr kumimoji="1" lang="en-US" altLang="ja-JP" sz="2400" b="0" i="1" smtClean="0">
+                          <a:latin typeface="Cambria Math" panose="02040503050406030204" pitchFamily="18" charset="0"/>
+                        </a:rPr>
+                        <m:t>(</m:t>
+                      </m:r>
+                      <m:sSub>
+                        <m:sSubPr>
+                          <m:ctrlPr>
+                            <a:rPr kumimoji="1" lang="en-US" altLang="ja-JP" sz="2400" b="0" i="1" smtClean="0">
+                              <a:latin typeface="Cambria Math" panose="02040503050406030204" pitchFamily="18" charset="0"/>
+                            </a:rPr>
+                          </m:ctrlPr>
+                        </m:sSubPr>
+                        <m:e>
+                          <m:r>
+                            <m:rPr>
+                              <m:sty m:val="p"/>
+                            </m:rPr>
+                            <a:rPr kumimoji="1" lang="en-US" altLang="ja-JP" sz="2400" b="0" i="0" smtClean="0">
+                              <a:latin typeface="Cambria Math" panose="02040503050406030204" pitchFamily="18" charset="0"/>
+                            </a:rPr>
+                            <m:t>x</m:t>
+                          </m:r>
+                        </m:e>
+                        <m:sub>
+                          <m:r>
+                            <a:rPr kumimoji="1" lang="en-US" altLang="ja-JP" sz="2400" b="0" i="1" smtClean="0">
+                              <a:latin typeface="Cambria Math" panose="02040503050406030204" pitchFamily="18" charset="0"/>
+                            </a:rPr>
+                            <m:t>𝑠</m:t>
+                          </m:r>
+                          <m:r>
+                            <a:rPr kumimoji="1" lang="en-US" altLang="ja-JP" sz="2400" b="0" i="1" smtClean="0">
+                              <a:latin typeface="Cambria Math" panose="02040503050406030204" pitchFamily="18" charset="0"/>
+                            </a:rPr>
+                            <m:t>−1</m:t>
+                          </m:r>
+                        </m:sub>
+                      </m:sSub>
+                      <m:r>
+                        <a:rPr kumimoji="1" lang="en-US" altLang="ja-JP" sz="2400" b="0" i="1" smtClean="0">
+                          <a:latin typeface="Cambria Math" panose="02040503050406030204" pitchFamily="18" charset="0"/>
+                        </a:rPr>
+                        <m:t>→</m:t>
+                      </m:r>
+                      <m:sSubSup>
+                        <m:sSubSupPr>
+                          <m:ctrlPr>
+                            <a:rPr kumimoji="1" lang="en-US" altLang="ja-JP" sz="2400" b="0" i="1" smtClean="0">
+                              <a:latin typeface="Cambria Math" panose="02040503050406030204" pitchFamily="18" charset="0"/>
+                            </a:rPr>
+                          </m:ctrlPr>
+                        </m:sSubSupPr>
+                        <m:e>
+                          <m:r>
+                            <m:rPr>
+                              <m:sty m:val="p"/>
+                            </m:rPr>
+                            <a:rPr kumimoji="1" lang="en-US" altLang="ja-JP" sz="2400" b="0" i="0" smtClean="0">
+                              <a:latin typeface="Cambria Math" panose="02040503050406030204" pitchFamily="18" charset="0"/>
+                            </a:rPr>
+                            <m:t>x</m:t>
+                          </m:r>
+                        </m:e>
+                        <m:sub>
+                          <m:r>
+                            <a:rPr kumimoji="1" lang="en-US" altLang="ja-JP" sz="2400" b="0" i="1" smtClean="0">
+                              <a:latin typeface="Cambria Math" panose="02040503050406030204" pitchFamily="18" charset="0"/>
+                            </a:rPr>
+                            <m:t>𝑠</m:t>
+                          </m:r>
+                        </m:sub>
+                        <m:sup>
+                          <m:r>
+                            <a:rPr kumimoji="1" lang="en-US" altLang="ja-JP" sz="2400" b="0" i="1" smtClean="0">
+                              <a:latin typeface="Cambria Math" panose="02040503050406030204" pitchFamily="18" charset="0"/>
+                            </a:rPr>
+                            <m:t>∗</m:t>
+                          </m:r>
+                        </m:sup>
+                      </m:sSubSup>
+                      <m:r>
+                        <a:rPr kumimoji="1" lang="en-US" altLang="ja-JP" sz="2400" b="0" i="1" smtClean="0">
+                          <a:latin typeface="Cambria Math" panose="02040503050406030204" pitchFamily="18" charset="0"/>
+                        </a:rPr>
+                        <m:t>)</m:t>
+                      </m:r>
+                      <m:sSub>
+                        <m:sSubPr>
+                          <m:ctrlPr>
+                            <a:rPr kumimoji="1" lang="en-US" altLang="ja-JP" sz="2400" b="0" i="1" smtClean="0">
+                              <a:latin typeface="Cambria Math" panose="02040503050406030204" pitchFamily="18" charset="0"/>
+                            </a:rPr>
+                          </m:ctrlPr>
+                        </m:sSubPr>
+                        <m:e>
+                          <m:r>
+                            <a:rPr kumimoji="1" lang="en-US" altLang="ja-JP" sz="2400" b="0" i="1" smtClean="0">
+                              <a:latin typeface="Cambria Math" panose="02040503050406030204" pitchFamily="18" charset="0"/>
+                            </a:rPr>
+                            <m:t>𝑝</m:t>
+                          </m:r>
+                        </m:e>
+                        <m:sub>
+                          <m:r>
+                            <m:rPr>
+                              <m:sty m:val="p"/>
+                            </m:rPr>
+                            <a:rPr kumimoji="1" lang="en-US" altLang="ja-JP" sz="2400" b="0" i="0" smtClean="0">
+                              <a:latin typeface="Cambria Math" panose="02040503050406030204" pitchFamily="18" charset="0"/>
+                            </a:rPr>
+                            <m:t>VC</m:t>
+                          </m:r>
+                        </m:sub>
+                      </m:sSub>
+                    </m:oMath>
+                  </m:oMathPara>
+                </a14:m>
+                <a:endParaRPr kumimoji="1" lang="en-US" altLang="ja-JP" sz="2400" i="1" dirty="0"/>
+              </a:p>
+              <a:p>
+                <a:pPr algn="ctr"/>
+                <a:r>
+                  <a:rPr kumimoji="1" lang="en-US" altLang="ja-JP" sz="2400" dirty="0">
+                    <a:latin typeface="Calibri" panose="020F0502020204030204" pitchFamily="34" charset="0"/>
+                    <a:ea typeface="Calibri" panose="020F0502020204030204" pitchFamily="34" charset="0"/>
+                    <a:cs typeface="Calibri" panose="020F0502020204030204" pitchFamily="34" charset="0"/>
+                  </a:rPr>
+                  <a:t>Vertex merging’s pdf (</a:t>
+                </a:r>
+                <a14:m>
+                  <m:oMath xmlns:m="http://schemas.openxmlformats.org/officeDocument/2006/math">
+                    <m:sSub>
+                      <m:sSubPr>
+                        <m:ctrlPr>
+                          <a:rPr lang="en-US" altLang="ja-JP" sz="2400" i="1">
+                            <a:latin typeface="Cambria Math" panose="02040503050406030204" pitchFamily="18" charset="0"/>
+                          </a:rPr>
+                        </m:ctrlPr>
+                      </m:sSubPr>
+                      <m:e>
+                        <m:r>
+                          <a:rPr lang="en-US" altLang="ja-JP" sz="2400" i="1">
+                            <a:latin typeface="Cambria Math" panose="02040503050406030204" pitchFamily="18" charset="0"/>
+                          </a:rPr>
+                          <m:t>𝑝</m:t>
+                        </m:r>
+                      </m:e>
+                      <m:sub>
+                        <m:r>
+                          <m:rPr>
+                            <m:sty m:val="p"/>
+                          </m:rPr>
+                          <a:rPr lang="en-US" altLang="ja-JP" sz="2400">
+                            <a:latin typeface="Cambria Math" panose="02040503050406030204" pitchFamily="18" charset="0"/>
+                          </a:rPr>
+                          <m:t>VC</m:t>
+                        </m:r>
+                      </m:sub>
+                    </m:sSub>
+                  </m:oMath>
+                </a14:m>
+                <a:r>
+                  <a:rPr kumimoji="1" lang="en-US" altLang="ja-JP" sz="2400" dirty="0">
+                    <a:latin typeface="Calibri" panose="020F0502020204030204" pitchFamily="34" charset="0"/>
+                    <a:cs typeface="Calibri" panose="020F0502020204030204" pitchFamily="34" charset="0"/>
+                  </a:rPr>
+                  <a:t>: BPT’s pdf)</a:t>
+                </a:r>
+                <a:endParaRPr kumimoji="1" lang="ja-JP" altLang="en-US" sz="2400" dirty="0">
+                  <a:latin typeface="Calibri" panose="020F0502020204030204" pitchFamily="34" charset="0"/>
+                  <a:cs typeface="Calibri" panose="020F0502020204030204" pitchFamily="34" charset="0"/>
+                </a:endParaRPr>
+              </a:p>
+            </p:txBody>
+          </p:sp>
+        </mc:Choice>
+        <mc:Fallback>
+          <p:sp>
+            <p:nvSpPr>
+              <p:cNvPr id="14" name="テキスト ボックス 13">
+                <a:extLst>
+                  <a:ext uri="{FF2B5EF4-FFF2-40B4-BE49-F238E27FC236}">
+                    <a16:creationId xmlns:a16="http://schemas.microsoft.com/office/drawing/2014/main" id="{23DEAFF6-63E2-9FD2-7BB3-8C81C9284C10}"/>
+                  </a:ext>
+                </a:extLst>
+              </p:cNvPr>
+              <p:cNvSpPr txBox="1">
+                <a:spLocks noRot="1" noChangeAspect="1" noMove="1" noResize="1" noEditPoints="1" noAdjustHandles="1" noChangeArrowheads="1" noChangeShapeType="1" noTextEdit="1"/>
+              </p:cNvSpPr>
+              <p:nvPr/>
+            </p:nvSpPr>
+            <p:spPr>
+              <a:xfrm>
+                <a:off x="3399233" y="2389364"/>
+                <a:ext cx="5393531" cy="830997"/>
+              </a:xfrm>
+              <a:prstGeom prst="rect">
+                <a:avLst/>
+              </a:prstGeom>
+              <a:blipFill>
+                <a:blip r:embed="rId4"/>
+                <a:stretch>
+                  <a:fillRect b="-16176"/>
+                </a:stretch>
+              </a:blipFill>
+            </p:spPr>
+            <p:txBody>
+              <a:bodyPr/>
+              <a:lstStyle/>
+              <a:p>
+                <a:r>
+                  <a:rPr lang="ja-JP" altLang="en-US">
+                    <a:noFill/>
+                  </a:rPr>
+                  <a:t> </a:t>
+                </a:r>
+              </a:p>
+            </p:txBody>
+          </p:sp>
+        </mc:Fallback>
+      </mc:AlternateContent>
+      <p:pic>
+        <p:nvPicPr>
+          <p:cNvPr id="15" name="Picture 10" descr="Illustration of photon mapping. (a) Light sources send out energy as photons; (b) a density estimation is used to estimate the energy per surface area. ">
+            <a:extLst>
+              <a:ext uri="{FF2B5EF4-FFF2-40B4-BE49-F238E27FC236}">
+                <a16:creationId xmlns:a16="http://schemas.microsoft.com/office/drawing/2014/main" id="{47F690B2-E46B-CF6C-6817-C27795610B94}"/>
+              </a:ext>
+            </a:extLst>
+          </p:cNvPr>
+          <p:cNvPicPr>
+            <a:picLocks noChangeAspect="1" noChangeArrowheads="1"/>
+          </p:cNvPicPr>
+          <p:nvPr/>
+        </p:nvPicPr>
+        <p:blipFill rotWithShape="1">
+          <a:blip r:embed="rId5">
+            <a:extLst>
+              <a:ext uri="{28A0092B-C50C-407E-A947-70E740481C1C}">
+                <a14:useLocalDpi xmlns:a14="http://schemas.microsoft.com/office/drawing/2010/main" val="0"/>
+              </a:ext>
+            </a:extLst>
+          </a:blip>
+          <a:srcRect t="52902"/>
+          <a:stretch>
+            <a:fillRect/>
+          </a:stretch>
+        </p:blipFill>
+        <p:spPr bwMode="auto">
+          <a:xfrm>
+            <a:off x="9758479" y="2389364"/>
+            <a:ext cx="1573875" cy="983497"/>
+          </a:xfrm>
+          <a:prstGeom prst="rect">
+            <a:avLst/>
+          </a:prstGeom>
+          <a:noFill/>
+          <a:extLst>
+            <a:ext uri="{909E8E84-426E-40DD-AFC4-6F175D3DCCD1}">
+              <a14:hiddenFill xmlns:a14="http://schemas.microsoft.com/office/drawing/2010/main">
+                <a:solidFill>
+                  <a:srgbClr val="FFFFFF"/>
+                </a:solidFill>
+              </a14:hiddenFill>
+            </a:ext>
+          </a:extLst>
+        </p:spPr>
+      </p:pic>
+      <mc:AlternateContent xmlns:mc="http://schemas.openxmlformats.org/markup-compatibility/2006">
+        <mc:Choice xmlns:a14="http://schemas.microsoft.com/office/drawing/2010/main" Requires="a14">
+          <p:sp>
+            <p:nvSpPr>
+              <p:cNvPr id="16" name="テキスト ボックス 15">
+                <a:extLst>
+                  <a:ext uri="{FF2B5EF4-FFF2-40B4-BE49-F238E27FC236}">
+                    <a16:creationId xmlns:a16="http://schemas.microsoft.com/office/drawing/2014/main" id="{57B377E4-A527-5860-3BA6-CABA27FBEA4F}"/>
+                  </a:ext>
+                </a:extLst>
+              </p:cNvPr>
+              <p:cNvSpPr txBox="1"/>
+              <p:nvPr/>
+            </p:nvSpPr>
+            <p:spPr>
+              <a:xfrm>
+                <a:off x="9871213" y="3516997"/>
+                <a:ext cx="2182416" cy="461665"/>
+              </a:xfrm>
+              <a:prstGeom prst="rect">
+                <a:avLst/>
+              </a:prstGeom>
+              <a:noFill/>
+            </p:spPr>
+            <p:txBody>
+              <a:bodyPr wrap="square" rtlCol="0">
+                <a:spAutoFit/>
+              </a:bodyPr>
+              <a:lstStyle/>
+              <a:p>
+                <a:pPr algn="ctr"/>
+                <a:r>
+                  <a:rPr kumimoji="1" lang="en-US" altLang="ja-JP" sz="2400" dirty="0">
+                    <a:latin typeface="Calibri" panose="020F0502020204030204" pitchFamily="34" charset="0"/>
+                    <a:cs typeface="Calibri" panose="020F0502020204030204" pitchFamily="34" charset="0"/>
+                  </a:rPr>
+                  <a:t>Search radius: </a:t>
+                </a:r>
+                <a14:m>
+                  <m:oMath xmlns:m="http://schemas.openxmlformats.org/officeDocument/2006/math">
+                    <m:r>
+                      <m:rPr>
+                        <m:sty m:val="p"/>
+                      </m:rPr>
+                      <a:rPr kumimoji="1" lang="en-US" altLang="ja-JP" sz="2400" b="0" i="1" smtClean="0">
+                        <a:latin typeface="Cambria Math" panose="02040503050406030204" pitchFamily="18" charset="0"/>
+                        <a:cs typeface="Calibri" panose="020F0502020204030204" pitchFamily="34" charset="0"/>
+                      </a:rPr>
+                      <m:t>r</m:t>
+                    </m:r>
+                  </m:oMath>
+                </a14:m>
+                <a:endParaRPr kumimoji="1" lang="ja-JP" altLang="en-US" sz="2400" dirty="0">
+                  <a:latin typeface="Calibri" panose="020F0502020204030204" pitchFamily="34" charset="0"/>
+                  <a:cs typeface="Calibri" panose="020F0502020204030204" pitchFamily="34" charset="0"/>
+                </a:endParaRPr>
+              </a:p>
+            </p:txBody>
+          </p:sp>
+        </mc:Choice>
+        <mc:Fallback>
+          <p:sp>
+            <p:nvSpPr>
+              <p:cNvPr id="16" name="テキスト ボックス 15">
+                <a:extLst>
+                  <a:ext uri="{FF2B5EF4-FFF2-40B4-BE49-F238E27FC236}">
+                    <a16:creationId xmlns:a16="http://schemas.microsoft.com/office/drawing/2014/main" id="{57B377E4-A527-5860-3BA6-CABA27FBEA4F}"/>
+                  </a:ext>
+                </a:extLst>
+              </p:cNvPr>
+              <p:cNvSpPr txBox="1">
+                <a:spLocks noRot="1" noChangeAspect="1" noMove="1" noResize="1" noEditPoints="1" noAdjustHandles="1" noChangeArrowheads="1" noChangeShapeType="1" noTextEdit="1"/>
+              </p:cNvSpPr>
+              <p:nvPr/>
+            </p:nvSpPr>
+            <p:spPr>
+              <a:xfrm>
+                <a:off x="9871213" y="3516997"/>
+                <a:ext cx="2182416" cy="461665"/>
+              </a:xfrm>
+              <a:prstGeom prst="rect">
+                <a:avLst/>
+              </a:prstGeom>
+              <a:blipFill>
+                <a:blip r:embed="rId6"/>
+                <a:stretch>
+                  <a:fillRect l="-2793" t="-10526" b="-28947"/>
+                </a:stretch>
+              </a:blipFill>
+            </p:spPr>
+            <p:txBody>
+              <a:bodyPr/>
+              <a:lstStyle/>
+              <a:p>
+                <a:r>
+                  <a:rPr lang="ja-JP" altLang="en-US">
+                    <a:noFill/>
+                  </a:rPr>
+                  <a:t> </a:t>
+                </a:r>
+              </a:p>
+            </p:txBody>
+          </p:sp>
+        </mc:Fallback>
+      </mc:AlternateContent>
+      <p:cxnSp>
+        <p:nvCxnSpPr>
+          <p:cNvPr id="18" name="直線矢印コネクタ 17">
+            <a:extLst>
+              <a:ext uri="{FF2B5EF4-FFF2-40B4-BE49-F238E27FC236}">
+                <a16:creationId xmlns:a16="http://schemas.microsoft.com/office/drawing/2014/main" id="{752B43C9-0483-5A38-F34C-30B257AC0F3B}"/>
+              </a:ext>
+            </a:extLst>
+          </p:cNvPr>
+          <p:cNvCxnSpPr>
+            <a:cxnSpLocks/>
+            <a:stCxn id="16" idx="0"/>
+          </p:cNvCxnSpPr>
+          <p:nvPr/>
+        </p:nvCxnSpPr>
+        <p:spPr>
+          <a:xfrm flipH="1" flipV="1">
+            <a:off x="10858500" y="3158673"/>
+            <a:ext cx="103921" cy="358324"/>
+          </a:xfrm>
+          <a:prstGeom prst="straightConnector1">
+            <a:avLst/>
+          </a:prstGeom>
+          <a:ln>
+            <a:tailEnd type="triangle"/>
+          </a:ln>
+        </p:spPr>
+        <p:style>
+          <a:lnRef idx="2">
+            <a:schemeClr val="dk1"/>
+          </a:lnRef>
+          <a:fillRef idx="0">
+            <a:schemeClr val="dk1"/>
+          </a:fillRef>
+          <a:effectRef idx="1">
+            <a:schemeClr val="dk1"/>
+          </a:effectRef>
+          <a:fontRef idx="minor">
+            <a:schemeClr val="tx1"/>
+          </a:fontRef>
+        </p:style>
+      </p:cxnSp>
+      <p:sp>
+        <p:nvSpPr>
+          <p:cNvPr id="21" name="テキスト ボックス 20">
+            <a:extLst>
+              <a:ext uri="{FF2B5EF4-FFF2-40B4-BE49-F238E27FC236}">
+                <a16:creationId xmlns:a16="http://schemas.microsoft.com/office/drawing/2014/main" id="{86A71283-C46E-C6A9-3673-7E7249EAC418}"/>
+              </a:ext>
+            </a:extLst>
+          </p:cNvPr>
+          <p:cNvSpPr txBox="1"/>
+          <p:nvPr/>
+        </p:nvSpPr>
+        <p:spPr>
+          <a:xfrm>
+            <a:off x="989287" y="6385272"/>
+            <a:ext cx="10213424" cy="369332"/>
+          </a:xfrm>
+          <a:prstGeom prst="rect">
+            <a:avLst/>
+          </a:prstGeom>
+          <a:noFill/>
+        </p:spPr>
+        <p:txBody>
+          <a:bodyPr wrap="square">
+            <a:spAutoFit/>
+          </a:bodyPr>
+          <a:lstStyle/>
+          <a:p>
+            <a:pPr algn="ctr"/>
+            <a:r>
+              <a:rPr lang="ja-JP" altLang="en-US" dirty="0">
+                <a:latin typeface="Calibri" panose="020F0502020204030204" pitchFamily="34" charset="0"/>
+                <a:cs typeface="Calibri" panose="020F0502020204030204" pitchFamily="34" charset="0"/>
+              </a:rPr>
+              <a:t>Comparison with (a): Standard path tracing,  (b): Vertex connection only (BPT), (c): vertex merging</a:t>
+            </a:r>
+          </a:p>
+        </p:txBody>
+      </p:sp>
+    </p:spTree>
+    <p:extLst>
+      <p:ext uri="{BB962C8B-B14F-4D97-AF65-F5344CB8AC3E}">
+        <p14:creationId xmlns:p14="http://schemas.microsoft.com/office/powerpoint/2010/main" val="1514167130"/>
+      </p:ext>
+    </p:extLst>
+  </p:cSld>
+  <p:clrMapOvr>
+    <a:masterClrMapping/>
+  </p:clrMapOvr>
+</p:sld>
+</file>
+
+<file path=ppt/slides/slide9.xml><?xml version="1.0" encoding="utf-8"?>
+<p:sld xmlns:a="http://schemas.openxmlformats.org/drawingml/2006/main" xmlns:r="http://schemas.openxmlformats.org/officeDocument/2006/relationships" xmlns:p="http://schemas.openxmlformats.org/presentationml/2006/main">
+  <p:cSld>
+    <p:spTree>
+      <p:nvGrpSpPr>
+        <p:cNvPr id="1" name="">
+          <a:extLst>
+            <a:ext uri="{FF2B5EF4-FFF2-40B4-BE49-F238E27FC236}">
+              <a16:creationId xmlns:a16="http://schemas.microsoft.com/office/drawing/2014/main" id="{B55D7FCB-3FCE-5C36-DE6F-D61965800010}"/>
+            </a:ext>
+          </a:extLst>
+        </p:cNvPr>
+        <p:cNvGrpSpPr/>
+        <p:nvPr/>
+      </p:nvGrpSpPr>
+      <p:grpSpPr>
+        <a:xfrm>
+          <a:off x="0" y="0"/>
+          <a:ext cx="0" cy="0"/>
+          <a:chOff x="0" y="0"/>
+          <a:chExt cx="0" cy="0"/>
+        </a:xfrm>
+      </p:grpSpPr>
+      <p:sp>
+        <p:nvSpPr>
+          <p:cNvPr id="2" name="タイトル 1">
+            <a:extLst>
+              <a:ext uri="{FF2B5EF4-FFF2-40B4-BE49-F238E27FC236}">
+                <a16:creationId xmlns:a16="http://schemas.microsoft.com/office/drawing/2014/main" id="{87DBA632-E34A-E71A-41E3-4D9056307A74}"/>
+              </a:ext>
+            </a:extLst>
+          </p:cNvPr>
+          <p:cNvSpPr>
+            <a:spLocks noGrp="1"/>
+          </p:cNvSpPr>
+          <p:nvPr>
+            <p:ph type="title"/>
+          </p:nvPr>
+        </p:nvSpPr>
+        <p:spPr/>
+        <p:txBody>
+          <a:bodyPr>
+            <a:normAutofit/>
+          </a:bodyPr>
+          <a:lstStyle/>
+          <a:p>
+            <a:r>
+              <a:rPr lang="en-US" altLang="ja-JP" dirty="0"/>
+              <a:t>Algorithm </a:t>
+            </a:r>
+            <a:endParaRPr kumimoji="1" lang="ja-JP" altLang="en-US" dirty="0"/>
+          </a:p>
+        </p:txBody>
+      </p:sp>
+      <p:sp>
+        <p:nvSpPr>
+          <p:cNvPr id="4" name="スライド番号プレースホルダー 3">
+            <a:extLst>
+              <a:ext uri="{FF2B5EF4-FFF2-40B4-BE49-F238E27FC236}">
+                <a16:creationId xmlns:a16="http://schemas.microsoft.com/office/drawing/2014/main" id="{B28A8B4E-6E78-56DB-3B9F-C0BEEEE7C778}"/>
+              </a:ext>
+            </a:extLst>
+          </p:cNvPr>
+          <p:cNvSpPr>
+            <a:spLocks noGrp="1"/>
+          </p:cNvSpPr>
+          <p:nvPr>
+            <p:ph type="sldNum" sz="quarter" idx="12"/>
+          </p:nvPr>
+        </p:nvSpPr>
+        <p:spPr/>
+        <p:txBody>
+          <a:bodyPr/>
+          <a:lstStyle/>
+          <a:p>
+            <a:fld id="{05A07A33-D779-4A79-A49C-E26576C728D8}" type="slidenum">
+              <a:rPr lang="ja-JP" altLang="en-US" smtClean="0"/>
+              <a:pPr/>
+              <a:t>9</a:t>
+            </a:fld>
+            <a:endParaRPr lang="ja-JP" altLang="en-US" dirty="0">
+              <a:latin typeface="Calibri" panose="020F0502020204030204" pitchFamily="34" charset="0"/>
+              <a:cs typeface="Calibri" panose="020F0502020204030204" pitchFamily="34" charset="0"/>
+            </a:endParaRPr>
+          </a:p>
+        </p:txBody>
+      </p:sp>
+      <p:sp>
+        <p:nvSpPr>
+          <p:cNvPr id="6" name="コンテンツ プレースホルダー 2">
+            <a:extLst>
+              <a:ext uri="{FF2B5EF4-FFF2-40B4-BE49-F238E27FC236}">
+                <a16:creationId xmlns:a16="http://schemas.microsoft.com/office/drawing/2014/main" id="{7C60DF56-7A48-5435-D79C-4917AF501723}"/>
+              </a:ext>
+            </a:extLst>
+          </p:cNvPr>
+          <p:cNvSpPr txBox="1">
+            <a:spLocks/>
+          </p:cNvSpPr>
+          <p:nvPr/>
+        </p:nvSpPr>
+        <p:spPr>
+          <a:xfrm>
+            <a:off x="364434" y="1430127"/>
+            <a:ext cx="6626915" cy="5228426"/>
+          </a:xfrm>
+          <a:prstGeom prst="rect">
+            <a:avLst/>
+          </a:prstGeom>
+        </p:spPr>
         <p:txBody>
           <a:bodyPr vert="horz" lIns="91440" tIns="45720" rIns="91440" bIns="45720" rtlCol="0">
-            <a:normAutofit/>
+            <a:normAutofit lnSpcReduction="10000"/>
           </a:bodyPr>
           <a:lstStyle>
             <a:lvl1pPr marL="228600" indent="-228600" algn="l" defTabSz="914400" rtl="0" eaLnBrk="1" latinLnBrk="0" hangingPunct="1">
@@ -11931,22 +16898,21 @@
                 <a:latin typeface="Calibri" panose="020F0502020204030204" pitchFamily="34" charset="0"/>
                 <a:cs typeface="Calibri" panose="020F0502020204030204" pitchFamily="34" charset="0"/>
               </a:rPr>
-              <a:t>[1]: </a:t>
-            </a:r>
-            <a:r>
-              <a:rPr lang="en-US" altLang="ja-JP" sz="2600" dirty="0">
+              <a:t>Stage1: </a:t>
+            </a:r>
+            <a:r>
+              <a:rPr lang="en-US" altLang="ja-JP" sz="2600" b="1" dirty="0">
                 <a:latin typeface="Calibri" panose="020F0502020204030204" pitchFamily="34" charset="0"/>
                 <a:cs typeface="Calibri" panose="020F0502020204030204" pitchFamily="34" charset="0"/>
-                <a:hlinkClick r:id="rId2"/>
               </a:rPr>
-              <a:t>https://www.semanticscholar.org/paper/Bidirectional-Path-Tracing-Vlnas/c9662ee171e68a08600203e975b4c04c770c2598</a:t>
+              <a:t>Light path </a:t>
             </a:r>
             <a:r>
               <a:rPr lang="en-US" altLang="ja-JP" sz="2600" dirty="0">
                 <a:latin typeface="Calibri" panose="020F0502020204030204" pitchFamily="34" charset="0"/>
                 <a:cs typeface="Calibri" panose="020F0502020204030204" pitchFamily="34" charset="0"/>
               </a:rPr>
-              <a:t> </a:t>
+              <a:t>sampling</a:t>
             </a:r>
           </a:p>
           <a:p>
@@ -11958,42 +16924,268 @@
                 <a:latin typeface="Calibri" panose="020F0502020204030204" pitchFamily="34" charset="0"/>
                 <a:cs typeface="Calibri" panose="020F0502020204030204" pitchFamily="34" charset="0"/>
               </a:rPr>
-              <a:t>[2]: </a:t>
-            </a:r>
-            <a:r>
-              <a:rPr lang="en-US" altLang="ja-JP" sz="2600" dirty="0">
+              <a:t>Random path sampling from a light source</a:t>
+            </a:r>
+          </a:p>
+          <a:p>
+            <a:pPr marL="0" indent="0">
+              <a:buNone/>
+            </a:pPr>
+            <a:r>
+              <a:rPr lang="ja-JP" altLang="en-US" sz="2600" dirty="0">
                 <a:latin typeface="Calibri" panose="020F0502020204030204" pitchFamily="34" charset="0"/>
                 <a:cs typeface="Calibri" panose="020F0502020204030204" pitchFamily="34" charset="0"/>
-                <a:hlinkClick r:id="rId3"/>
               </a:rPr>
-              <a:t>https://www.researchgate.net/figure/llustration-of-photon-mapping-a-Light-sources-send-out-energy-as-photons-b-a_fig7_317224001</a:t>
+              <a:t>→ </a:t>
+            </a:r>
+            <a:r>
+              <a:rPr lang="en-US" altLang="ja-JP" sz="2600" b="1" dirty="0">
+                <a:latin typeface="Calibri" panose="020F0502020204030204" pitchFamily="34" charset="0"/>
+                <a:cs typeface="Calibri" panose="020F0502020204030204" pitchFamily="34" charset="0"/>
+              </a:rPr>
+              <a:t>Save</a:t>
             </a:r>
             <a:r>
               <a:rPr lang="en-US" altLang="ja-JP" sz="2600" dirty="0">
                 <a:latin typeface="Calibri" panose="020F0502020204030204" pitchFamily="34" charset="0"/>
                 <a:cs typeface="Calibri" panose="020F0502020204030204" pitchFamily="34" charset="0"/>
               </a:rPr>
-              <a:t>  [accessed 21 Mar 2026]</a:t>
-            </a:r>
-          </a:p>
-          <a:p>
-            <a:pPr marL="0" indent="0">
-              <a:buNone/>
-            </a:pPr>
-            <a:r>
+              <a:t> the obtained vertices</a:t>
+            </a:r>
+            <a:br>
               <a:rPr lang="en-US" altLang="ja-JP" sz="2600" dirty="0">
                 <a:latin typeface="Calibri" panose="020F0502020204030204" pitchFamily="34" charset="0"/>
                 <a:cs typeface="Calibri" panose="020F0502020204030204" pitchFamily="34" charset="0"/>
               </a:rPr>
-              <a:t>[3]:</a:t>
-            </a:r>
-          </a:p>
-        </p:txBody>
-      </p:sp>
+            </a:br>
+            <a:r>
+              <a:rPr lang="en-US" altLang="ja-JP" sz="2600" dirty="0">
+                <a:latin typeface="Calibri" panose="020F0502020204030204" pitchFamily="34" charset="0"/>
+                <a:cs typeface="Calibri" panose="020F0502020204030204" pitchFamily="34" charset="0"/>
+              </a:rPr>
+              <a:t>     to range search structure (like photon map)</a:t>
+            </a:r>
+          </a:p>
+          <a:p>
+            <a:pPr marL="0" indent="0">
+              <a:buNone/>
+            </a:pPr>
+            <a:endParaRPr lang="en-US" altLang="ja-JP" sz="2600" dirty="0">
+              <a:latin typeface="Calibri" panose="020F0502020204030204" pitchFamily="34" charset="0"/>
+              <a:cs typeface="Calibri" panose="020F0502020204030204" pitchFamily="34" charset="0"/>
+            </a:endParaRPr>
+          </a:p>
+          <a:p>
+            <a:pPr marL="0" indent="0">
+              <a:buNone/>
+            </a:pPr>
+            <a:r>
+              <a:rPr lang="en-US" altLang="ja-JP" sz="2600" dirty="0">
+                <a:latin typeface="Calibri" panose="020F0502020204030204" pitchFamily="34" charset="0"/>
+                <a:cs typeface="Calibri" panose="020F0502020204030204" pitchFamily="34" charset="0"/>
+              </a:rPr>
+              <a:t>Stage 2: </a:t>
+            </a:r>
+            <a:r>
+              <a:rPr lang="en-US" altLang="ja-JP" sz="2600" b="1" dirty="0">
+                <a:latin typeface="Calibri" panose="020F0502020204030204" pitchFamily="34" charset="0"/>
+                <a:cs typeface="Calibri" panose="020F0502020204030204" pitchFamily="34" charset="0"/>
+              </a:rPr>
+              <a:t>Eye path </a:t>
+            </a:r>
+            <a:r>
+              <a:rPr lang="en-US" altLang="ja-JP" sz="2600" dirty="0">
+                <a:latin typeface="Calibri" panose="020F0502020204030204" pitchFamily="34" charset="0"/>
+                <a:cs typeface="Calibri" panose="020F0502020204030204" pitchFamily="34" charset="0"/>
+              </a:rPr>
+              <a:t>sampling and integration</a:t>
+            </a:r>
+          </a:p>
+          <a:p>
+            <a:pPr marL="0" indent="0">
+              <a:buNone/>
+            </a:pPr>
+            <a:r>
+              <a:rPr lang="en-US" altLang="ja-JP" sz="2600" u="sng" dirty="0">
+                <a:latin typeface="Calibri" panose="020F0502020204030204" pitchFamily="34" charset="0"/>
+                <a:cs typeface="Calibri" panose="020F0502020204030204" pitchFamily="34" charset="0"/>
+              </a:rPr>
+              <a:t>US</a:t>
+            </a:r>
+            <a:r>
+              <a:rPr lang="en-US" altLang="ja-JP" sz="2600" dirty="0">
+                <a:latin typeface="Calibri" panose="020F0502020204030204" pitchFamily="34" charset="0"/>
+                <a:cs typeface="Calibri" panose="020F0502020204030204" pitchFamily="34" charset="0"/>
+              </a:rPr>
+              <a:t>:  Direct contribution from the light source </a:t>
+            </a:r>
+          </a:p>
+          <a:p>
+            <a:pPr marL="0" indent="0">
+              <a:buNone/>
+            </a:pPr>
+            <a:r>
+              <a:rPr lang="en-US" altLang="ja-JP" sz="2600" u="sng" dirty="0">
+                <a:latin typeface="Calibri" panose="020F0502020204030204" pitchFamily="34" charset="0"/>
+                <a:cs typeface="Calibri" panose="020F0502020204030204" pitchFamily="34" charset="0"/>
+              </a:rPr>
+              <a:t>VC</a:t>
+            </a:r>
+            <a:r>
+              <a:rPr lang="en-US" altLang="ja-JP" sz="2600" dirty="0">
+                <a:latin typeface="Calibri" panose="020F0502020204030204" pitchFamily="34" charset="0"/>
+                <a:cs typeface="Calibri" panose="020F0502020204030204" pitchFamily="34" charset="0"/>
+              </a:rPr>
+              <a:t>:  </a:t>
+            </a:r>
+            <a:r>
+              <a:rPr lang="en-US" altLang="ja-JP" sz="2600" b="1" dirty="0">
+                <a:latin typeface="Calibri" panose="020F0502020204030204" pitchFamily="34" charset="0"/>
+                <a:cs typeface="Calibri" panose="020F0502020204030204" pitchFamily="34" charset="0"/>
+              </a:rPr>
+              <a:t>Connect</a:t>
+            </a:r>
+            <a:r>
+              <a:rPr lang="en-US" altLang="ja-JP" sz="2600" dirty="0">
+                <a:latin typeface="Calibri" panose="020F0502020204030204" pitchFamily="34" charset="0"/>
+                <a:cs typeface="Calibri" panose="020F0502020204030204" pitchFamily="34" charset="0"/>
+              </a:rPr>
+              <a:t> each vertex of the light path </a:t>
+            </a:r>
+            <a:br>
+              <a:rPr lang="en-US" altLang="ja-JP" sz="2600" dirty="0">
+                <a:latin typeface="Calibri" panose="020F0502020204030204" pitchFamily="34" charset="0"/>
+                <a:cs typeface="Calibri" panose="020F0502020204030204" pitchFamily="34" charset="0"/>
+              </a:rPr>
+            </a:br>
+            <a:r>
+              <a:rPr lang="en-US" altLang="ja-JP" sz="2600" dirty="0">
+                <a:latin typeface="Calibri" panose="020F0502020204030204" pitchFamily="34" charset="0"/>
+                <a:cs typeface="Calibri" panose="020F0502020204030204" pitchFamily="34" charset="0"/>
+              </a:rPr>
+              <a:t>        to the current vertex (BPT)</a:t>
+            </a:r>
+          </a:p>
+          <a:p>
+            <a:pPr marL="0" indent="0">
+              <a:buNone/>
+            </a:pPr>
+            <a:r>
+              <a:rPr lang="en-US" altLang="ja-JP" sz="2600" u="sng" dirty="0">
+                <a:latin typeface="Calibri" panose="020F0502020204030204" pitchFamily="34" charset="0"/>
+                <a:cs typeface="Calibri" panose="020F0502020204030204" pitchFamily="34" charset="0"/>
+              </a:rPr>
+              <a:t>VM</a:t>
+            </a:r>
+            <a:r>
+              <a:rPr lang="en-US" altLang="ja-JP" sz="2600" dirty="0">
+                <a:latin typeface="Calibri" panose="020F0502020204030204" pitchFamily="34" charset="0"/>
+                <a:cs typeface="Calibri" panose="020F0502020204030204" pitchFamily="34" charset="0"/>
+              </a:rPr>
+              <a:t>: </a:t>
+            </a:r>
+            <a:r>
+              <a:rPr lang="en-US" altLang="ja-JP" sz="2600" b="1" dirty="0">
+                <a:latin typeface="Calibri" panose="020F0502020204030204" pitchFamily="34" charset="0"/>
+                <a:cs typeface="Calibri" panose="020F0502020204030204" pitchFamily="34" charset="0"/>
+              </a:rPr>
+              <a:t>Merge</a:t>
+            </a:r>
+            <a:r>
+              <a:rPr lang="en-US" altLang="ja-JP" sz="2600" dirty="0">
+                <a:latin typeface="Calibri" panose="020F0502020204030204" pitchFamily="34" charset="0"/>
+                <a:cs typeface="Calibri" panose="020F0502020204030204" pitchFamily="34" charset="0"/>
+              </a:rPr>
+              <a:t> the saved light vertices with </a:t>
+            </a:r>
+          </a:p>
+          <a:p>
+            <a:pPr marL="0" indent="0">
+              <a:buNone/>
+            </a:pPr>
+            <a:r>
+              <a:rPr lang="en-US" altLang="ja-JP" sz="2600" dirty="0">
+                <a:latin typeface="Calibri" panose="020F0502020204030204" pitchFamily="34" charset="0"/>
+                <a:cs typeface="Calibri" panose="020F0502020204030204" pitchFamily="34" charset="0"/>
+              </a:rPr>
+              <a:t>        the current vertex</a:t>
+            </a:r>
+          </a:p>
+          <a:p>
+            <a:pPr marL="0" indent="0">
+              <a:buNone/>
+            </a:pPr>
+            <a:r>
+              <a:rPr lang="en-US" altLang="ja-JP" sz="2600" dirty="0">
+                <a:latin typeface="Calibri" panose="020F0502020204030204" pitchFamily="34" charset="0"/>
+                <a:cs typeface="Calibri" panose="020F0502020204030204" pitchFamily="34" charset="0"/>
+              </a:rPr>
+              <a:t>        → Combine their contributions</a:t>
+            </a:r>
+          </a:p>
+          <a:p>
+            <a:pPr marL="0" indent="0">
+              <a:buNone/>
+            </a:pPr>
+            <a:endParaRPr lang="en-US" altLang="ja-JP" sz="2600" dirty="0">
+              <a:latin typeface="Calibri" panose="020F0502020204030204" pitchFamily="34" charset="0"/>
+              <a:cs typeface="Calibri" panose="020F0502020204030204" pitchFamily="34" charset="0"/>
+            </a:endParaRPr>
+          </a:p>
+          <a:p>
+            <a:pPr marL="0" indent="0">
+              <a:buNone/>
+            </a:pPr>
+            <a:endParaRPr lang="en-US" altLang="ja-JP" sz="2600" dirty="0">
+              <a:latin typeface="Calibri" panose="020F0502020204030204" pitchFamily="34" charset="0"/>
+              <a:cs typeface="Calibri" panose="020F0502020204030204" pitchFamily="34" charset="0"/>
+            </a:endParaRPr>
+          </a:p>
+          <a:p>
+            <a:pPr marL="0" indent="0">
+              <a:buNone/>
+            </a:pPr>
+            <a:endParaRPr lang="en-US" altLang="ja-JP" sz="2600" dirty="0">
+              <a:latin typeface="Calibri" panose="020F0502020204030204" pitchFamily="34" charset="0"/>
+              <a:cs typeface="Calibri" panose="020F0502020204030204" pitchFamily="34" charset="0"/>
+            </a:endParaRPr>
+          </a:p>
+        </p:txBody>
+      </p:sp>
+      <p:pic>
+        <p:nvPicPr>
+          <p:cNvPr id="5" name="図 4">
+            <a:extLst>
+              <a:ext uri="{FF2B5EF4-FFF2-40B4-BE49-F238E27FC236}">
+                <a16:creationId xmlns:a16="http://schemas.microsoft.com/office/drawing/2014/main" id="{14CF92EE-3E56-5959-78EC-FCB64F23F6FE}"/>
+              </a:ext>
+            </a:extLst>
+          </p:cNvPr>
+          <p:cNvPicPr>
+            <a:picLocks noChangeAspect="1"/>
+          </p:cNvPicPr>
+          <p:nvPr/>
+        </p:nvPicPr>
+        <p:blipFill>
+          <a:blip r:embed="rId2"/>
+          <a:stretch>
+            <a:fillRect/>
+          </a:stretch>
+        </p:blipFill>
+        <p:spPr>
+          <a:xfrm>
+            <a:off x="7265090" y="1258677"/>
+            <a:ext cx="4562475" cy="5228426"/>
+          </a:xfrm>
+          <a:prstGeom prst="rect">
+            <a:avLst/>
+          </a:prstGeom>
+        </p:spPr>
+      </p:pic>
     </p:spTree>
     <p:extLst>
       <p:ext uri="{BB962C8B-B14F-4D97-AF65-F5344CB8AC3E}">
-        <p14:creationId xmlns:p14="http://schemas.microsoft.com/office/powerpoint/2010/main" val="739186433"/>
+        <p14:creationId xmlns:p14="http://schemas.microsoft.com/office/powerpoint/2010/main" val="1193298172"/>
       </p:ext>
     </p:extLst>
   </p:cSld>

--- a/Light Transport Simulation with Vertex Connection and Merging.pptx
+++ b/Light Transport Simulation with Vertex Connection and Merging.pptx
@@ -212,7 +212,7 @@
           <a:p>
             <a:fld id="{7893D133-823F-4F52-B028-FA93482B56DD}" type="datetimeFigureOut">
               <a:rPr kumimoji="1" lang="ja-JP" altLang="en-US" smtClean="0"/>
-              <a:t>2026/3/24</a:t>
+              <a:t>2026/3/25</a:t>
             </a:fld>
             <a:endParaRPr kumimoji="1" lang="ja-JP" altLang="en-US"/>
           </a:p>
@@ -802,7 +802,7 @@
           <a:p>
             <a:fld id="{24B1D04C-D4F9-452A-B906-F9D2E05F382E}" type="datetimeFigureOut">
               <a:rPr kumimoji="1" lang="ja-JP" altLang="en-US" smtClean="0"/>
-              <a:t>2026/3/24</a:t>
+              <a:t>2026/3/25</a:t>
             </a:fld>
             <a:endParaRPr kumimoji="1" lang="ja-JP" altLang="en-US"/>
           </a:p>
@@ -1032,7 +1032,7 @@
           <a:p>
             <a:fld id="{24B1D04C-D4F9-452A-B906-F9D2E05F382E}" type="datetimeFigureOut">
               <a:rPr kumimoji="1" lang="ja-JP" altLang="en-US" smtClean="0"/>
-              <a:t>2026/3/24</a:t>
+              <a:t>2026/3/25</a:t>
             </a:fld>
             <a:endParaRPr kumimoji="1" lang="ja-JP" altLang="en-US"/>
           </a:p>
@@ -1272,7 +1272,7 @@
           <a:p>
             <a:fld id="{24B1D04C-D4F9-452A-B906-F9D2E05F382E}" type="datetimeFigureOut">
               <a:rPr kumimoji="1" lang="ja-JP" altLang="en-US" smtClean="0"/>
-              <a:t>2026/3/24</a:t>
+              <a:t>2026/3/25</a:t>
             </a:fld>
             <a:endParaRPr kumimoji="1" lang="ja-JP" altLang="en-US"/>
           </a:p>
@@ -1492,7 +1492,7 @@
           <a:p>
             <a:fld id="{9C16B395-6D35-4546-B294-FB06DF790840}" type="datetime1">
               <a:rPr kumimoji="1" lang="ja-JP" altLang="en-US" smtClean="0"/>
-              <a:t>2026/3/24</a:t>
+              <a:t>2026/3/25</a:t>
             </a:fld>
             <a:endParaRPr kumimoji="1" lang="ja-JP" altLang="en-US"/>
           </a:p>
@@ -2074,7 +2074,7 @@
           <a:p>
             <a:fld id="{A817B2B4-6A7D-4731-81DC-57610CFA3027}" type="datetime1">
               <a:rPr kumimoji="1" lang="ja-JP" altLang="en-US" smtClean="0"/>
-              <a:t>2026/3/24</a:t>
+              <a:t>2026/3/25</a:t>
             </a:fld>
             <a:endParaRPr kumimoji="1" lang="ja-JP" altLang="en-US"/>
           </a:p>
@@ -2411,7 +2411,7 @@
           <a:p>
             <a:fld id="{EF1036F0-5381-44E0-A015-CBD42EDBEC45}" type="datetime1">
               <a:rPr kumimoji="1" lang="ja-JP" altLang="en-US" smtClean="0"/>
-              <a:t>2026/3/24</a:t>
+              <a:t>2026/3/25</a:t>
             </a:fld>
             <a:endParaRPr kumimoji="1" lang="ja-JP" altLang="en-US"/>
           </a:p>
@@ -2895,7 +2895,7 @@
           <a:p>
             <a:fld id="{6CAA4E38-B061-47C5-9F79-5A9746F5CDE5}" type="datetime1">
               <a:rPr kumimoji="1" lang="ja-JP" altLang="en-US" smtClean="0"/>
-              <a:t>2026/3/24</a:t>
+              <a:t>2026/3/25</a:t>
             </a:fld>
             <a:endParaRPr kumimoji="1" lang="ja-JP" altLang="en-US"/>
           </a:p>
@@ -3044,7 +3044,7 @@
           <a:p>
             <a:fld id="{03871810-0526-4256-939F-2D28DFA5615F}" type="datetime1">
               <a:rPr kumimoji="1" lang="ja-JP" altLang="en-US" smtClean="0"/>
-              <a:t>2026/3/24</a:t>
+              <a:t>2026/3/25</a:t>
             </a:fld>
             <a:endParaRPr kumimoji="1" lang="ja-JP" altLang="en-US"/>
           </a:p>
@@ -3165,7 +3165,7 @@
           <a:p>
             <a:fld id="{D29D8516-8AC0-44E8-AB68-6CE99A3A52CB}" type="datetime1">
               <a:rPr kumimoji="1" lang="ja-JP" altLang="en-US" smtClean="0"/>
-              <a:t>2026/3/24</a:t>
+              <a:t>2026/3/25</a:t>
             </a:fld>
             <a:endParaRPr kumimoji="1" lang="ja-JP" altLang="en-US"/>
           </a:p>
@@ -3516,7 +3516,7 @@
           <a:p>
             <a:fld id="{BA0A23C2-F706-4F84-B465-CA89DAFBC4C2}" type="datetime1">
               <a:rPr kumimoji="1" lang="ja-JP" altLang="en-US" smtClean="0"/>
-              <a:t>2026/3/24</a:t>
+              <a:t>2026/3/25</a:t>
             </a:fld>
             <a:endParaRPr kumimoji="1" lang="ja-JP" altLang="en-US"/>
           </a:p>
@@ -3754,7 +3754,7 @@
           <a:p>
             <a:fld id="{24B1D04C-D4F9-452A-B906-F9D2E05F382E}" type="datetimeFigureOut">
               <a:rPr kumimoji="1" lang="ja-JP" altLang="en-US" smtClean="0"/>
-              <a:t>2026/3/24</a:t>
+              <a:t>2026/3/25</a:t>
             </a:fld>
             <a:endParaRPr kumimoji="1" lang="ja-JP" altLang="en-US"/>
           </a:p>
@@ -4042,7 +4042,7 @@
           <a:p>
             <a:fld id="{9B12DFBC-01E8-4E3B-A4B2-3042EC8BF00A}" type="datetime1">
               <a:rPr kumimoji="1" lang="ja-JP" altLang="en-US" smtClean="0"/>
-              <a:t>2026/3/24</a:t>
+              <a:t>2026/3/25</a:t>
             </a:fld>
             <a:endParaRPr kumimoji="1" lang="ja-JP" altLang="en-US"/>
           </a:p>
@@ -4280,7 +4280,7 @@
           <a:p>
             <a:fld id="{B1396C80-74FC-4B1B-8EAB-5BA2D3324131}" type="datetime1">
               <a:rPr kumimoji="1" lang="ja-JP" altLang="en-US" smtClean="0"/>
-              <a:t>2026/3/24</a:t>
+              <a:t>2026/3/25</a:t>
             </a:fld>
             <a:endParaRPr kumimoji="1" lang="ja-JP" altLang="en-US"/>
           </a:p>
@@ -4528,7 +4528,7 @@
           <a:p>
             <a:fld id="{B56F111B-B7F2-4AFA-B2AD-22DD0AE2FAAF}" type="datetime1">
               <a:rPr kumimoji="1" lang="ja-JP" altLang="en-US" smtClean="0"/>
-              <a:t>2026/3/24</a:t>
+              <a:t>2026/3/25</a:t>
             </a:fld>
             <a:endParaRPr kumimoji="1" lang="ja-JP" altLang="en-US"/>
           </a:p>
@@ -4811,7 +4811,7 @@
           <a:p>
             <a:fld id="{24B1D04C-D4F9-452A-B906-F9D2E05F382E}" type="datetimeFigureOut">
               <a:rPr kumimoji="1" lang="ja-JP" altLang="en-US" smtClean="0"/>
-              <a:t>2026/3/24</a:t>
+              <a:t>2026/3/25</a:t>
             </a:fld>
             <a:endParaRPr kumimoji="1" lang="ja-JP" altLang="en-US"/>
           </a:p>
@@ -5140,7 +5140,7 @@
           <a:p>
             <a:fld id="{24B1D04C-D4F9-452A-B906-F9D2E05F382E}" type="datetimeFigureOut">
               <a:rPr kumimoji="1" lang="ja-JP" altLang="en-US" smtClean="0"/>
-              <a:t>2026/3/24</a:t>
+              <a:t>2026/3/25</a:t>
             </a:fld>
             <a:endParaRPr kumimoji="1" lang="ja-JP" altLang="en-US"/>
           </a:p>
@@ -5616,7 +5616,7 @@
           <a:p>
             <a:fld id="{24B1D04C-D4F9-452A-B906-F9D2E05F382E}" type="datetimeFigureOut">
               <a:rPr kumimoji="1" lang="ja-JP" altLang="en-US" smtClean="0"/>
-              <a:t>2026/3/24</a:t>
+              <a:t>2026/3/25</a:t>
             </a:fld>
             <a:endParaRPr kumimoji="1" lang="ja-JP" altLang="en-US"/>
           </a:p>
@@ -5757,7 +5757,7 @@
           <a:p>
             <a:fld id="{24B1D04C-D4F9-452A-B906-F9D2E05F382E}" type="datetimeFigureOut">
               <a:rPr kumimoji="1" lang="ja-JP" altLang="en-US" smtClean="0"/>
-              <a:t>2026/3/24</a:t>
+              <a:t>2026/3/25</a:t>
             </a:fld>
             <a:endParaRPr kumimoji="1" lang="ja-JP" altLang="en-US"/>
           </a:p>
@@ -5870,7 +5870,7 @@
           <a:p>
             <a:fld id="{24B1D04C-D4F9-452A-B906-F9D2E05F382E}" type="datetimeFigureOut">
               <a:rPr kumimoji="1" lang="ja-JP" altLang="en-US" smtClean="0"/>
-              <a:t>2026/3/24</a:t>
+              <a:t>2026/3/25</a:t>
             </a:fld>
             <a:endParaRPr kumimoji="1" lang="ja-JP" altLang="en-US"/>
           </a:p>
@@ -6213,7 +6213,7 @@
           <a:p>
             <a:fld id="{24B1D04C-D4F9-452A-B906-F9D2E05F382E}" type="datetimeFigureOut">
               <a:rPr kumimoji="1" lang="ja-JP" altLang="en-US" smtClean="0"/>
-              <a:t>2026/3/24</a:t>
+              <a:t>2026/3/25</a:t>
             </a:fld>
             <a:endParaRPr kumimoji="1" lang="ja-JP" altLang="en-US"/>
           </a:p>
@@ -6501,7 +6501,7 @@
           <a:p>
             <a:fld id="{24B1D04C-D4F9-452A-B906-F9D2E05F382E}" type="datetimeFigureOut">
               <a:rPr kumimoji="1" lang="ja-JP" altLang="en-US" smtClean="0"/>
-              <a:t>2026/3/24</a:t>
+              <a:t>2026/3/25</a:t>
             </a:fld>
             <a:endParaRPr kumimoji="1" lang="ja-JP" altLang="en-US"/>
           </a:p>
@@ -6774,7 +6774,7 @@
           <a:p>
             <a:fld id="{24B1D04C-D4F9-452A-B906-F9D2E05F382E}" type="datetimeFigureOut">
               <a:rPr kumimoji="1" lang="ja-JP" altLang="en-US" smtClean="0"/>
-              <a:t>2026/3/24</a:t>
+              <a:t>2026/3/25</a:t>
             </a:fld>
             <a:endParaRPr kumimoji="1" lang="ja-JP" altLang="en-US"/>
           </a:p>
@@ -7374,7 +7374,7 @@
           <a:p>
             <a:fld id="{8527487B-C611-4154-9D77-DC08D179CD6C}" type="datetime1">
               <a:rPr kumimoji="1" lang="ja-JP" altLang="en-US" smtClean="0"/>
-              <a:t>2026/3/24</a:t>
+              <a:t>2026/3/25</a:t>
             </a:fld>
             <a:endParaRPr kumimoji="1" lang="ja-JP" altLang="en-US"/>
           </a:p>
@@ -8770,8 +8770,8 @@
           </a:p>
         </p:txBody>
       </p:sp>
-      <mc:AlternateContent xmlns:mc="http://schemas.openxmlformats.org/markup-compatibility/2006">
-        <mc:Choice xmlns:a14="http://schemas.microsoft.com/office/drawing/2010/main" Requires="a14">
+      <mc:AlternateContent xmlns:mc="http://schemas.openxmlformats.org/markup-compatibility/2006" xmlns:a14="http://schemas.microsoft.com/office/drawing/2010/main">
+        <mc:Choice Requires="a14">
           <p:sp>
             <p:nvSpPr>
               <p:cNvPr id="3" name="コンテンツ プレースホルダー 2">
@@ -9014,7 +9014,7 @@
             </p:txBody>
           </p:sp>
         </mc:Choice>
-        <mc:Fallback>
+        <mc:Fallback xmlns="">
           <p:sp>
             <p:nvSpPr>
               <p:cNvPr id="3" name="コンテンツ プレースホルダー 2">
@@ -9059,8 +9059,8 @@
           </p:sp>
         </mc:Fallback>
       </mc:AlternateContent>
-      <mc:AlternateContent xmlns:mc="http://schemas.openxmlformats.org/markup-compatibility/2006">
-        <mc:Choice xmlns:a14="http://schemas.microsoft.com/office/drawing/2010/main" Requires="a14">
+      <mc:AlternateContent xmlns:mc="http://schemas.openxmlformats.org/markup-compatibility/2006" xmlns:a14="http://schemas.microsoft.com/office/drawing/2010/main">
+        <mc:Choice Requires="a14">
           <p:sp>
             <p:nvSpPr>
               <p:cNvPr id="7" name="テキスト ボックス 6">
@@ -9089,6 +9089,7 @@
               </a:bodyPr>
               <a:lstStyle/>
               <a:p>
+                <a:pPr/>
                 <a14:m>
                   <m:oMathPara xmlns:m="http://schemas.openxmlformats.org/officeDocument/2006/math">
                     <m:oMathParaPr>
@@ -9193,13 +9194,7 @@
                                 <a:rPr kumimoji="1" lang="en-US" altLang="ja-JP" sz="2400" b="0" i="1" smtClean="0">
                                   <a:latin typeface="Cambria Math" panose="02040503050406030204" pitchFamily="18" charset="0"/>
                                 </a:rPr>
-                                <m:t>−</m:t>
-                              </m:r>
-                              <m:r>
-                                <a:rPr kumimoji="1" lang="en-US" altLang="ja-JP" sz="2400" b="0" i="1" smtClean="0">
-                                  <a:latin typeface="Cambria Math" panose="02040503050406030204" pitchFamily="18" charset="0"/>
-                                </a:rPr>
-                                <m:t>1</m:t>
+                                <m:t>−1</m:t>
                               </m:r>
                             </m:num>
                             <m:den>
@@ -9221,7 +9216,7 @@
             </p:txBody>
           </p:sp>
         </mc:Choice>
-        <mc:Fallback>
+        <mc:Fallback xmlns="">
           <p:sp>
             <p:nvSpPr>
               <p:cNvPr id="7" name="テキスト ボックス 6">
@@ -9305,12 +9300,6 @@
                       </a:rPr>
                       <m:t>𝑖</m:t>
                     </m:r>
-                    <m:r>
-                      <a:rPr kumimoji="1" lang="en-US" altLang="ja-JP" sz="2000" b="0" i="0" smtClean="0">
-                        <a:latin typeface="Cambria Math" panose="02040503050406030204" pitchFamily="18" charset="0"/>
-                      </a:rPr>
-                      <m:t>-</m:t>
-                    </m:r>
                   </m:oMath>
                 </a14:m>
                 <a:r>
@@ -9319,7 +9308,7 @@
                     <a:ea typeface="Calibri" panose="020F0502020204030204" pitchFamily="34" charset="0"/>
                     <a:cs typeface="Calibri" panose="020F0502020204030204" pitchFamily="34" charset="0"/>
                   </a:rPr>
-                  <a:t>th iteration’s search radius </a:t>
+                  <a:t>-th iteration’s search radius </a:t>
                 </a:r>
                 <a:br>
                   <a:rPr kumimoji="1" lang="en-US" altLang="ja-JP" sz="2000" dirty="0">
@@ -9392,7 +9381,7 @@
               <a:blipFill>
                 <a:blip r:embed="rId4"/>
                 <a:stretch>
-                  <a:fillRect t="-5172" r="-1115" b="-14655"/>
+                  <a:fillRect t="-5172" r="-743" b="-14655"/>
                 </a:stretch>
               </a:blipFill>
             </p:spPr>
@@ -9703,14 +9692,7 @@
                             <a:latin typeface="Cambria Math" panose="02040503050406030204" pitchFamily="18" charset="0"/>
                             <a:cs typeface="Calibri" panose="020F0502020204030204" pitchFamily="34" charset="0"/>
                           </a:rPr>
-                          <m:t>-</m:t>
-                        </m:r>
-                        <m:r>
-                          <a:rPr lang="en-US" altLang="ja-JP" sz="2400" b="0" i="1" smtClean="0">
-                            <a:latin typeface="Cambria Math" panose="02040503050406030204" pitchFamily="18" charset="0"/>
-                            <a:cs typeface="Calibri" panose="020F0502020204030204" pitchFamily="34" charset="0"/>
-                          </a:rPr>
-                          <m:t>1</m:t>
+                          <m:t>−1</m:t>
                         </m:r>
                       </m:sup>
                     </m:sSup>
@@ -9741,7 +9723,7 @@
                     <a:latin typeface="Calibri" panose="020F0502020204030204" pitchFamily="34" charset="0"/>
                     <a:cs typeface="Calibri" panose="020F0502020204030204" pitchFamily="34" charset="0"/>
                   </a:rPr>
-                  <a:t>in paths can be sampled using BPT, such as diffuse and glossy reflections, </a:t>
+                  <a:t>in paths can be sampled using BPT, such as diffuse and glossy reflections </a:t>
                 </a:r>
               </a:p>
               <a:p>
@@ -9782,14 +9764,7 @@
                             <a:latin typeface="Cambria Math" panose="02040503050406030204" pitchFamily="18" charset="0"/>
                             <a:cs typeface="Calibri" panose="020F0502020204030204" pitchFamily="34" charset="0"/>
                           </a:rPr>
-                          <m:t>-</m:t>
-                        </m:r>
-                        <m:r>
-                          <a:rPr lang="en-US" altLang="ja-JP" sz="2400" b="0" i="1" smtClean="0">
-                            <a:latin typeface="Cambria Math" panose="02040503050406030204" pitchFamily="18" charset="0"/>
-                            <a:cs typeface="Calibri" panose="020F0502020204030204" pitchFamily="34" charset="0"/>
-                          </a:rPr>
-                          <m:t>2</m:t>
+                          <m:t>−2</m:t>
                         </m:r>
                         <m:r>
                           <m:rPr>
@@ -12343,7 +12318,7 @@
                 <a:latin typeface="Calibri" panose="020F0502020204030204" pitchFamily="34" charset="0"/>
                 <a:cs typeface="Calibri" panose="020F0502020204030204" pitchFamily="34" charset="0"/>
               </a:rPr>
-              <a:t>  [accessed 21 Mar 2026]</a:t>
+              <a:t> </a:t>
             </a:r>
           </a:p>
           <a:p>
@@ -15641,8 +15616,8 @@
           </a:p>
         </p:txBody>
       </p:sp>
-      <mc:AlternateContent xmlns:mc="http://schemas.openxmlformats.org/markup-compatibility/2006">
-        <mc:Choice xmlns:a14="http://schemas.microsoft.com/office/drawing/2010/main" Requires="a14">
+      <mc:AlternateContent xmlns:mc="http://schemas.openxmlformats.org/markup-compatibility/2006" xmlns:a14="http://schemas.microsoft.com/office/drawing/2010/main">
+        <mc:Choice Requires="a14">
           <p:sp>
             <p:nvSpPr>
               <p:cNvPr id="6" name="コンテンツ プレースホルダー 2">
@@ -15909,7 +15884,14 @@
                         <a:latin typeface="Cambria Math" panose="02040503050406030204" pitchFamily="18" charset="0"/>
                         <a:cs typeface="Calibri" panose="020F0502020204030204" pitchFamily="34" charset="0"/>
                       </a:rPr>
-                      <m:t>+2</m:t>
+                      <m:t>+</m:t>
+                    </m:r>
+                    <m:r>
+                      <a:rPr lang="en-US" altLang="ja-JP" sz="2600" b="0" i="1" smtClean="0">
+                        <a:latin typeface="Cambria Math" panose="02040503050406030204" pitchFamily="18" charset="0"/>
+                        <a:cs typeface="Calibri" panose="020F0502020204030204" pitchFamily="34" charset="0"/>
+                      </a:rPr>
+                      <m:t>2</m:t>
                     </m:r>
                   </m:oMath>
                 </a14:m>
@@ -15944,7 +15926,14 @@
                         <a:latin typeface="Cambria Math" panose="02040503050406030204" pitchFamily="18" charset="0"/>
                         <a:cs typeface="Calibri" panose="020F0502020204030204" pitchFamily="34" charset="0"/>
                       </a:rPr>
-                      <m:t>+1</m:t>
+                      <m:t>+</m:t>
+                    </m:r>
+                    <m:r>
+                      <a:rPr lang="en-US" altLang="ja-JP" sz="2600" b="0" i="1" dirty="0" smtClean="0">
+                        <a:latin typeface="Cambria Math" panose="02040503050406030204" pitchFamily="18" charset="0"/>
+                        <a:cs typeface="Calibri" panose="020F0502020204030204" pitchFamily="34" charset="0"/>
+                      </a:rPr>
+                      <m:t>1</m:t>
                     </m:r>
                   </m:oMath>
                 </a14:m>
@@ -15956,7 +15945,7 @@
             </p:txBody>
           </p:sp>
         </mc:Choice>
-        <mc:Fallback>
+        <mc:Fallback xmlns="">
           <p:sp>
             <p:nvSpPr>
               <p:cNvPr id="6" name="コンテンツ プレースホルダー 2">
@@ -16031,8 +16020,8 @@
           </a:prstGeom>
         </p:spPr>
       </p:pic>
-      <mc:AlternateContent xmlns:mc="http://schemas.openxmlformats.org/markup-compatibility/2006">
-        <mc:Choice xmlns:a14="http://schemas.microsoft.com/office/drawing/2010/main" Requires="a14">
+      <mc:AlternateContent xmlns:mc="http://schemas.openxmlformats.org/markup-compatibility/2006" xmlns:a14="http://schemas.microsoft.com/office/drawing/2010/main">
+        <mc:Choice Requires="a14">
           <p:sp>
             <p:nvSpPr>
               <p:cNvPr id="14" name="テキスト ボックス 13">
@@ -16178,7 +16167,13 @@
                             <a:rPr kumimoji="1" lang="en-US" altLang="ja-JP" sz="2400" b="0" i="1" smtClean="0">
                               <a:latin typeface="Cambria Math" panose="02040503050406030204" pitchFamily="18" charset="0"/>
                             </a:rPr>
-                            <m:t>−1</m:t>
+                            <m:t>−</m:t>
+                          </m:r>
+                          <m:r>
+                            <a:rPr kumimoji="1" lang="en-US" altLang="ja-JP" sz="2400" b="0" i="1" smtClean="0">
+                              <a:latin typeface="Cambria Math" panose="02040503050406030204" pitchFamily="18" charset="0"/>
+                            </a:rPr>
+                            <m:t>1</m:t>
                           </m:r>
                         </m:sub>
                       </m:sSub>
@@ -16320,7 +16315,7 @@
             </p:txBody>
           </p:sp>
         </mc:Choice>
-        <mc:Fallback>
+        <mc:Fallback xmlns="">
           <p:sp>
             <p:nvSpPr>
               <p:cNvPr id="14" name="テキスト ボックス 13">
@@ -16412,8 +16407,8 @@
           </a:extLst>
         </p:spPr>
       </p:pic>
-      <mc:AlternateContent xmlns:mc="http://schemas.openxmlformats.org/markup-compatibility/2006">
-        <mc:Choice xmlns:a14="http://schemas.microsoft.com/office/drawing/2010/main" Requires="a14">
+      <mc:AlternateContent xmlns:mc="http://schemas.openxmlformats.org/markup-compatibility/2006" xmlns:a14="http://schemas.microsoft.com/office/drawing/2010/main">
+        <mc:Choice Requires="a14">
           <p:sp>
             <p:nvSpPr>
               <p:cNvPr id="16" name="テキスト ボックス 15">
@@ -16472,7 +16467,7 @@
             </p:txBody>
           </p:sp>
         </mc:Choice>
-        <mc:Fallback>
+        <mc:Fallback xmlns="">
           <p:sp>
             <p:nvSpPr>
               <p:cNvPr id="16" name="テキスト ボックス 15">
